--- a/output/wordlabs-express-3day.pptx
+++ b/output/wordlabs-express-3day.pptx
@@ -4240,7 +4240,7 @@
                 <a:ea typeface="Calibri" pitchFamily="34" charset="-122"/>
                 <a:cs typeface="Calibri" pitchFamily="34" charset="-120"/>
               </a:rPr>
-              <a:t>"to push or press out"</a:t>
+              <a:t>"to push or squeeze out"</a:t>
             </a:r>
             <a:endParaRPr lang="en-US" sz="2200" dirty="0"/>
           </a:p>
@@ -5288,7 +5288,7 @@
                 <a:ea typeface="Calibri" pitchFamily="34" charset="-122"/>
                 <a:cs typeface="Calibri" pitchFamily="34" charset="-120"/>
               </a:rPr>
-              <a:t>Word Labs  •  wordlabs.app  •  Root: 'express' = to push or press out</a:t>
+              <a:t>Word Labs  •  wordlabs.app  •  Root: 'express' = to push or squeeze out</a:t>
             </a:r>
             <a:endParaRPr lang="en-US" sz="800" dirty="0"/>
           </a:p>
@@ -5928,7 +5928,7 @@
                 <a:ea typeface="Calibri" pitchFamily="34" charset="-122"/>
                 <a:cs typeface="Calibri" pitchFamily="34" charset="-120"/>
               </a:rPr>
-              <a:t>Word Labs  •  wordlabs.app  •  Root: 'express' = to push or press out</a:t>
+              <a:t>Word Labs  •  wordlabs.app  •  Root: 'express' = to push or squeeze out</a:t>
             </a:r>
             <a:endParaRPr lang="en-US" sz="800" dirty="0"/>
           </a:p>
@@ -6071,7 +6071,7 @@
                 <a:ea typeface="Calibri" pitchFamily="34" charset="-122"/>
                 <a:cs typeface="Calibri" pitchFamily="34" charset="-120"/>
               </a:rPr>
-              <a:t> dance moves helped her </a:t>
+              <a:t> painting helped her share the </a:t>
             </a:r>
             <a:pPr algn="l" indent="0" marL="0">
               <a:buNone/>
@@ -6088,7 +6088,7 @@
                 <a:ea typeface="Calibri" pitchFamily="34" charset="-122"/>
                 <a:cs typeface="Calibri" pitchFamily="34" charset="-120"/>
               </a:rPr>
-              <a:t>expression</a:t>
+              <a:t>inexpressible</a:t>
             </a:r>
             <a:pPr algn="l" indent="0" marL="0">
               <a:buNone/>
@@ -6102,7 +6102,7 @@
                 <a:ea typeface="Calibri" pitchFamily="34" charset="-122"/>
                 <a:cs typeface="Calibri" pitchFamily="34" charset="-120"/>
               </a:rPr>
-              <a:t> of joy shine through to the audience.</a:t>
+              <a:t> sadness she felt inside.</a:t>
             </a:r>
             <a:endParaRPr lang="en-US" sz="1800" dirty="0"/>
           </a:p>
@@ -6385,7 +6385,7 @@
                 <a:ea typeface="Trebuchet MS" pitchFamily="34" charset="-122"/>
                 <a:cs typeface="Trebuchet MS" pitchFamily="34" charset="-120"/>
               </a:rPr>
-              <a:t>expression</a:t>
+              <a:t>inexpressible</a:t>
             </a:r>
             <a:endParaRPr lang="en-US" sz="1400" dirty="0"/>
           </a:p>
@@ -6716,7 +6716,7 @@
                 <a:ea typeface="Calibri" pitchFamily="34" charset="-122"/>
                 <a:cs typeface="Calibri" pitchFamily="34" charset="-120"/>
               </a:rPr>
-              <a:t>Word Labs  •  wordlabs.app  •  Root: 'express' = to push or press out</a:t>
+              <a:t>Word Labs  •  wordlabs.app  •  Root: 'express' = to push or squeeze out</a:t>
             </a:r>
             <a:endParaRPr lang="en-US" sz="800" dirty="0"/>
           </a:p>
@@ -7543,7 +7543,7 @@
                 <a:ea typeface="Calibri" pitchFamily="34" charset="-122"/>
                 <a:cs typeface="Calibri" pitchFamily="34" charset="-120"/>
               </a:rPr>
-              <a:t>Word Labs  •  wordlabs.app  •  Root: 'express' = to push or press out</a:t>
+              <a:t>Word Labs  •  wordlabs.app  •  Root: 'express' = to push or squeeze out</a:t>
             </a:r>
             <a:endParaRPr lang="en-US" sz="800" dirty="0"/>
           </a:p>
@@ -7860,7 +7860,7 @@
                 <a:ea typeface="Calibri" pitchFamily="34" charset="-122"/>
                 <a:cs typeface="Calibri" pitchFamily="34" charset="-120"/>
               </a:rPr>
-              <a:t>to push or press out</a:t>
+              <a:t>to push or squeeze out</a:t>
             </a:r>
             <a:endParaRPr lang="en-US" sz="850" dirty="0"/>
           </a:p>
@@ -8528,7 +8528,7 @@
                 <a:ea typeface="Calibri" pitchFamily="34" charset="-122"/>
                 <a:cs typeface="Calibri" pitchFamily="34" charset="-120"/>
               </a:rPr>
-              <a:t>Word Labs  •  wordlabs.app  •  Root: 'express' = to push or press out</a:t>
+              <a:t>Word Labs  •  wordlabs.app  •  Root: 'express' = to push or squeeze out</a:t>
             </a:r>
             <a:endParaRPr lang="en-US" sz="800" dirty="0"/>
           </a:p>
@@ -8845,7 +8845,7 @@
                 <a:ea typeface="Calibri" pitchFamily="34" charset="-122"/>
                 <a:cs typeface="Calibri" pitchFamily="34" charset="-120"/>
               </a:rPr>
-              <a:t>to push or press out</a:t>
+              <a:t>to push or squeeze out</a:t>
             </a:r>
             <a:endParaRPr lang="en-US" sz="850" dirty="0"/>
           </a:p>
@@ -9750,7 +9750,7 @@
                 <a:ea typeface="Calibri" pitchFamily="34" charset="-122"/>
                 <a:cs typeface="Calibri" pitchFamily="34" charset="-120"/>
               </a:rPr>
-              <a:t>Word Labs  •  wordlabs.app  •  Root: 'express' = to push or press out</a:t>
+              <a:t>Word Labs  •  wordlabs.app  •  Root: 'express' = to push or squeeze out</a:t>
             </a:r>
             <a:endParaRPr lang="en-US" sz="800" dirty="0"/>
           </a:p>
@@ -10067,7 +10067,7 @@
                 <a:ea typeface="Calibri" pitchFamily="34" charset="-122"/>
                 <a:cs typeface="Calibri" pitchFamily="34" charset="-120"/>
               </a:rPr>
-              <a:t>to push or press out</a:t>
+              <a:t>to push or squeeze out</a:t>
             </a:r>
             <a:endParaRPr lang="en-US" sz="850" dirty="0"/>
           </a:p>
@@ -11566,7 +11566,7 @@
                 <a:ea typeface="Calibri" pitchFamily="34" charset="-122"/>
                 <a:cs typeface="Calibri" pitchFamily="34" charset="-120"/>
               </a:rPr>
-              <a:t>Word Labs  •  wordlabs.app  •  Root: 'express' = to push or press out</a:t>
+              <a:t>Word Labs  •  wordlabs.app  •  Root: 'express' = to push or squeeze out</a:t>
             </a:r>
             <a:endParaRPr lang="en-US" sz="800" dirty="0"/>
           </a:p>
@@ -11705,7 +11705,7 @@
                 <a:ea typeface="Trebuchet MS" pitchFamily="34" charset="-122"/>
                 <a:cs typeface="Trebuchet MS" pitchFamily="34" charset="-120"/>
               </a:rPr>
-              <a:t>expression</a:t>
+              <a:t>inexpressible</a:t>
             </a:r>
             <a:endParaRPr lang="en-US" sz="2800" dirty="0"/>
           </a:p>
@@ -12393,7 +12393,7 @@
                 <a:ea typeface="Calibri" pitchFamily="34" charset="-122"/>
                 <a:cs typeface="Calibri" pitchFamily="34" charset="-120"/>
               </a:rPr>
-              <a:t>Word Labs  •  wordlabs.app  •  Root: 'express' = to push or press out</a:t>
+              <a:t>Word Labs  •  wordlabs.app  •  Root: 'express' = to push or squeeze out</a:t>
             </a:r>
             <a:endParaRPr lang="en-US" sz="800" dirty="0"/>
           </a:p>
@@ -12532,7 +12532,7 @@
                 <a:ea typeface="Trebuchet MS" pitchFamily="34" charset="-122"/>
                 <a:cs typeface="Trebuchet MS" pitchFamily="34" charset="-120"/>
               </a:rPr>
-              <a:t>expression</a:t>
+              <a:t>inexpressible</a:t>
             </a:r>
             <a:endParaRPr lang="en-US" sz="2800" dirty="0"/>
           </a:p>
@@ -12612,7 +12612,7 @@
         </p:nvSpPr>
         <p:spPr>
           <a:xfrm>
-            <a:off x="2938272" y="2258568"/>
+            <a:off x="2221992" y="2258568"/>
             <a:ext cx="1828800" cy="292608"/>
           </a:xfrm>
           <a:prstGeom prst="rect">
@@ -12621,11 +12621,11 @@
             </a:avLst>
           </a:prstGeom>
           <a:solidFill>
-            <a:srgbClr val="CCFBF1"/>
+            <a:srgbClr val="DDD6FE"/>
           </a:solidFill>
           <a:ln w="19050">
             <a:solidFill>
-              <a:srgbClr val="0D9488"/>
+              <a:srgbClr val="7C3AED"/>
             </a:solidFill>
             <a:prstDash val="solid"/>
           </a:ln>
@@ -12646,7 +12646,7 @@
         </p:nvSpPr>
         <p:spPr>
           <a:xfrm>
-            <a:off x="2938272" y="2258568"/>
+            <a:off x="2221992" y="2258568"/>
             <a:ext cx="1828800" cy="292608"/>
           </a:xfrm>
           <a:prstGeom prst="rect">
@@ -12665,13 +12665,13 @@
             <a:r>
               <a:rPr lang="en-US" sz="1300" b="1" dirty="0">
                 <a:solidFill>
-                  <a:srgbClr val="0F766E"/>
+                  <a:srgbClr val="4C1D95"/>
                 </a:solidFill>
                 <a:latin typeface="Trebuchet MS" pitchFamily="34" charset="0"/>
                 <a:ea typeface="Trebuchet MS" pitchFamily="34" charset="-122"/>
                 <a:cs typeface="Trebuchet MS" pitchFamily="34" charset="-120"/>
               </a:rPr>
-              <a:t>express</a:t>
+              <a:t>in</a:t>
             </a:r>
             <a:endParaRPr lang="en-US" sz="1300" dirty="0"/>
           </a:p>
@@ -12685,7 +12685,7 @@
         </p:nvSpPr>
         <p:spPr>
           <a:xfrm>
-            <a:off x="2938272" y="2569464"/>
+            <a:off x="2221992" y="2569464"/>
             <a:ext cx="1828800" cy="201168"/>
           </a:xfrm>
           <a:prstGeom prst="rect">
@@ -12710,7 +12710,7 @@
                 <a:ea typeface="Calibri" pitchFamily="34" charset="-122"/>
                 <a:cs typeface="Calibri" pitchFamily="34" charset="-120"/>
               </a:rPr>
-              <a:t>to push or press out</a:t>
+              <a:t>not</a:t>
             </a:r>
             <a:endParaRPr lang="en-US" sz="850" dirty="0"/>
           </a:p>
@@ -12724,7 +12724,7 @@
         </p:nvSpPr>
         <p:spPr>
           <a:xfrm>
-            <a:off x="5803392" y="2258568"/>
+            <a:off x="4370832" y="2258568"/>
             <a:ext cx="1828800" cy="292608"/>
           </a:xfrm>
           <a:prstGeom prst="rect">
@@ -12733,11 +12733,11 @@
             </a:avLst>
           </a:prstGeom>
           <a:solidFill>
-            <a:srgbClr val="FCE7F3"/>
+            <a:srgbClr val="CCFBF1"/>
           </a:solidFill>
           <a:ln w="19050">
             <a:solidFill>
-              <a:srgbClr val="DB2777"/>
+              <a:srgbClr val="0D9488"/>
             </a:solidFill>
             <a:prstDash val="solid"/>
           </a:ln>
@@ -12758,7 +12758,7 @@
         </p:nvSpPr>
         <p:spPr>
           <a:xfrm>
-            <a:off x="5803392" y="2258568"/>
+            <a:off x="4370832" y="2258568"/>
             <a:ext cx="1828800" cy="292608"/>
           </a:xfrm>
           <a:prstGeom prst="rect">
@@ -12777,13 +12777,13 @@
             <a:r>
               <a:rPr lang="en-US" sz="1300" b="1" dirty="0">
                 <a:solidFill>
-                  <a:srgbClr val="9D174D"/>
+                  <a:srgbClr val="0F766E"/>
                 </a:solidFill>
                 <a:latin typeface="Trebuchet MS" pitchFamily="34" charset="0"/>
                 <a:ea typeface="Trebuchet MS" pitchFamily="34" charset="-122"/>
                 <a:cs typeface="Trebuchet MS" pitchFamily="34" charset="-120"/>
               </a:rPr>
-              <a:t>ion</a:t>
+              <a:t>express</a:t>
             </a:r>
             <a:endParaRPr lang="en-US" sz="1300" dirty="0"/>
           </a:p>
@@ -12797,7 +12797,7 @@
         </p:nvSpPr>
         <p:spPr>
           <a:xfrm>
-            <a:off x="5803392" y="2569464"/>
+            <a:off x="4370832" y="2569464"/>
             <a:ext cx="1828800" cy="201168"/>
           </a:xfrm>
           <a:prstGeom prst="rect">
@@ -12822,7 +12822,7 @@
                 <a:ea typeface="Calibri" pitchFamily="34" charset="-122"/>
                 <a:cs typeface="Calibri" pitchFamily="34" charset="-120"/>
               </a:rPr>
-              <a:t>act or result of</a:t>
+              <a:t>to push or squeeze out</a:t>
             </a:r>
             <a:endParaRPr lang="en-US" sz="850" dirty="0"/>
           </a:p>
@@ -12830,14 +12830,87 @@
       </p:sp>
       <p:sp>
         <p:nvSpPr>
-          <p:cNvPr id="22" name="Text 20"/>
-          <p:cNvSpPr/>
-          <p:nvPr/>
-        </p:nvSpPr>
-        <p:spPr>
-          <a:xfrm>
-            <a:off x="5803392" y="2752344"/>
-            <a:ext cx="1828800" cy="182880"/>
+          <p:cNvPr id="22" name="Shape 20"/>
+          <p:cNvSpPr/>
+          <p:nvPr/>
+        </p:nvSpPr>
+        <p:spPr>
+          <a:xfrm>
+            <a:off x="6519672" y="2258568"/>
+            <a:ext cx="1828800" cy="292608"/>
+          </a:xfrm>
+          <a:prstGeom prst="rect">
+            <a:avLst>
+              <a:gd name="adj" fmla="val 25000"/>
+            </a:avLst>
+          </a:prstGeom>
+          <a:solidFill>
+            <a:srgbClr val="FCE7F3"/>
+          </a:solidFill>
+          <a:ln w="19050">
+            <a:solidFill>
+              <a:srgbClr val="DB2777"/>
+            </a:solidFill>
+            <a:prstDash val="solid"/>
+          </a:ln>
+          <a:effectLst>
+            <a:outerShdw sx="100000" sy="100000" kx="0" ky="0" algn="bl" rotWithShape="0" blurRad="101600" dist="38100" dir="8100000">
+              <a:srgbClr val="000000">
+                <a:alpha val="12000"/>
+              </a:srgbClr>
+            </a:outerShdw>
+          </a:effectLst>
+        </p:spPr>
+      </p:sp>
+      <p:sp>
+        <p:nvSpPr>
+          <p:cNvPr id="23" name="Text 21"/>
+          <p:cNvSpPr/>
+          <p:nvPr/>
+        </p:nvSpPr>
+        <p:spPr>
+          <a:xfrm>
+            <a:off x="6519672" y="2258568"/>
+            <a:ext cx="1828800" cy="292608"/>
+          </a:xfrm>
+          <a:prstGeom prst="rect">
+            <a:avLst/>
+          </a:prstGeom>
+          <a:noFill/>
+          <a:ln/>
+        </p:spPr>
+        <p:txBody>
+          <a:bodyPr wrap="square" lIns="0" tIns="0" rIns="0" bIns="0" rtlCol="0" anchor="ctr"/>
+          <a:lstStyle/>
+          <a:p>
+            <a:pPr algn="ctr" indent="0" marL="0">
+              <a:buNone/>
+            </a:pPr>
+            <a:r>
+              <a:rPr lang="en-US" sz="1300" b="1" dirty="0">
+                <a:solidFill>
+                  <a:srgbClr val="9D174D"/>
+                </a:solidFill>
+                <a:latin typeface="Trebuchet MS" pitchFamily="34" charset="0"/>
+                <a:ea typeface="Trebuchet MS" pitchFamily="34" charset="-122"/>
+                <a:cs typeface="Trebuchet MS" pitchFamily="34" charset="-120"/>
+              </a:rPr>
+              <a:t>ible</a:t>
+            </a:r>
+            <a:endParaRPr lang="en-US" sz="1300" dirty="0"/>
+          </a:p>
+        </p:txBody>
+      </p:sp>
+      <p:sp>
+        <p:nvSpPr>
+          <p:cNvPr id="24" name="Text 22"/>
+          <p:cNvSpPr/>
+          <p:nvPr/>
+        </p:nvSpPr>
+        <p:spPr>
+          <a:xfrm>
+            <a:off x="6519672" y="2569464"/>
+            <a:ext cx="1828800" cy="201168"/>
           </a:xfrm>
           <a:prstGeom prst="rect">
             <a:avLst/>
@@ -12853,23 +12926,23 @@
               <a:buNone/>
             </a:pPr>
             <a:r>
-              <a:rPr lang="en-US" sz="700" i="1" dirty="0">
-                <a:solidFill>
-                  <a:srgbClr val="94A3B8"/>
+              <a:rPr lang="en-US" sz="850" dirty="0">
+                <a:solidFill>
+                  <a:srgbClr val="475569"/>
                 </a:solidFill>
                 <a:latin typeface="Calibri" pitchFamily="34" charset="0"/>
                 <a:ea typeface="Calibri" pitchFamily="34" charset="-122"/>
                 <a:cs typeface="Calibri" pitchFamily="34" charset="-120"/>
               </a:rPr>
-              <a:t>'express' changes to 'express' before '-ion'; the 'ss' makes /sh/ sound</a:t>
-            </a:r>
-            <a:endParaRPr lang="en-US" sz="700" dirty="0"/>
-          </a:p>
-        </p:txBody>
-      </p:sp>
-      <p:sp>
-        <p:nvSpPr>
-          <p:cNvPr id="23" name="Shape 21"/>
+              <a:t>able to be</a:t>
+            </a:r>
+            <a:endParaRPr lang="en-US" sz="850" dirty="0"/>
+          </a:p>
+        </p:txBody>
+      </p:sp>
+      <p:sp>
+        <p:nvSpPr>
+          <p:cNvPr id="25" name="Shape 23"/>
           <p:cNvSpPr/>
           <p:nvPr/>
         </p:nvSpPr>
@@ -12896,7 +12969,7 @@
       </p:sp>
       <p:sp>
         <p:nvSpPr>
-          <p:cNvPr id="24" name="Text 22"/>
+          <p:cNvPr id="26" name="Text 24"/>
           <p:cNvSpPr/>
           <p:nvPr/>
         </p:nvSpPr>
@@ -12935,7 +13008,7 @@
       </p:sp>
       <p:sp>
         <p:nvSpPr>
-          <p:cNvPr id="25" name="Shape 23"/>
+          <p:cNvPr id="27" name="Shape 25"/>
           <p:cNvSpPr/>
           <p:nvPr/>
         </p:nvSpPr>
@@ -12962,7 +13035,7 @@
       </p:sp>
       <p:sp>
         <p:nvSpPr>
-          <p:cNvPr id="26" name="Text 24"/>
+          <p:cNvPr id="28" name="Text 26"/>
           <p:cNvSpPr/>
           <p:nvPr/>
         </p:nvSpPr>
@@ -13001,7 +13074,7 @@
       </p:sp>
       <p:sp>
         <p:nvSpPr>
-          <p:cNvPr id="27" name="Shape 25"/>
+          <p:cNvPr id="29" name="Shape 27"/>
           <p:cNvSpPr/>
           <p:nvPr/>
         </p:nvSpPr>
@@ -13028,7 +13101,7 @@
       </p:sp>
       <p:sp>
         <p:nvSpPr>
-          <p:cNvPr id="28" name="Text 26"/>
+          <p:cNvPr id="30" name="Text 28"/>
           <p:cNvSpPr/>
           <p:nvPr/>
         </p:nvSpPr>
@@ -13067,7 +13140,7 @@
       </p:sp>
       <p:sp>
         <p:nvSpPr>
-          <p:cNvPr id="29" name="Shape 27"/>
+          <p:cNvPr id="31" name="Shape 29"/>
           <p:cNvSpPr/>
           <p:nvPr/>
         </p:nvSpPr>
@@ -13094,7 +13167,7 @@
       </p:sp>
       <p:sp>
         <p:nvSpPr>
-          <p:cNvPr id="30" name="Text 28"/>
+          <p:cNvPr id="32" name="Text 30"/>
           <p:cNvSpPr/>
           <p:nvPr/>
         </p:nvSpPr>
@@ -13417,7 +13490,7 @@
                 <a:ea typeface="Calibri" pitchFamily="34" charset="-122"/>
                 <a:cs typeface="Calibri" pitchFamily="34" charset="-120"/>
               </a:rPr>
-              <a:t>Word Labs  •  wordlabs.app  •  Root: 'express' = to push or press out</a:t>
+              <a:t>Word Labs  •  wordlabs.app  •  Root: 'express' = to push or squeeze out</a:t>
             </a:r>
             <a:endParaRPr lang="en-US" sz="800" dirty="0"/>
           </a:p>
@@ -13556,7 +13629,7 @@
                 <a:ea typeface="Trebuchet MS" pitchFamily="34" charset="-122"/>
                 <a:cs typeface="Trebuchet MS" pitchFamily="34" charset="-120"/>
               </a:rPr>
-              <a:t>expression</a:t>
+              <a:t>inexpressible</a:t>
             </a:r>
             <a:endParaRPr lang="en-US" sz="2800" dirty="0"/>
           </a:p>
@@ -13636,7 +13709,7 @@
         </p:nvSpPr>
         <p:spPr>
           <a:xfrm>
-            <a:off x="2938272" y="2258568"/>
+            <a:off x="2221992" y="2258568"/>
             <a:ext cx="1828800" cy="292608"/>
           </a:xfrm>
           <a:prstGeom prst="rect">
@@ -13645,11 +13718,11 @@
             </a:avLst>
           </a:prstGeom>
           <a:solidFill>
-            <a:srgbClr val="CCFBF1"/>
+            <a:srgbClr val="DDD6FE"/>
           </a:solidFill>
           <a:ln w="19050">
             <a:solidFill>
-              <a:srgbClr val="0D9488"/>
+              <a:srgbClr val="7C3AED"/>
             </a:solidFill>
             <a:prstDash val="solid"/>
           </a:ln>
@@ -13670,7 +13743,7 @@
         </p:nvSpPr>
         <p:spPr>
           <a:xfrm>
-            <a:off x="2938272" y="2258568"/>
+            <a:off x="2221992" y="2258568"/>
             <a:ext cx="1828800" cy="292608"/>
           </a:xfrm>
           <a:prstGeom prst="rect">
@@ -13689,13 +13762,13 @@
             <a:r>
               <a:rPr lang="en-US" sz="1300" b="1" dirty="0">
                 <a:solidFill>
-                  <a:srgbClr val="0F766E"/>
+                  <a:srgbClr val="4C1D95"/>
                 </a:solidFill>
                 <a:latin typeface="Trebuchet MS" pitchFamily="34" charset="0"/>
                 <a:ea typeface="Trebuchet MS" pitchFamily="34" charset="-122"/>
                 <a:cs typeface="Trebuchet MS" pitchFamily="34" charset="-120"/>
               </a:rPr>
-              <a:t>express</a:t>
+              <a:t>in</a:t>
             </a:r>
             <a:endParaRPr lang="en-US" sz="1300" dirty="0"/>
           </a:p>
@@ -13709,7 +13782,7 @@
         </p:nvSpPr>
         <p:spPr>
           <a:xfrm>
-            <a:off x="2938272" y="2569464"/>
+            <a:off x="2221992" y="2569464"/>
             <a:ext cx="1828800" cy="201168"/>
           </a:xfrm>
           <a:prstGeom prst="rect">
@@ -13734,7 +13807,7 @@
                 <a:ea typeface="Calibri" pitchFamily="34" charset="-122"/>
                 <a:cs typeface="Calibri" pitchFamily="34" charset="-120"/>
               </a:rPr>
-              <a:t>to push or press out</a:t>
+              <a:t>not</a:t>
             </a:r>
             <a:endParaRPr lang="en-US" sz="850" dirty="0"/>
           </a:p>
@@ -13748,7 +13821,7 @@
         </p:nvSpPr>
         <p:spPr>
           <a:xfrm>
-            <a:off x="5803392" y="2258568"/>
+            <a:off x="4370832" y="2258568"/>
             <a:ext cx="1828800" cy="292608"/>
           </a:xfrm>
           <a:prstGeom prst="rect">
@@ -13757,11 +13830,11 @@
             </a:avLst>
           </a:prstGeom>
           <a:solidFill>
-            <a:srgbClr val="FCE7F3"/>
+            <a:srgbClr val="CCFBF1"/>
           </a:solidFill>
           <a:ln w="19050">
             <a:solidFill>
-              <a:srgbClr val="DB2777"/>
+              <a:srgbClr val="0D9488"/>
             </a:solidFill>
             <a:prstDash val="solid"/>
           </a:ln>
@@ -13782,7 +13855,7 @@
         </p:nvSpPr>
         <p:spPr>
           <a:xfrm>
-            <a:off x="5803392" y="2258568"/>
+            <a:off x="4370832" y="2258568"/>
             <a:ext cx="1828800" cy="292608"/>
           </a:xfrm>
           <a:prstGeom prst="rect">
@@ -13801,13 +13874,13 @@
             <a:r>
               <a:rPr lang="en-US" sz="1300" b="1" dirty="0">
                 <a:solidFill>
-                  <a:srgbClr val="9D174D"/>
+                  <a:srgbClr val="0F766E"/>
                 </a:solidFill>
                 <a:latin typeface="Trebuchet MS" pitchFamily="34" charset="0"/>
                 <a:ea typeface="Trebuchet MS" pitchFamily="34" charset="-122"/>
                 <a:cs typeface="Trebuchet MS" pitchFamily="34" charset="-120"/>
               </a:rPr>
-              <a:t>ion</a:t>
+              <a:t>express</a:t>
             </a:r>
             <a:endParaRPr lang="en-US" sz="1300" dirty="0"/>
           </a:p>
@@ -13821,7 +13894,7 @@
         </p:nvSpPr>
         <p:spPr>
           <a:xfrm>
-            <a:off x="5803392" y="2569464"/>
+            <a:off x="4370832" y="2569464"/>
             <a:ext cx="1828800" cy="201168"/>
           </a:xfrm>
           <a:prstGeom prst="rect">
@@ -13846,7 +13919,7 @@
                 <a:ea typeface="Calibri" pitchFamily="34" charset="-122"/>
                 <a:cs typeface="Calibri" pitchFamily="34" charset="-120"/>
               </a:rPr>
-              <a:t>act or result of</a:t>
+              <a:t>to push or squeeze out</a:t>
             </a:r>
             <a:endParaRPr lang="en-US" sz="850" dirty="0"/>
           </a:p>
@@ -13854,14 +13927,87 @@
       </p:sp>
       <p:sp>
         <p:nvSpPr>
-          <p:cNvPr id="22" name="Text 20"/>
-          <p:cNvSpPr/>
-          <p:nvPr/>
-        </p:nvSpPr>
-        <p:spPr>
-          <a:xfrm>
-            <a:off x="5803392" y="2752344"/>
-            <a:ext cx="1828800" cy="182880"/>
+          <p:cNvPr id="22" name="Shape 20"/>
+          <p:cNvSpPr/>
+          <p:nvPr/>
+        </p:nvSpPr>
+        <p:spPr>
+          <a:xfrm>
+            <a:off x="6519672" y="2258568"/>
+            <a:ext cx="1828800" cy="292608"/>
+          </a:xfrm>
+          <a:prstGeom prst="rect">
+            <a:avLst>
+              <a:gd name="adj" fmla="val 25000"/>
+            </a:avLst>
+          </a:prstGeom>
+          <a:solidFill>
+            <a:srgbClr val="FCE7F3"/>
+          </a:solidFill>
+          <a:ln w="19050">
+            <a:solidFill>
+              <a:srgbClr val="DB2777"/>
+            </a:solidFill>
+            <a:prstDash val="solid"/>
+          </a:ln>
+          <a:effectLst>
+            <a:outerShdw sx="100000" sy="100000" kx="0" ky="0" algn="bl" rotWithShape="0" blurRad="101600" dist="38100" dir="8100000">
+              <a:srgbClr val="000000">
+                <a:alpha val="12000"/>
+              </a:srgbClr>
+            </a:outerShdw>
+          </a:effectLst>
+        </p:spPr>
+      </p:sp>
+      <p:sp>
+        <p:nvSpPr>
+          <p:cNvPr id="23" name="Text 21"/>
+          <p:cNvSpPr/>
+          <p:nvPr/>
+        </p:nvSpPr>
+        <p:spPr>
+          <a:xfrm>
+            <a:off x="6519672" y="2258568"/>
+            <a:ext cx="1828800" cy="292608"/>
+          </a:xfrm>
+          <a:prstGeom prst="rect">
+            <a:avLst/>
+          </a:prstGeom>
+          <a:noFill/>
+          <a:ln/>
+        </p:spPr>
+        <p:txBody>
+          <a:bodyPr wrap="square" lIns="0" tIns="0" rIns="0" bIns="0" rtlCol="0" anchor="ctr"/>
+          <a:lstStyle/>
+          <a:p>
+            <a:pPr algn="ctr" indent="0" marL="0">
+              <a:buNone/>
+            </a:pPr>
+            <a:r>
+              <a:rPr lang="en-US" sz="1300" b="1" dirty="0">
+                <a:solidFill>
+                  <a:srgbClr val="9D174D"/>
+                </a:solidFill>
+                <a:latin typeface="Trebuchet MS" pitchFamily="34" charset="0"/>
+                <a:ea typeface="Trebuchet MS" pitchFamily="34" charset="-122"/>
+                <a:cs typeface="Trebuchet MS" pitchFamily="34" charset="-120"/>
+              </a:rPr>
+              <a:t>ible</a:t>
+            </a:r>
+            <a:endParaRPr lang="en-US" sz="1300" dirty="0"/>
+          </a:p>
+        </p:txBody>
+      </p:sp>
+      <p:sp>
+        <p:nvSpPr>
+          <p:cNvPr id="24" name="Text 22"/>
+          <p:cNvSpPr/>
+          <p:nvPr/>
+        </p:nvSpPr>
+        <p:spPr>
+          <a:xfrm>
+            <a:off x="6519672" y="2569464"/>
+            <a:ext cx="1828800" cy="201168"/>
           </a:xfrm>
           <a:prstGeom prst="rect">
             <a:avLst/>
@@ -13877,23 +14023,23 @@
               <a:buNone/>
             </a:pPr>
             <a:r>
-              <a:rPr lang="en-US" sz="700" i="1" dirty="0">
-                <a:solidFill>
-                  <a:srgbClr val="94A3B8"/>
+              <a:rPr lang="en-US" sz="850" dirty="0">
+                <a:solidFill>
+                  <a:srgbClr val="475569"/>
                 </a:solidFill>
                 <a:latin typeface="Calibri" pitchFamily="34" charset="0"/>
                 <a:ea typeface="Calibri" pitchFamily="34" charset="-122"/>
                 <a:cs typeface="Calibri" pitchFamily="34" charset="-120"/>
               </a:rPr>
-              <a:t>'express' changes to 'express' before '-ion'; the 'ss' makes /sh/ sound</a:t>
-            </a:r>
-            <a:endParaRPr lang="en-US" sz="700" dirty="0"/>
-          </a:p>
-        </p:txBody>
-      </p:sp>
-      <p:sp>
-        <p:nvSpPr>
-          <p:cNvPr id="23" name="Shape 21"/>
+              <a:t>able to be</a:t>
+            </a:r>
+            <a:endParaRPr lang="en-US" sz="850" dirty="0"/>
+          </a:p>
+        </p:txBody>
+      </p:sp>
+      <p:sp>
+        <p:nvSpPr>
+          <p:cNvPr id="25" name="Shape 23"/>
           <p:cNvSpPr/>
           <p:nvPr/>
         </p:nvSpPr>
@@ -13920,7 +14066,7 @@
       </p:sp>
       <p:sp>
         <p:nvSpPr>
-          <p:cNvPr id="24" name="Text 22"/>
+          <p:cNvPr id="26" name="Text 24"/>
           <p:cNvSpPr/>
           <p:nvPr/>
         </p:nvSpPr>
@@ -13959,7 +14105,7 @@
       </p:sp>
       <p:sp>
         <p:nvSpPr>
-          <p:cNvPr id="25" name="Shape 23"/>
+          <p:cNvPr id="27" name="Shape 25"/>
           <p:cNvSpPr/>
           <p:nvPr/>
         </p:nvSpPr>
@@ -13986,14 +14132,14 @@
       </p:sp>
       <p:sp>
         <p:nvSpPr>
-          <p:cNvPr id="26" name="Shape 24"/>
-          <p:cNvSpPr/>
-          <p:nvPr/>
-        </p:nvSpPr>
-        <p:spPr>
-          <a:xfrm>
-            <a:off x="2313432" y="3364992"/>
-            <a:ext cx="1645920" cy="475488"/>
+          <p:cNvPr id="28" name="Shape 26"/>
+          <p:cNvSpPr/>
+          <p:nvPr/>
+        </p:nvSpPr>
+        <p:spPr>
+          <a:xfrm>
+            <a:off x="1978152" y="3364992"/>
+            <a:ext cx="1225296" cy="475488"/>
           </a:xfrm>
           <a:prstGeom prst="rect">
             <a:avLst>
@@ -14013,14 +14159,14 @@
       </p:sp>
       <p:sp>
         <p:nvSpPr>
-          <p:cNvPr id="27" name="Text 25"/>
-          <p:cNvSpPr/>
-          <p:nvPr/>
-        </p:nvSpPr>
-        <p:spPr>
-          <a:xfrm>
-            <a:off x="2313432" y="3364992"/>
-            <a:ext cx="1645920" cy="475488"/>
+          <p:cNvPr id="29" name="Text 27"/>
+          <p:cNvSpPr/>
+          <p:nvPr/>
+        </p:nvSpPr>
+        <p:spPr>
+          <a:xfrm>
+            <a:off x="1978152" y="3364992"/>
+            <a:ext cx="1225296" cy="475488"/>
           </a:xfrm>
           <a:prstGeom prst="rect">
             <a:avLst/>
@@ -14044,7 +14190,7 @@
                 <a:ea typeface="Trebuchet MS" pitchFamily="34" charset="-122"/>
                 <a:cs typeface="Trebuchet MS" pitchFamily="34" charset="-120"/>
               </a:rPr>
-              <a:t>ex</a:t>
+              <a:t>in</a:t>
             </a:r>
             <a:endParaRPr lang="en-US" sz="1400" dirty="0"/>
           </a:p>
@@ -14052,14 +14198,14 @@
       </p:sp>
       <p:sp>
         <p:nvSpPr>
-          <p:cNvPr id="28" name="Text 26"/>
-          <p:cNvSpPr/>
-          <p:nvPr/>
-        </p:nvSpPr>
-        <p:spPr>
-          <a:xfrm>
-            <a:off x="3959352" y="3364992"/>
-            <a:ext cx="411480" cy="475488"/>
+          <p:cNvPr id="30" name="Text 28"/>
+          <p:cNvSpPr/>
+          <p:nvPr/>
+        </p:nvSpPr>
+        <p:spPr>
+          <a:xfrm>
+            <a:off x="3203448" y="3364992"/>
+            <a:ext cx="76200" cy="475488"/>
           </a:xfrm>
           <a:prstGeom prst="rect">
             <a:avLst/>
@@ -14091,14 +14237,14 @@
       </p:sp>
       <p:sp>
         <p:nvSpPr>
-          <p:cNvPr id="29" name="Shape 27"/>
-          <p:cNvSpPr/>
-          <p:nvPr/>
-        </p:nvSpPr>
-        <p:spPr>
-          <a:xfrm>
-            <a:off x="4370832" y="3364992"/>
-            <a:ext cx="1645920" cy="475488"/>
+          <p:cNvPr id="31" name="Shape 29"/>
+          <p:cNvSpPr/>
+          <p:nvPr/>
+        </p:nvSpPr>
+        <p:spPr>
+          <a:xfrm>
+            <a:off x="3279648" y="3364992"/>
+            <a:ext cx="1225296" cy="475488"/>
           </a:xfrm>
           <a:prstGeom prst="rect">
             <a:avLst>
@@ -14118,14 +14264,14 @@
       </p:sp>
       <p:sp>
         <p:nvSpPr>
-          <p:cNvPr id="30" name="Text 28"/>
-          <p:cNvSpPr/>
-          <p:nvPr/>
-        </p:nvSpPr>
-        <p:spPr>
-          <a:xfrm>
-            <a:off x="4370832" y="3364992"/>
-            <a:ext cx="1645920" cy="475488"/>
+          <p:cNvPr id="32" name="Text 30"/>
+          <p:cNvSpPr/>
+          <p:nvPr/>
+        </p:nvSpPr>
+        <p:spPr>
+          <a:xfrm>
+            <a:off x="3279648" y="3364992"/>
+            <a:ext cx="1225296" cy="475488"/>
           </a:xfrm>
           <a:prstGeom prst="rect">
             <a:avLst/>
@@ -14149,7 +14295,7 @@
                 <a:ea typeface="Trebuchet MS" pitchFamily="34" charset="-122"/>
                 <a:cs typeface="Trebuchet MS" pitchFamily="34" charset="-120"/>
               </a:rPr>
-              <a:t>press</a:t>
+              <a:t>ex</a:t>
             </a:r>
             <a:endParaRPr lang="en-US" sz="1400" dirty="0"/>
           </a:p>
@@ -14157,14 +14303,14 @@
       </p:sp>
       <p:sp>
         <p:nvSpPr>
-          <p:cNvPr id="31" name="Text 29"/>
-          <p:cNvSpPr/>
-          <p:nvPr/>
-        </p:nvSpPr>
-        <p:spPr>
-          <a:xfrm>
-            <a:off x="6016752" y="3364992"/>
-            <a:ext cx="411480" cy="475488"/>
+          <p:cNvPr id="33" name="Text 31"/>
+          <p:cNvSpPr/>
+          <p:nvPr/>
+        </p:nvSpPr>
+        <p:spPr>
+          <a:xfrm>
+            <a:off x="4504944" y="3364992"/>
+            <a:ext cx="76200" cy="475488"/>
           </a:xfrm>
           <a:prstGeom prst="rect">
             <a:avLst/>
@@ -14196,14 +14342,14 @@
       </p:sp>
       <p:sp>
         <p:nvSpPr>
-          <p:cNvPr id="32" name="Shape 30"/>
-          <p:cNvSpPr/>
-          <p:nvPr/>
-        </p:nvSpPr>
-        <p:spPr>
-          <a:xfrm>
-            <a:off x="6428232" y="3364992"/>
-            <a:ext cx="1645920" cy="475488"/>
+          <p:cNvPr id="34" name="Shape 32"/>
+          <p:cNvSpPr/>
+          <p:nvPr/>
+        </p:nvSpPr>
+        <p:spPr>
+          <a:xfrm>
+            <a:off x="4581144" y="3364992"/>
+            <a:ext cx="1225296" cy="475488"/>
           </a:xfrm>
           <a:prstGeom prst="rect">
             <a:avLst>
@@ -14223,14 +14369,14 @@
       </p:sp>
       <p:sp>
         <p:nvSpPr>
-          <p:cNvPr id="33" name="Text 31"/>
-          <p:cNvSpPr/>
-          <p:nvPr/>
-        </p:nvSpPr>
-        <p:spPr>
-          <a:xfrm>
-            <a:off x="6428232" y="3364992"/>
-            <a:ext cx="1645920" cy="475488"/>
+          <p:cNvPr id="35" name="Text 33"/>
+          <p:cNvSpPr/>
+          <p:nvPr/>
+        </p:nvSpPr>
+        <p:spPr>
+          <a:xfrm>
+            <a:off x="4581144" y="3364992"/>
+            <a:ext cx="1225296" cy="475488"/>
           </a:xfrm>
           <a:prstGeom prst="rect">
             <a:avLst/>
@@ -14254,7 +14400,7 @@
                 <a:ea typeface="Trebuchet MS" pitchFamily="34" charset="-122"/>
                 <a:cs typeface="Trebuchet MS" pitchFamily="34" charset="-120"/>
               </a:rPr>
-              <a:t>ion</a:t>
+              <a:t>press</a:t>
             </a:r>
             <a:endParaRPr lang="en-US" sz="1400" dirty="0"/>
           </a:p>
@@ -14262,7 +14408,217 @@
       </p:sp>
       <p:sp>
         <p:nvSpPr>
-          <p:cNvPr id="34" name="Shape 32"/>
+          <p:cNvPr id="36" name="Text 34"/>
+          <p:cNvSpPr/>
+          <p:nvPr/>
+        </p:nvSpPr>
+        <p:spPr>
+          <a:xfrm>
+            <a:off x="5806440" y="3364992"/>
+            <a:ext cx="76200" cy="475488"/>
+          </a:xfrm>
+          <a:prstGeom prst="rect">
+            <a:avLst/>
+          </a:prstGeom>
+          <a:noFill/>
+          <a:ln/>
+        </p:spPr>
+        <p:txBody>
+          <a:bodyPr wrap="square" lIns="0" tIns="0" rIns="0" bIns="0" rtlCol="0" anchor="ctr"/>
+          <a:lstStyle/>
+          <a:p>
+            <a:pPr algn="ctr" indent="0" marL="0">
+              <a:buNone/>
+            </a:pPr>
+            <a:r>
+              <a:rPr lang="en-US" sz="1600" b="1" dirty="0">
+                <a:solidFill>
+                  <a:srgbClr val="0D9488"/>
+                </a:solidFill>
+                <a:latin typeface="Trebuchet MS" pitchFamily="34" charset="0"/>
+                <a:ea typeface="Trebuchet MS" pitchFamily="34" charset="-122"/>
+                <a:cs typeface="Trebuchet MS" pitchFamily="34" charset="-120"/>
+              </a:rPr>
+              <a:t>·</a:t>
+            </a:r>
+            <a:endParaRPr lang="en-US" sz="1600" dirty="0"/>
+          </a:p>
+        </p:txBody>
+      </p:sp>
+      <p:sp>
+        <p:nvSpPr>
+          <p:cNvPr id="37" name="Shape 35"/>
+          <p:cNvSpPr/>
+          <p:nvPr/>
+        </p:nvSpPr>
+        <p:spPr>
+          <a:xfrm>
+            <a:off x="5882640" y="3364992"/>
+            <a:ext cx="1225296" cy="475488"/>
+          </a:xfrm>
+          <a:prstGeom prst="rect">
+            <a:avLst>
+              <a:gd name="adj" fmla="val 9615"/>
+            </a:avLst>
+          </a:prstGeom>
+          <a:solidFill>
+            <a:srgbClr val="FFFFFF"/>
+          </a:solidFill>
+          <a:ln w="12700">
+            <a:solidFill>
+              <a:srgbClr val="0D9488"/>
+            </a:solidFill>
+            <a:prstDash val="solid"/>
+          </a:ln>
+        </p:spPr>
+      </p:sp>
+      <p:sp>
+        <p:nvSpPr>
+          <p:cNvPr id="38" name="Text 36"/>
+          <p:cNvSpPr/>
+          <p:nvPr/>
+        </p:nvSpPr>
+        <p:spPr>
+          <a:xfrm>
+            <a:off x="5882640" y="3364992"/>
+            <a:ext cx="1225296" cy="475488"/>
+          </a:xfrm>
+          <a:prstGeom prst="rect">
+            <a:avLst/>
+          </a:prstGeom>
+          <a:noFill/>
+          <a:ln/>
+        </p:spPr>
+        <p:txBody>
+          <a:bodyPr wrap="square" lIns="0" tIns="0" rIns="0" bIns="0" rtlCol="0" anchor="ctr"/>
+          <a:lstStyle/>
+          <a:p>
+            <a:pPr algn="ctr" indent="0" marL="0">
+              <a:buNone/>
+            </a:pPr>
+            <a:r>
+              <a:rPr lang="en-US" sz="1400" b="1" dirty="0">
+                <a:solidFill>
+                  <a:srgbClr val="0D9488"/>
+                </a:solidFill>
+                <a:latin typeface="Trebuchet MS" pitchFamily="34" charset="0"/>
+                <a:ea typeface="Trebuchet MS" pitchFamily="34" charset="-122"/>
+                <a:cs typeface="Trebuchet MS" pitchFamily="34" charset="-120"/>
+              </a:rPr>
+              <a:t>i</a:t>
+            </a:r>
+            <a:endParaRPr lang="en-US" sz="1400" dirty="0"/>
+          </a:p>
+        </p:txBody>
+      </p:sp>
+      <p:sp>
+        <p:nvSpPr>
+          <p:cNvPr id="39" name="Text 37"/>
+          <p:cNvSpPr/>
+          <p:nvPr/>
+        </p:nvSpPr>
+        <p:spPr>
+          <a:xfrm>
+            <a:off x="7107936" y="3364992"/>
+            <a:ext cx="76200" cy="475488"/>
+          </a:xfrm>
+          <a:prstGeom prst="rect">
+            <a:avLst/>
+          </a:prstGeom>
+          <a:noFill/>
+          <a:ln/>
+        </p:spPr>
+        <p:txBody>
+          <a:bodyPr wrap="square" lIns="0" tIns="0" rIns="0" bIns="0" rtlCol="0" anchor="ctr"/>
+          <a:lstStyle/>
+          <a:p>
+            <a:pPr algn="ctr" indent="0" marL="0">
+              <a:buNone/>
+            </a:pPr>
+            <a:r>
+              <a:rPr lang="en-US" sz="1600" b="1" dirty="0">
+                <a:solidFill>
+                  <a:srgbClr val="0D9488"/>
+                </a:solidFill>
+                <a:latin typeface="Trebuchet MS" pitchFamily="34" charset="0"/>
+                <a:ea typeface="Trebuchet MS" pitchFamily="34" charset="-122"/>
+                <a:cs typeface="Trebuchet MS" pitchFamily="34" charset="-120"/>
+              </a:rPr>
+              <a:t>·</a:t>
+            </a:r>
+            <a:endParaRPr lang="en-US" sz="1600" dirty="0"/>
+          </a:p>
+        </p:txBody>
+      </p:sp>
+      <p:sp>
+        <p:nvSpPr>
+          <p:cNvPr id="40" name="Shape 38"/>
+          <p:cNvSpPr/>
+          <p:nvPr/>
+        </p:nvSpPr>
+        <p:spPr>
+          <a:xfrm>
+            <a:off x="7184136" y="3364992"/>
+            <a:ext cx="1225296" cy="475488"/>
+          </a:xfrm>
+          <a:prstGeom prst="rect">
+            <a:avLst>
+              <a:gd name="adj" fmla="val 9615"/>
+            </a:avLst>
+          </a:prstGeom>
+          <a:solidFill>
+            <a:srgbClr val="FFFFFF"/>
+          </a:solidFill>
+          <a:ln w="12700">
+            <a:solidFill>
+              <a:srgbClr val="0D9488"/>
+            </a:solidFill>
+            <a:prstDash val="solid"/>
+          </a:ln>
+        </p:spPr>
+      </p:sp>
+      <p:sp>
+        <p:nvSpPr>
+          <p:cNvPr id="41" name="Text 39"/>
+          <p:cNvSpPr/>
+          <p:nvPr/>
+        </p:nvSpPr>
+        <p:spPr>
+          <a:xfrm>
+            <a:off x="7184136" y="3364992"/>
+            <a:ext cx="1225296" cy="475488"/>
+          </a:xfrm>
+          <a:prstGeom prst="rect">
+            <a:avLst/>
+          </a:prstGeom>
+          <a:noFill/>
+          <a:ln/>
+        </p:spPr>
+        <p:txBody>
+          <a:bodyPr wrap="square" lIns="0" tIns="0" rIns="0" bIns="0" rtlCol="0" anchor="ctr"/>
+          <a:lstStyle/>
+          <a:p>
+            <a:pPr algn="ctr" indent="0" marL="0">
+              <a:buNone/>
+            </a:pPr>
+            <a:r>
+              <a:rPr lang="en-US" sz="1400" b="1" dirty="0">
+                <a:solidFill>
+                  <a:srgbClr val="0D9488"/>
+                </a:solidFill>
+                <a:latin typeface="Trebuchet MS" pitchFamily="34" charset="0"/>
+                <a:ea typeface="Trebuchet MS" pitchFamily="34" charset="-122"/>
+                <a:cs typeface="Trebuchet MS" pitchFamily="34" charset="-120"/>
+              </a:rPr>
+              <a:t>ble</a:t>
+            </a:r>
+            <a:endParaRPr lang="en-US" sz="1400" dirty="0"/>
+          </a:p>
+        </p:txBody>
+      </p:sp>
+      <p:sp>
+        <p:nvSpPr>
+          <p:cNvPr id="42" name="Shape 40"/>
           <p:cNvSpPr/>
           <p:nvPr/>
         </p:nvSpPr>
@@ -14289,7 +14645,7 @@
       </p:sp>
       <p:sp>
         <p:nvSpPr>
-          <p:cNvPr id="35" name="Text 33"/>
+          <p:cNvPr id="43" name="Text 41"/>
           <p:cNvSpPr/>
           <p:nvPr/>
         </p:nvSpPr>
@@ -14328,7 +14684,7 @@
       </p:sp>
       <p:sp>
         <p:nvSpPr>
-          <p:cNvPr id="36" name="Shape 34"/>
+          <p:cNvPr id="44" name="Shape 42"/>
           <p:cNvSpPr/>
           <p:nvPr/>
         </p:nvSpPr>
@@ -14355,7 +14711,7 @@
       </p:sp>
       <p:sp>
         <p:nvSpPr>
-          <p:cNvPr id="37" name="Text 35"/>
+          <p:cNvPr id="45" name="Text 43"/>
           <p:cNvSpPr/>
           <p:nvPr/>
         </p:nvSpPr>
@@ -14587,7 +14943,7 @@
                 <a:ea typeface="Calibri" pitchFamily="34" charset="-122"/>
                 <a:cs typeface="Calibri" pitchFamily="34" charset="-120"/>
               </a:rPr>
-              <a:t>Root 'express' — to push or press out</a:t>
+              <a:t>Root 'express' — to push or squeeze out</a:t>
             </a:r>
             <a:endParaRPr lang="en-US" sz="1600" dirty="0"/>
           </a:p>
@@ -14943,7 +15299,7 @@
                 <a:ea typeface="Calibri" pitchFamily="34" charset="-122"/>
                 <a:cs typeface="Calibri" pitchFamily="34" charset="-120"/>
               </a:rPr>
-              <a:t>Word Labs  •  wordlabs.app  •  Root: 'express' = to push or press out</a:t>
+              <a:t>Word Labs  •  wordlabs.app  •  Root: 'express' = to push or squeeze out</a:t>
             </a:r>
             <a:endParaRPr lang="en-US" sz="800" dirty="0"/>
           </a:p>
@@ -15082,7 +15438,7 @@
                 <a:ea typeface="Trebuchet MS" pitchFamily="34" charset="-122"/>
                 <a:cs typeface="Trebuchet MS" pitchFamily="34" charset="-120"/>
               </a:rPr>
-              <a:t>expression</a:t>
+              <a:t>inexpressible</a:t>
             </a:r>
             <a:endParaRPr lang="en-US" sz="2800" dirty="0"/>
           </a:p>
@@ -15162,7 +15518,7 @@
         </p:nvSpPr>
         <p:spPr>
           <a:xfrm>
-            <a:off x="2938272" y="2258568"/>
+            <a:off x="2221992" y="2258568"/>
             <a:ext cx="1828800" cy="292608"/>
           </a:xfrm>
           <a:prstGeom prst="rect">
@@ -15171,11 +15527,11 @@
             </a:avLst>
           </a:prstGeom>
           <a:solidFill>
-            <a:srgbClr val="CCFBF1"/>
+            <a:srgbClr val="DDD6FE"/>
           </a:solidFill>
           <a:ln w="19050">
             <a:solidFill>
-              <a:srgbClr val="0D9488"/>
+              <a:srgbClr val="7C3AED"/>
             </a:solidFill>
             <a:prstDash val="solid"/>
           </a:ln>
@@ -15196,7 +15552,7 @@
         </p:nvSpPr>
         <p:spPr>
           <a:xfrm>
-            <a:off x="2938272" y="2258568"/>
+            <a:off x="2221992" y="2258568"/>
             <a:ext cx="1828800" cy="292608"/>
           </a:xfrm>
           <a:prstGeom prst="rect">
@@ -15215,13 +15571,13 @@
             <a:r>
               <a:rPr lang="en-US" sz="1300" b="1" dirty="0">
                 <a:solidFill>
-                  <a:srgbClr val="0F766E"/>
+                  <a:srgbClr val="4C1D95"/>
                 </a:solidFill>
                 <a:latin typeface="Trebuchet MS" pitchFamily="34" charset="0"/>
                 <a:ea typeface="Trebuchet MS" pitchFamily="34" charset="-122"/>
                 <a:cs typeface="Trebuchet MS" pitchFamily="34" charset="-120"/>
               </a:rPr>
-              <a:t>express</a:t>
+              <a:t>in</a:t>
             </a:r>
             <a:endParaRPr lang="en-US" sz="1300" dirty="0"/>
           </a:p>
@@ -15235,7 +15591,7 @@
         </p:nvSpPr>
         <p:spPr>
           <a:xfrm>
-            <a:off x="2938272" y="2569464"/>
+            <a:off x="2221992" y="2569464"/>
             <a:ext cx="1828800" cy="201168"/>
           </a:xfrm>
           <a:prstGeom prst="rect">
@@ -15260,7 +15616,7 @@
                 <a:ea typeface="Calibri" pitchFamily="34" charset="-122"/>
                 <a:cs typeface="Calibri" pitchFamily="34" charset="-120"/>
               </a:rPr>
-              <a:t>to push or press out</a:t>
+              <a:t>not</a:t>
             </a:r>
             <a:endParaRPr lang="en-US" sz="850" dirty="0"/>
           </a:p>
@@ -15274,7 +15630,7 @@
         </p:nvSpPr>
         <p:spPr>
           <a:xfrm>
-            <a:off x="5803392" y="2258568"/>
+            <a:off x="4370832" y="2258568"/>
             <a:ext cx="1828800" cy="292608"/>
           </a:xfrm>
           <a:prstGeom prst="rect">
@@ -15283,11 +15639,11 @@
             </a:avLst>
           </a:prstGeom>
           <a:solidFill>
-            <a:srgbClr val="FCE7F3"/>
+            <a:srgbClr val="CCFBF1"/>
           </a:solidFill>
           <a:ln w="19050">
             <a:solidFill>
-              <a:srgbClr val="DB2777"/>
+              <a:srgbClr val="0D9488"/>
             </a:solidFill>
             <a:prstDash val="solid"/>
           </a:ln>
@@ -15308,7 +15664,7 @@
         </p:nvSpPr>
         <p:spPr>
           <a:xfrm>
-            <a:off x="5803392" y="2258568"/>
+            <a:off x="4370832" y="2258568"/>
             <a:ext cx="1828800" cy="292608"/>
           </a:xfrm>
           <a:prstGeom prst="rect">
@@ -15327,13 +15683,13 @@
             <a:r>
               <a:rPr lang="en-US" sz="1300" b="1" dirty="0">
                 <a:solidFill>
-                  <a:srgbClr val="9D174D"/>
+                  <a:srgbClr val="0F766E"/>
                 </a:solidFill>
                 <a:latin typeface="Trebuchet MS" pitchFamily="34" charset="0"/>
                 <a:ea typeface="Trebuchet MS" pitchFamily="34" charset="-122"/>
                 <a:cs typeface="Trebuchet MS" pitchFamily="34" charset="-120"/>
               </a:rPr>
-              <a:t>ion</a:t>
+              <a:t>express</a:t>
             </a:r>
             <a:endParaRPr lang="en-US" sz="1300" dirty="0"/>
           </a:p>
@@ -15347,7 +15703,7 @@
         </p:nvSpPr>
         <p:spPr>
           <a:xfrm>
-            <a:off x="5803392" y="2569464"/>
+            <a:off x="4370832" y="2569464"/>
             <a:ext cx="1828800" cy="201168"/>
           </a:xfrm>
           <a:prstGeom prst="rect">
@@ -15372,7 +15728,7 @@
                 <a:ea typeface="Calibri" pitchFamily="34" charset="-122"/>
                 <a:cs typeface="Calibri" pitchFamily="34" charset="-120"/>
               </a:rPr>
-              <a:t>act or result of</a:t>
+              <a:t>to push or squeeze out</a:t>
             </a:r>
             <a:endParaRPr lang="en-US" sz="850" dirty="0"/>
           </a:p>
@@ -15380,14 +15736,87 @@
       </p:sp>
       <p:sp>
         <p:nvSpPr>
-          <p:cNvPr id="22" name="Text 20"/>
-          <p:cNvSpPr/>
-          <p:nvPr/>
-        </p:nvSpPr>
-        <p:spPr>
-          <a:xfrm>
-            <a:off x="5803392" y="2752344"/>
-            <a:ext cx="1828800" cy="182880"/>
+          <p:cNvPr id="22" name="Shape 20"/>
+          <p:cNvSpPr/>
+          <p:nvPr/>
+        </p:nvSpPr>
+        <p:spPr>
+          <a:xfrm>
+            <a:off x="6519672" y="2258568"/>
+            <a:ext cx="1828800" cy="292608"/>
+          </a:xfrm>
+          <a:prstGeom prst="rect">
+            <a:avLst>
+              <a:gd name="adj" fmla="val 25000"/>
+            </a:avLst>
+          </a:prstGeom>
+          <a:solidFill>
+            <a:srgbClr val="FCE7F3"/>
+          </a:solidFill>
+          <a:ln w="19050">
+            <a:solidFill>
+              <a:srgbClr val="DB2777"/>
+            </a:solidFill>
+            <a:prstDash val="solid"/>
+          </a:ln>
+          <a:effectLst>
+            <a:outerShdw sx="100000" sy="100000" kx="0" ky="0" algn="bl" rotWithShape="0" blurRad="101600" dist="38100" dir="8100000">
+              <a:srgbClr val="000000">
+                <a:alpha val="12000"/>
+              </a:srgbClr>
+            </a:outerShdw>
+          </a:effectLst>
+        </p:spPr>
+      </p:sp>
+      <p:sp>
+        <p:nvSpPr>
+          <p:cNvPr id="23" name="Text 21"/>
+          <p:cNvSpPr/>
+          <p:nvPr/>
+        </p:nvSpPr>
+        <p:spPr>
+          <a:xfrm>
+            <a:off x="6519672" y="2258568"/>
+            <a:ext cx="1828800" cy="292608"/>
+          </a:xfrm>
+          <a:prstGeom prst="rect">
+            <a:avLst/>
+          </a:prstGeom>
+          <a:noFill/>
+          <a:ln/>
+        </p:spPr>
+        <p:txBody>
+          <a:bodyPr wrap="square" lIns="0" tIns="0" rIns="0" bIns="0" rtlCol="0" anchor="ctr"/>
+          <a:lstStyle/>
+          <a:p>
+            <a:pPr algn="ctr" indent="0" marL="0">
+              <a:buNone/>
+            </a:pPr>
+            <a:r>
+              <a:rPr lang="en-US" sz="1300" b="1" dirty="0">
+                <a:solidFill>
+                  <a:srgbClr val="9D174D"/>
+                </a:solidFill>
+                <a:latin typeface="Trebuchet MS" pitchFamily="34" charset="0"/>
+                <a:ea typeface="Trebuchet MS" pitchFamily="34" charset="-122"/>
+                <a:cs typeface="Trebuchet MS" pitchFamily="34" charset="-120"/>
+              </a:rPr>
+              <a:t>ible</a:t>
+            </a:r>
+            <a:endParaRPr lang="en-US" sz="1300" dirty="0"/>
+          </a:p>
+        </p:txBody>
+      </p:sp>
+      <p:sp>
+        <p:nvSpPr>
+          <p:cNvPr id="24" name="Text 22"/>
+          <p:cNvSpPr/>
+          <p:nvPr/>
+        </p:nvSpPr>
+        <p:spPr>
+          <a:xfrm>
+            <a:off x="6519672" y="2569464"/>
+            <a:ext cx="1828800" cy="201168"/>
           </a:xfrm>
           <a:prstGeom prst="rect">
             <a:avLst/>
@@ -15403,23 +15832,23 @@
               <a:buNone/>
             </a:pPr>
             <a:r>
-              <a:rPr lang="en-US" sz="700" i="1" dirty="0">
-                <a:solidFill>
-                  <a:srgbClr val="94A3B8"/>
+              <a:rPr lang="en-US" sz="850" dirty="0">
+                <a:solidFill>
+                  <a:srgbClr val="475569"/>
                 </a:solidFill>
                 <a:latin typeface="Calibri" pitchFamily="34" charset="0"/>
                 <a:ea typeface="Calibri" pitchFamily="34" charset="-122"/>
                 <a:cs typeface="Calibri" pitchFamily="34" charset="-120"/>
               </a:rPr>
-              <a:t>'express' changes to 'express' before '-ion'; the 'ss' makes /sh/ sound</a:t>
-            </a:r>
-            <a:endParaRPr lang="en-US" sz="700" dirty="0"/>
-          </a:p>
-        </p:txBody>
-      </p:sp>
-      <p:sp>
-        <p:nvSpPr>
-          <p:cNvPr id="23" name="Shape 21"/>
+              <a:t>able to be</a:t>
+            </a:r>
+            <a:endParaRPr lang="en-US" sz="850" dirty="0"/>
+          </a:p>
+        </p:txBody>
+      </p:sp>
+      <p:sp>
+        <p:nvSpPr>
+          <p:cNvPr id="25" name="Shape 23"/>
           <p:cNvSpPr/>
           <p:nvPr/>
         </p:nvSpPr>
@@ -15446,7 +15875,7 @@
       </p:sp>
       <p:sp>
         <p:nvSpPr>
-          <p:cNvPr id="24" name="Text 22"/>
+          <p:cNvPr id="26" name="Text 24"/>
           <p:cNvSpPr/>
           <p:nvPr/>
         </p:nvSpPr>
@@ -15485,7 +15914,7 @@
       </p:sp>
       <p:sp>
         <p:nvSpPr>
-          <p:cNvPr id="25" name="Shape 23"/>
+          <p:cNvPr id="27" name="Shape 25"/>
           <p:cNvSpPr/>
           <p:nvPr/>
         </p:nvSpPr>
@@ -15512,14 +15941,14 @@
       </p:sp>
       <p:sp>
         <p:nvSpPr>
-          <p:cNvPr id="26" name="Shape 24"/>
-          <p:cNvSpPr/>
-          <p:nvPr/>
-        </p:nvSpPr>
-        <p:spPr>
-          <a:xfrm>
-            <a:off x="2313432" y="3364992"/>
-            <a:ext cx="1645920" cy="475488"/>
+          <p:cNvPr id="28" name="Shape 26"/>
+          <p:cNvSpPr/>
+          <p:nvPr/>
+        </p:nvSpPr>
+        <p:spPr>
+          <a:xfrm>
+            <a:off x="1978152" y="3364992"/>
+            <a:ext cx="1225296" cy="475488"/>
           </a:xfrm>
           <a:prstGeom prst="rect">
             <a:avLst>
@@ -15539,14 +15968,14 @@
       </p:sp>
       <p:sp>
         <p:nvSpPr>
-          <p:cNvPr id="27" name="Text 25"/>
-          <p:cNvSpPr/>
-          <p:nvPr/>
-        </p:nvSpPr>
-        <p:spPr>
-          <a:xfrm>
-            <a:off x="2313432" y="3364992"/>
-            <a:ext cx="1645920" cy="475488"/>
+          <p:cNvPr id="29" name="Text 27"/>
+          <p:cNvSpPr/>
+          <p:nvPr/>
+        </p:nvSpPr>
+        <p:spPr>
+          <a:xfrm>
+            <a:off x="1978152" y="3364992"/>
+            <a:ext cx="1225296" cy="475488"/>
           </a:xfrm>
           <a:prstGeom prst="rect">
             <a:avLst/>
@@ -15570,7 +15999,7 @@
                 <a:ea typeface="Trebuchet MS" pitchFamily="34" charset="-122"/>
                 <a:cs typeface="Trebuchet MS" pitchFamily="34" charset="-120"/>
               </a:rPr>
-              <a:t>ex</a:t>
+              <a:t>in</a:t>
             </a:r>
             <a:endParaRPr lang="en-US" sz="1400" dirty="0"/>
           </a:p>
@@ -15578,14 +16007,14 @@
       </p:sp>
       <p:sp>
         <p:nvSpPr>
-          <p:cNvPr id="28" name="Text 26"/>
-          <p:cNvSpPr/>
-          <p:nvPr/>
-        </p:nvSpPr>
-        <p:spPr>
-          <a:xfrm>
-            <a:off x="3959352" y="3364992"/>
-            <a:ext cx="411480" cy="475488"/>
+          <p:cNvPr id="30" name="Text 28"/>
+          <p:cNvSpPr/>
+          <p:nvPr/>
+        </p:nvSpPr>
+        <p:spPr>
+          <a:xfrm>
+            <a:off x="3203448" y="3364992"/>
+            <a:ext cx="76200" cy="475488"/>
           </a:xfrm>
           <a:prstGeom prst="rect">
             <a:avLst/>
@@ -15617,14 +16046,14 @@
       </p:sp>
       <p:sp>
         <p:nvSpPr>
-          <p:cNvPr id="29" name="Shape 27"/>
-          <p:cNvSpPr/>
-          <p:nvPr/>
-        </p:nvSpPr>
-        <p:spPr>
-          <a:xfrm>
-            <a:off x="4370832" y="3364992"/>
-            <a:ext cx="1645920" cy="475488"/>
+          <p:cNvPr id="31" name="Shape 29"/>
+          <p:cNvSpPr/>
+          <p:nvPr/>
+        </p:nvSpPr>
+        <p:spPr>
+          <a:xfrm>
+            <a:off x="3279648" y="3364992"/>
+            <a:ext cx="1225296" cy="475488"/>
           </a:xfrm>
           <a:prstGeom prst="rect">
             <a:avLst>
@@ -15644,14 +16073,14 @@
       </p:sp>
       <p:sp>
         <p:nvSpPr>
-          <p:cNvPr id="30" name="Text 28"/>
-          <p:cNvSpPr/>
-          <p:nvPr/>
-        </p:nvSpPr>
-        <p:spPr>
-          <a:xfrm>
-            <a:off x="4370832" y="3364992"/>
-            <a:ext cx="1645920" cy="475488"/>
+          <p:cNvPr id="32" name="Text 30"/>
+          <p:cNvSpPr/>
+          <p:nvPr/>
+        </p:nvSpPr>
+        <p:spPr>
+          <a:xfrm>
+            <a:off x="3279648" y="3364992"/>
+            <a:ext cx="1225296" cy="475488"/>
           </a:xfrm>
           <a:prstGeom prst="rect">
             <a:avLst/>
@@ -15675,7 +16104,7 @@
                 <a:ea typeface="Trebuchet MS" pitchFamily="34" charset="-122"/>
                 <a:cs typeface="Trebuchet MS" pitchFamily="34" charset="-120"/>
               </a:rPr>
-              <a:t>press</a:t>
+              <a:t>ex</a:t>
             </a:r>
             <a:endParaRPr lang="en-US" sz="1400" dirty="0"/>
           </a:p>
@@ -15683,14 +16112,14 @@
       </p:sp>
       <p:sp>
         <p:nvSpPr>
-          <p:cNvPr id="31" name="Text 29"/>
-          <p:cNvSpPr/>
-          <p:nvPr/>
-        </p:nvSpPr>
-        <p:spPr>
-          <a:xfrm>
-            <a:off x="6016752" y="3364992"/>
-            <a:ext cx="411480" cy="475488"/>
+          <p:cNvPr id="33" name="Text 31"/>
+          <p:cNvSpPr/>
+          <p:nvPr/>
+        </p:nvSpPr>
+        <p:spPr>
+          <a:xfrm>
+            <a:off x="4504944" y="3364992"/>
+            <a:ext cx="76200" cy="475488"/>
           </a:xfrm>
           <a:prstGeom prst="rect">
             <a:avLst/>
@@ -15722,14 +16151,14 @@
       </p:sp>
       <p:sp>
         <p:nvSpPr>
-          <p:cNvPr id="32" name="Shape 30"/>
-          <p:cNvSpPr/>
-          <p:nvPr/>
-        </p:nvSpPr>
-        <p:spPr>
-          <a:xfrm>
-            <a:off x="6428232" y="3364992"/>
-            <a:ext cx="1645920" cy="475488"/>
+          <p:cNvPr id="34" name="Shape 32"/>
+          <p:cNvSpPr/>
+          <p:nvPr/>
+        </p:nvSpPr>
+        <p:spPr>
+          <a:xfrm>
+            <a:off x="4581144" y="3364992"/>
+            <a:ext cx="1225296" cy="475488"/>
           </a:xfrm>
           <a:prstGeom prst="rect">
             <a:avLst>
@@ -15749,14 +16178,14 @@
       </p:sp>
       <p:sp>
         <p:nvSpPr>
-          <p:cNvPr id="33" name="Text 31"/>
-          <p:cNvSpPr/>
-          <p:nvPr/>
-        </p:nvSpPr>
-        <p:spPr>
-          <a:xfrm>
-            <a:off x="6428232" y="3364992"/>
-            <a:ext cx="1645920" cy="475488"/>
+          <p:cNvPr id="35" name="Text 33"/>
+          <p:cNvSpPr/>
+          <p:nvPr/>
+        </p:nvSpPr>
+        <p:spPr>
+          <a:xfrm>
+            <a:off x="4581144" y="3364992"/>
+            <a:ext cx="1225296" cy="475488"/>
           </a:xfrm>
           <a:prstGeom prst="rect">
             <a:avLst/>
@@ -15780,7 +16209,7 @@
                 <a:ea typeface="Trebuchet MS" pitchFamily="34" charset="-122"/>
                 <a:cs typeface="Trebuchet MS" pitchFamily="34" charset="-120"/>
               </a:rPr>
-              <a:t>ion</a:t>
+              <a:t>press</a:t>
             </a:r>
             <a:endParaRPr lang="en-US" sz="1400" dirty="0"/>
           </a:p>
@@ -15788,7 +16217,217 @@
       </p:sp>
       <p:sp>
         <p:nvSpPr>
-          <p:cNvPr id="34" name="Shape 32"/>
+          <p:cNvPr id="36" name="Text 34"/>
+          <p:cNvSpPr/>
+          <p:nvPr/>
+        </p:nvSpPr>
+        <p:spPr>
+          <a:xfrm>
+            <a:off x="5806440" y="3364992"/>
+            <a:ext cx="76200" cy="475488"/>
+          </a:xfrm>
+          <a:prstGeom prst="rect">
+            <a:avLst/>
+          </a:prstGeom>
+          <a:noFill/>
+          <a:ln/>
+        </p:spPr>
+        <p:txBody>
+          <a:bodyPr wrap="square" lIns="0" tIns="0" rIns="0" bIns="0" rtlCol="0" anchor="ctr"/>
+          <a:lstStyle/>
+          <a:p>
+            <a:pPr algn="ctr" indent="0" marL="0">
+              <a:buNone/>
+            </a:pPr>
+            <a:r>
+              <a:rPr lang="en-US" sz="1600" b="1" dirty="0">
+                <a:solidFill>
+                  <a:srgbClr val="0D9488"/>
+                </a:solidFill>
+                <a:latin typeface="Trebuchet MS" pitchFamily="34" charset="0"/>
+                <a:ea typeface="Trebuchet MS" pitchFamily="34" charset="-122"/>
+                <a:cs typeface="Trebuchet MS" pitchFamily="34" charset="-120"/>
+              </a:rPr>
+              <a:t>·</a:t>
+            </a:r>
+            <a:endParaRPr lang="en-US" sz="1600" dirty="0"/>
+          </a:p>
+        </p:txBody>
+      </p:sp>
+      <p:sp>
+        <p:nvSpPr>
+          <p:cNvPr id="37" name="Shape 35"/>
+          <p:cNvSpPr/>
+          <p:nvPr/>
+        </p:nvSpPr>
+        <p:spPr>
+          <a:xfrm>
+            <a:off x="5882640" y="3364992"/>
+            <a:ext cx="1225296" cy="475488"/>
+          </a:xfrm>
+          <a:prstGeom prst="rect">
+            <a:avLst>
+              <a:gd name="adj" fmla="val 9615"/>
+            </a:avLst>
+          </a:prstGeom>
+          <a:solidFill>
+            <a:srgbClr val="FFFFFF"/>
+          </a:solidFill>
+          <a:ln w="12700">
+            <a:solidFill>
+              <a:srgbClr val="0D9488"/>
+            </a:solidFill>
+            <a:prstDash val="solid"/>
+          </a:ln>
+        </p:spPr>
+      </p:sp>
+      <p:sp>
+        <p:nvSpPr>
+          <p:cNvPr id="38" name="Text 36"/>
+          <p:cNvSpPr/>
+          <p:nvPr/>
+        </p:nvSpPr>
+        <p:spPr>
+          <a:xfrm>
+            <a:off x="5882640" y="3364992"/>
+            <a:ext cx="1225296" cy="475488"/>
+          </a:xfrm>
+          <a:prstGeom prst="rect">
+            <a:avLst/>
+          </a:prstGeom>
+          <a:noFill/>
+          <a:ln/>
+        </p:spPr>
+        <p:txBody>
+          <a:bodyPr wrap="square" lIns="0" tIns="0" rIns="0" bIns="0" rtlCol="0" anchor="ctr"/>
+          <a:lstStyle/>
+          <a:p>
+            <a:pPr algn="ctr" indent="0" marL="0">
+              <a:buNone/>
+            </a:pPr>
+            <a:r>
+              <a:rPr lang="en-US" sz="1400" b="1" dirty="0">
+                <a:solidFill>
+                  <a:srgbClr val="0D9488"/>
+                </a:solidFill>
+                <a:latin typeface="Trebuchet MS" pitchFamily="34" charset="0"/>
+                <a:ea typeface="Trebuchet MS" pitchFamily="34" charset="-122"/>
+                <a:cs typeface="Trebuchet MS" pitchFamily="34" charset="-120"/>
+              </a:rPr>
+              <a:t>i</a:t>
+            </a:r>
+            <a:endParaRPr lang="en-US" sz="1400" dirty="0"/>
+          </a:p>
+        </p:txBody>
+      </p:sp>
+      <p:sp>
+        <p:nvSpPr>
+          <p:cNvPr id="39" name="Text 37"/>
+          <p:cNvSpPr/>
+          <p:nvPr/>
+        </p:nvSpPr>
+        <p:spPr>
+          <a:xfrm>
+            <a:off x="7107936" y="3364992"/>
+            <a:ext cx="76200" cy="475488"/>
+          </a:xfrm>
+          <a:prstGeom prst="rect">
+            <a:avLst/>
+          </a:prstGeom>
+          <a:noFill/>
+          <a:ln/>
+        </p:spPr>
+        <p:txBody>
+          <a:bodyPr wrap="square" lIns="0" tIns="0" rIns="0" bIns="0" rtlCol="0" anchor="ctr"/>
+          <a:lstStyle/>
+          <a:p>
+            <a:pPr algn="ctr" indent="0" marL="0">
+              <a:buNone/>
+            </a:pPr>
+            <a:r>
+              <a:rPr lang="en-US" sz="1600" b="1" dirty="0">
+                <a:solidFill>
+                  <a:srgbClr val="0D9488"/>
+                </a:solidFill>
+                <a:latin typeface="Trebuchet MS" pitchFamily="34" charset="0"/>
+                <a:ea typeface="Trebuchet MS" pitchFamily="34" charset="-122"/>
+                <a:cs typeface="Trebuchet MS" pitchFamily="34" charset="-120"/>
+              </a:rPr>
+              <a:t>·</a:t>
+            </a:r>
+            <a:endParaRPr lang="en-US" sz="1600" dirty="0"/>
+          </a:p>
+        </p:txBody>
+      </p:sp>
+      <p:sp>
+        <p:nvSpPr>
+          <p:cNvPr id="40" name="Shape 38"/>
+          <p:cNvSpPr/>
+          <p:nvPr/>
+        </p:nvSpPr>
+        <p:spPr>
+          <a:xfrm>
+            <a:off x="7184136" y="3364992"/>
+            <a:ext cx="1225296" cy="475488"/>
+          </a:xfrm>
+          <a:prstGeom prst="rect">
+            <a:avLst>
+              <a:gd name="adj" fmla="val 9615"/>
+            </a:avLst>
+          </a:prstGeom>
+          <a:solidFill>
+            <a:srgbClr val="FFFFFF"/>
+          </a:solidFill>
+          <a:ln w="12700">
+            <a:solidFill>
+              <a:srgbClr val="0D9488"/>
+            </a:solidFill>
+            <a:prstDash val="solid"/>
+          </a:ln>
+        </p:spPr>
+      </p:sp>
+      <p:sp>
+        <p:nvSpPr>
+          <p:cNvPr id="41" name="Text 39"/>
+          <p:cNvSpPr/>
+          <p:nvPr/>
+        </p:nvSpPr>
+        <p:spPr>
+          <a:xfrm>
+            <a:off x="7184136" y="3364992"/>
+            <a:ext cx="1225296" cy="475488"/>
+          </a:xfrm>
+          <a:prstGeom prst="rect">
+            <a:avLst/>
+          </a:prstGeom>
+          <a:noFill/>
+          <a:ln/>
+        </p:spPr>
+        <p:txBody>
+          <a:bodyPr wrap="square" lIns="0" tIns="0" rIns="0" bIns="0" rtlCol="0" anchor="ctr"/>
+          <a:lstStyle/>
+          <a:p>
+            <a:pPr algn="ctr" indent="0" marL="0">
+              <a:buNone/>
+            </a:pPr>
+            <a:r>
+              <a:rPr lang="en-US" sz="1400" b="1" dirty="0">
+                <a:solidFill>
+                  <a:srgbClr val="0D9488"/>
+                </a:solidFill>
+                <a:latin typeface="Trebuchet MS" pitchFamily="34" charset="0"/>
+                <a:ea typeface="Trebuchet MS" pitchFamily="34" charset="-122"/>
+                <a:cs typeface="Trebuchet MS" pitchFamily="34" charset="-120"/>
+              </a:rPr>
+              <a:t>ble</a:t>
+            </a:r>
+            <a:endParaRPr lang="en-US" sz="1400" dirty="0"/>
+          </a:p>
+        </p:txBody>
+      </p:sp>
+      <p:sp>
+        <p:nvSpPr>
+          <p:cNvPr id="42" name="Shape 40"/>
           <p:cNvSpPr/>
           <p:nvPr/>
         </p:nvSpPr>
@@ -15815,7 +16454,7 @@
       </p:sp>
       <p:sp>
         <p:nvSpPr>
-          <p:cNvPr id="35" name="Text 33"/>
+          <p:cNvPr id="43" name="Text 41"/>
           <p:cNvSpPr/>
           <p:nvPr/>
         </p:nvSpPr>
@@ -15854,7 +16493,7 @@
       </p:sp>
       <p:sp>
         <p:nvSpPr>
-          <p:cNvPr id="36" name="Shape 34"/>
+          <p:cNvPr id="44" name="Shape 42"/>
           <p:cNvSpPr/>
           <p:nvPr/>
         </p:nvSpPr>
@@ -15881,14 +16520,14 @@
       </p:sp>
       <p:sp>
         <p:nvSpPr>
-          <p:cNvPr id="37" name="Shape 35"/>
-          <p:cNvSpPr/>
-          <p:nvPr/>
-        </p:nvSpPr>
-        <p:spPr>
-          <a:xfrm>
-            <a:off x="2023872" y="4169664"/>
-            <a:ext cx="685800" cy="384048"/>
+          <p:cNvPr id="45" name="Shape 43"/>
+          <p:cNvSpPr/>
+          <p:nvPr/>
+        </p:nvSpPr>
+        <p:spPr>
+          <a:xfrm>
+            <a:off x="1952244" y="4169664"/>
+            <a:ext cx="543652" cy="384048"/>
           </a:xfrm>
           <a:prstGeom prst="rect">
             <a:avLst>
@@ -15908,14 +16547,14 @@
       </p:sp>
       <p:sp>
         <p:nvSpPr>
-          <p:cNvPr id="38" name="Text 36"/>
-          <p:cNvSpPr/>
-          <p:nvPr/>
-        </p:nvSpPr>
-        <p:spPr>
-          <a:xfrm>
-            <a:off x="2023872" y="4169664"/>
-            <a:ext cx="685800" cy="384048"/>
+          <p:cNvPr id="46" name="Text 44"/>
+          <p:cNvSpPr/>
+          <p:nvPr/>
+        </p:nvSpPr>
+        <p:spPr>
+          <a:xfrm>
+            <a:off x="1952244" y="4169664"/>
+            <a:ext cx="543652" cy="384048"/>
           </a:xfrm>
           <a:prstGeom prst="rect">
             <a:avLst/>
@@ -15939,7 +16578,7 @@
                 <a:ea typeface="Trebuchet MS" pitchFamily="34" charset="-122"/>
                 <a:cs typeface="Trebuchet MS" pitchFamily="34" charset="-120"/>
               </a:rPr>
-              <a:t>e</a:t>
+              <a:t>i</a:t>
             </a:r>
             <a:endParaRPr lang="en-US" sz="900" dirty="0"/>
           </a:p>
@@ -15947,14 +16586,14 @@
       </p:sp>
       <p:sp>
         <p:nvSpPr>
-          <p:cNvPr id="39" name="Shape 37"/>
-          <p:cNvSpPr/>
-          <p:nvPr/>
-        </p:nvSpPr>
-        <p:spPr>
-          <a:xfrm>
-            <a:off x="2831592" y="4169664"/>
-            <a:ext cx="685800" cy="384048"/>
+          <p:cNvPr id="47" name="Shape 45"/>
+          <p:cNvSpPr/>
+          <p:nvPr/>
+        </p:nvSpPr>
+        <p:spPr>
+          <a:xfrm>
+            <a:off x="2546188" y="4169664"/>
+            <a:ext cx="543652" cy="384048"/>
           </a:xfrm>
           <a:prstGeom prst="rect">
             <a:avLst>
@@ -15974,14 +16613,14 @@
       </p:sp>
       <p:sp>
         <p:nvSpPr>
-          <p:cNvPr id="40" name="Text 38"/>
-          <p:cNvSpPr/>
-          <p:nvPr/>
-        </p:nvSpPr>
-        <p:spPr>
-          <a:xfrm>
-            <a:off x="2831592" y="4169664"/>
-            <a:ext cx="685800" cy="384048"/>
+          <p:cNvPr id="48" name="Text 46"/>
+          <p:cNvSpPr/>
+          <p:nvPr/>
+        </p:nvSpPr>
+        <p:spPr>
+          <a:xfrm>
+            <a:off x="2546188" y="4169664"/>
+            <a:ext cx="543652" cy="384048"/>
           </a:xfrm>
           <a:prstGeom prst="rect">
             <a:avLst/>
@@ -16005,6 +16644,138 @@
                 <a:ea typeface="Trebuchet MS" pitchFamily="34" charset="-122"/>
                 <a:cs typeface="Trebuchet MS" pitchFamily="34" charset="-120"/>
               </a:rPr>
+              <a:t>n</a:t>
+            </a:r>
+            <a:endParaRPr lang="en-US" sz="900" dirty="0"/>
+          </a:p>
+        </p:txBody>
+      </p:sp>
+      <p:sp>
+        <p:nvSpPr>
+          <p:cNvPr id="49" name="Shape 47"/>
+          <p:cNvSpPr/>
+          <p:nvPr/>
+        </p:nvSpPr>
+        <p:spPr>
+          <a:xfrm>
+            <a:off x="3140133" y="4169664"/>
+            <a:ext cx="543652" cy="384048"/>
+          </a:xfrm>
+          <a:prstGeom prst="rect">
+            <a:avLst>
+              <a:gd name="adj" fmla="val 9524"/>
+            </a:avLst>
+          </a:prstGeom>
+          <a:solidFill>
+            <a:srgbClr val="FFFFFF"/>
+          </a:solidFill>
+          <a:ln w="12700">
+            <a:solidFill>
+              <a:srgbClr val="DB2777"/>
+            </a:solidFill>
+            <a:prstDash val="solid"/>
+          </a:ln>
+        </p:spPr>
+      </p:sp>
+      <p:sp>
+        <p:nvSpPr>
+          <p:cNvPr id="50" name="Text 48"/>
+          <p:cNvSpPr/>
+          <p:nvPr/>
+        </p:nvSpPr>
+        <p:spPr>
+          <a:xfrm>
+            <a:off x="3140133" y="4169664"/>
+            <a:ext cx="543652" cy="384048"/>
+          </a:xfrm>
+          <a:prstGeom prst="rect">
+            <a:avLst/>
+          </a:prstGeom>
+          <a:noFill/>
+          <a:ln/>
+        </p:spPr>
+        <p:txBody>
+          <a:bodyPr wrap="square" lIns="0" tIns="0" rIns="0" bIns="0" rtlCol="0" anchor="ctr"/>
+          <a:lstStyle/>
+          <a:p>
+            <a:pPr algn="ctr" indent="0" marL="0">
+              <a:buNone/>
+            </a:pPr>
+            <a:r>
+              <a:rPr lang="en-US" sz="900" b="1" dirty="0">
+                <a:solidFill>
+                  <a:srgbClr val="9D174D"/>
+                </a:solidFill>
+                <a:latin typeface="Trebuchet MS" pitchFamily="34" charset="0"/>
+                <a:ea typeface="Trebuchet MS" pitchFamily="34" charset="-122"/>
+                <a:cs typeface="Trebuchet MS" pitchFamily="34" charset="-120"/>
+              </a:rPr>
+              <a:t>e</a:t>
+            </a:r>
+            <a:endParaRPr lang="en-US" sz="900" dirty="0"/>
+          </a:p>
+        </p:txBody>
+      </p:sp>
+      <p:sp>
+        <p:nvSpPr>
+          <p:cNvPr id="51" name="Shape 49"/>
+          <p:cNvSpPr/>
+          <p:nvPr/>
+        </p:nvSpPr>
+        <p:spPr>
+          <a:xfrm>
+            <a:off x="3734077" y="4169664"/>
+            <a:ext cx="543652" cy="384048"/>
+          </a:xfrm>
+          <a:prstGeom prst="rect">
+            <a:avLst>
+              <a:gd name="adj" fmla="val 9524"/>
+            </a:avLst>
+          </a:prstGeom>
+          <a:solidFill>
+            <a:srgbClr val="FFFFFF"/>
+          </a:solidFill>
+          <a:ln w="12700">
+            <a:solidFill>
+              <a:srgbClr val="DB2777"/>
+            </a:solidFill>
+            <a:prstDash val="solid"/>
+          </a:ln>
+        </p:spPr>
+      </p:sp>
+      <p:sp>
+        <p:nvSpPr>
+          <p:cNvPr id="52" name="Text 50"/>
+          <p:cNvSpPr/>
+          <p:nvPr/>
+        </p:nvSpPr>
+        <p:spPr>
+          <a:xfrm>
+            <a:off x="3734077" y="4169664"/>
+            <a:ext cx="543652" cy="384048"/>
+          </a:xfrm>
+          <a:prstGeom prst="rect">
+            <a:avLst/>
+          </a:prstGeom>
+          <a:noFill/>
+          <a:ln/>
+        </p:spPr>
+        <p:txBody>
+          <a:bodyPr wrap="square" lIns="0" tIns="0" rIns="0" bIns="0" rtlCol="0" anchor="ctr"/>
+          <a:lstStyle/>
+          <a:p>
+            <a:pPr algn="ctr" indent="0" marL="0">
+              <a:buNone/>
+            </a:pPr>
+            <a:r>
+              <a:rPr lang="en-US" sz="900" b="1" dirty="0">
+                <a:solidFill>
+                  <a:srgbClr val="9D174D"/>
+                </a:solidFill>
+                <a:latin typeface="Trebuchet MS" pitchFamily="34" charset="0"/>
+                <a:ea typeface="Trebuchet MS" pitchFamily="34" charset="-122"/>
+                <a:cs typeface="Trebuchet MS" pitchFamily="34" charset="-120"/>
+              </a:rPr>
               <a:t>x</a:t>
             </a:r>
             <a:endParaRPr lang="en-US" sz="900" dirty="0"/>
@@ -16013,14 +16784,14 @@
       </p:sp>
       <p:sp>
         <p:nvSpPr>
-          <p:cNvPr id="41" name="Text 39"/>
-          <p:cNvSpPr/>
-          <p:nvPr/>
-        </p:nvSpPr>
-        <p:spPr>
-          <a:xfrm>
-            <a:off x="2831592" y="4572000"/>
-            <a:ext cx="685800" cy="219456"/>
+          <p:cNvPr id="53" name="Text 51"/>
+          <p:cNvSpPr/>
+          <p:nvPr/>
+        </p:nvSpPr>
+        <p:spPr>
+          <a:xfrm>
+            <a:off x="3734077" y="4572000"/>
+            <a:ext cx="543652" cy="219456"/>
           </a:xfrm>
           <a:prstGeom prst="rect">
             <a:avLst/>
@@ -16052,14 +16823,14 @@
       </p:sp>
       <p:sp>
         <p:nvSpPr>
-          <p:cNvPr id="42" name="Shape 40"/>
-          <p:cNvSpPr/>
-          <p:nvPr/>
-        </p:nvSpPr>
-        <p:spPr>
-          <a:xfrm>
-            <a:off x="3639312" y="4169664"/>
-            <a:ext cx="685800" cy="384048"/>
+          <p:cNvPr id="54" name="Shape 52"/>
+          <p:cNvSpPr/>
+          <p:nvPr/>
+        </p:nvSpPr>
+        <p:spPr>
+          <a:xfrm>
+            <a:off x="4328021" y="4169664"/>
+            <a:ext cx="543652" cy="384048"/>
           </a:xfrm>
           <a:prstGeom prst="rect">
             <a:avLst>
@@ -16079,14 +16850,14 @@
       </p:sp>
       <p:sp>
         <p:nvSpPr>
-          <p:cNvPr id="43" name="Text 41"/>
-          <p:cNvSpPr/>
-          <p:nvPr/>
-        </p:nvSpPr>
-        <p:spPr>
-          <a:xfrm>
-            <a:off x="3639312" y="4169664"/>
-            <a:ext cx="685800" cy="384048"/>
+          <p:cNvPr id="55" name="Text 53"/>
+          <p:cNvSpPr/>
+          <p:nvPr/>
+        </p:nvSpPr>
+        <p:spPr>
+          <a:xfrm>
+            <a:off x="4328021" y="4169664"/>
+            <a:ext cx="543652" cy="384048"/>
           </a:xfrm>
           <a:prstGeom prst="rect">
             <a:avLst/>
@@ -16118,14 +16889,14 @@
       </p:sp>
       <p:sp>
         <p:nvSpPr>
-          <p:cNvPr id="44" name="Shape 42"/>
-          <p:cNvSpPr/>
-          <p:nvPr/>
-        </p:nvSpPr>
-        <p:spPr>
-          <a:xfrm>
-            <a:off x="4447032" y="4169664"/>
-            <a:ext cx="685800" cy="384048"/>
+          <p:cNvPr id="56" name="Shape 54"/>
+          <p:cNvSpPr/>
+          <p:nvPr/>
+        </p:nvSpPr>
+        <p:spPr>
+          <a:xfrm>
+            <a:off x="4921966" y="4169664"/>
+            <a:ext cx="543652" cy="384048"/>
           </a:xfrm>
           <a:prstGeom prst="rect">
             <a:avLst>
@@ -16145,14 +16916,14 @@
       </p:sp>
       <p:sp>
         <p:nvSpPr>
-          <p:cNvPr id="45" name="Text 43"/>
-          <p:cNvSpPr/>
-          <p:nvPr/>
-        </p:nvSpPr>
-        <p:spPr>
-          <a:xfrm>
-            <a:off x="4447032" y="4169664"/>
-            <a:ext cx="685800" cy="384048"/>
+          <p:cNvPr id="57" name="Text 55"/>
+          <p:cNvSpPr/>
+          <p:nvPr/>
+        </p:nvSpPr>
+        <p:spPr>
+          <a:xfrm>
+            <a:off x="4921966" y="4169664"/>
+            <a:ext cx="543652" cy="384048"/>
           </a:xfrm>
           <a:prstGeom prst="rect">
             <a:avLst/>
@@ -16184,14 +16955,14 @@
       </p:sp>
       <p:sp>
         <p:nvSpPr>
-          <p:cNvPr id="46" name="Shape 44"/>
-          <p:cNvSpPr/>
-          <p:nvPr/>
-        </p:nvSpPr>
-        <p:spPr>
-          <a:xfrm>
-            <a:off x="5254752" y="4169664"/>
-            <a:ext cx="685800" cy="384048"/>
+          <p:cNvPr id="58" name="Shape 56"/>
+          <p:cNvSpPr/>
+          <p:nvPr/>
+        </p:nvSpPr>
+        <p:spPr>
+          <a:xfrm>
+            <a:off x="5515910" y="4169664"/>
+            <a:ext cx="543652" cy="384048"/>
           </a:xfrm>
           <a:prstGeom prst="rect">
             <a:avLst>
@@ -16211,14 +16982,14 @@
       </p:sp>
       <p:sp>
         <p:nvSpPr>
-          <p:cNvPr id="47" name="Text 45"/>
-          <p:cNvSpPr/>
-          <p:nvPr/>
-        </p:nvSpPr>
-        <p:spPr>
-          <a:xfrm>
-            <a:off x="5254752" y="4169664"/>
-            <a:ext cx="685800" cy="384048"/>
+          <p:cNvPr id="59" name="Text 57"/>
+          <p:cNvSpPr/>
+          <p:nvPr/>
+        </p:nvSpPr>
+        <p:spPr>
+          <a:xfrm>
+            <a:off x="5515910" y="4169664"/>
+            <a:ext cx="543652" cy="384048"/>
           </a:xfrm>
           <a:prstGeom prst="rect">
             <a:avLst/>
@@ -16250,14 +17021,14 @@
       </p:sp>
       <p:sp>
         <p:nvSpPr>
-          <p:cNvPr id="48" name="Shape 46"/>
-          <p:cNvSpPr/>
-          <p:nvPr/>
-        </p:nvSpPr>
-        <p:spPr>
-          <a:xfrm>
-            <a:off x="6062472" y="4169664"/>
-            <a:ext cx="685800" cy="384048"/>
+          <p:cNvPr id="60" name="Shape 58"/>
+          <p:cNvSpPr/>
+          <p:nvPr/>
+        </p:nvSpPr>
+        <p:spPr>
+          <a:xfrm>
+            <a:off x="6109855" y="4169664"/>
+            <a:ext cx="543652" cy="384048"/>
           </a:xfrm>
           <a:prstGeom prst="rect">
             <a:avLst>
@@ -16277,14 +17048,14 @@
       </p:sp>
       <p:sp>
         <p:nvSpPr>
-          <p:cNvPr id="49" name="Text 47"/>
-          <p:cNvSpPr/>
-          <p:nvPr/>
-        </p:nvSpPr>
-        <p:spPr>
-          <a:xfrm>
-            <a:off x="6062472" y="4169664"/>
-            <a:ext cx="685800" cy="384048"/>
+          <p:cNvPr id="61" name="Text 59"/>
+          <p:cNvSpPr/>
+          <p:nvPr/>
+        </p:nvSpPr>
+        <p:spPr>
+          <a:xfrm>
+            <a:off x="6109855" y="4169664"/>
+            <a:ext cx="543652" cy="384048"/>
           </a:xfrm>
           <a:prstGeom prst="rect">
             <a:avLst/>
@@ -16316,53 +17087,14 @@
       </p:sp>
       <p:sp>
         <p:nvSpPr>
-          <p:cNvPr id="50" name="Text 48"/>
-          <p:cNvSpPr/>
-          <p:nvPr/>
-        </p:nvSpPr>
-        <p:spPr>
-          <a:xfrm>
-            <a:off x="6062472" y="4572000"/>
-            <a:ext cx="685800" cy="219456"/>
-          </a:xfrm>
-          <a:prstGeom prst="rect">
-            <a:avLst/>
-          </a:prstGeom>
-          <a:noFill/>
-          <a:ln/>
-        </p:spPr>
-        <p:txBody>
-          <a:bodyPr wrap="square" lIns="0" tIns="0" rIns="0" bIns="0" rtlCol="0" anchor="t"/>
-          <a:lstStyle/>
-          <a:p>
-            <a:pPr algn="ctr" indent="0" marL="0">
-              <a:buNone/>
-            </a:pPr>
-            <a:r>
-              <a:rPr lang="en-US" sz="750" i="1" dirty="0">
-                <a:solidFill>
-                  <a:srgbClr val="94A3B8"/>
-                </a:solidFill>
-                <a:latin typeface="Calibri" pitchFamily="34" charset="0"/>
-                <a:ea typeface="Calibri" pitchFamily="34" charset="-122"/>
-                <a:cs typeface="Calibri" pitchFamily="34" charset="-120"/>
-              </a:rPr>
-              <a:t>/sh/</a:t>
-            </a:r>
-            <a:endParaRPr lang="en-US" sz="750" dirty="0"/>
-          </a:p>
-        </p:txBody>
-      </p:sp>
-      <p:sp>
-        <p:nvSpPr>
-          <p:cNvPr id="51" name="Shape 49"/>
-          <p:cNvSpPr/>
-          <p:nvPr/>
-        </p:nvSpPr>
-        <p:spPr>
-          <a:xfrm>
-            <a:off x="6870192" y="4169664"/>
-            <a:ext cx="685800" cy="384048"/>
+          <p:cNvPr id="62" name="Shape 60"/>
+          <p:cNvSpPr/>
+          <p:nvPr/>
+        </p:nvSpPr>
+        <p:spPr>
+          <a:xfrm>
+            <a:off x="6703799" y="4169664"/>
+            <a:ext cx="543652" cy="384048"/>
           </a:xfrm>
           <a:prstGeom prst="rect">
             <a:avLst>
@@ -16382,14 +17114,14 @@
       </p:sp>
       <p:sp>
         <p:nvSpPr>
-          <p:cNvPr id="52" name="Text 50"/>
-          <p:cNvSpPr/>
-          <p:nvPr/>
-        </p:nvSpPr>
-        <p:spPr>
-          <a:xfrm>
-            <a:off x="6870192" y="4169664"/>
-            <a:ext cx="685800" cy="384048"/>
+          <p:cNvPr id="63" name="Text 61"/>
+          <p:cNvSpPr/>
+          <p:nvPr/>
+        </p:nvSpPr>
+        <p:spPr>
+          <a:xfrm>
+            <a:off x="6703799" y="4169664"/>
+            <a:ext cx="543652" cy="384048"/>
           </a:xfrm>
           <a:prstGeom prst="rect">
             <a:avLst/>
@@ -16413,7 +17145,7 @@
                 <a:ea typeface="Trebuchet MS" pitchFamily="34" charset="-122"/>
                 <a:cs typeface="Trebuchet MS" pitchFamily="34" charset="-120"/>
               </a:rPr>
-              <a:t>io</a:t>
+              <a:t>i</a:t>
             </a:r>
             <a:endParaRPr lang="en-US" sz="900" dirty="0"/>
           </a:p>
@@ -16421,14 +17153,14 @@
       </p:sp>
       <p:sp>
         <p:nvSpPr>
-          <p:cNvPr id="53" name="Shape 51"/>
-          <p:cNvSpPr/>
-          <p:nvPr/>
-        </p:nvSpPr>
-        <p:spPr>
-          <a:xfrm>
-            <a:off x="7677912" y="4169664"/>
-            <a:ext cx="685800" cy="384048"/>
+          <p:cNvPr id="64" name="Shape 62"/>
+          <p:cNvSpPr/>
+          <p:nvPr/>
+        </p:nvSpPr>
+        <p:spPr>
+          <a:xfrm>
+            <a:off x="7297743" y="4169664"/>
+            <a:ext cx="543652" cy="384048"/>
           </a:xfrm>
           <a:prstGeom prst="rect">
             <a:avLst>
@@ -16448,14 +17180,14 @@
       </p:sp>
       <p:sp>
         <p:nvSpPr>
-          <p:cNvPr id="54" name="Text 52"/>
-          <p:cNvSpPr/>
-          <p:nvPr/>
-        </p:nvSpPr>
-        <p:spPr>
-          <a:xfrm>
-            <a:off x="7677912" y="4169664"/>
-            <a:ext cx="685800" cy="384048"/>
+          <p:cNvPr id="65" name="Text 63"/>
+          <p:cNvSpPr/>
+          <p:nvPr/>
+        </p:nvSpPr>
+        <p:spPr>
+          <a:xfrm>
+            <a:off x="7297743" y="4169664"/>
+            <a:ext cx="543652" cy="384048"/>
           </a:xfrm>
           <a:prstGeom prst="rect">
             <a:avLst/>
@@ -16479,7 +17211,73 @@
                 <a:ea typeface="Trebuchet MS" pitchFamily="34" charset="-122"/>
                 <a:cs typeface="Trebuchet MS" pitchFamily="34" charset="-120"/>
               </a:rPr>
-              <a:t>n</a:t>
+              <a:t>b</a:t>
+            </a:r>
+            <a:endParaRPr lang="en-US" sz="900" dirty="0"/>
+          </a:p>
+        </p:txBody>
+      </p:sp>
+      <p:sp>
+        <p:nvSpPr>
+          <p:cNvPr id="66" name="Shape 64"/>
+          <p:cNvSpPr/>
+          <p:nvPr/>
+        </p:nvSpPr>
+        <p:spPr>
+          <a:xfrm>
+            <a:off x="7891688" y="4169664"/>
+            <a:ext cx="543652" cy="384048"/>
+          </a:xfrm>
+          <a:prstGeom prst="rect">
+            <a:avLst>
+              <a:gd name="adj" fmla="val 9524"/>
+            </a:avLst>
+          </a:prstGeom>
+          <a:solidFill>
+            <a:srgbClr val="FFFFFF"/>
+          </a:solidFill>
+          <a:ln w="12700">
+            <a:solidFill>
+              <a:srgbClr val="DB2777"/>
+            </a:solidFill>
+            <a:prstDash val="solid"/>
+          </a:ln>
+        </p:spPr>
+      </p:sp>
+      <p:sp>
+        <p:nvSpPr>
+          <p:cNvPr id="67" name="Text 65"/>
+          <p:cNvSpPr/>
+          <p:nvPr/>
+        </p:nvSpPr>
+        <p:spPr>
+          <a:xfrm>
+            <a:off x="7891688" y="4169664"/>
+            <a:ext cx="543652" cy="384048"/>
+          </a:xfrm>
+          <a:prstGeom prst="rect">
+            <a:avLst/>
+          </a:prstGeom>
+          <a:noFill/>
+          <a:ln/>
+        </p:spPr>
+        <p:txBody>
+          <a:bodyPr wrap="square" lIns="0" tIns="0" rIns="0" bIns="0" rtlCol="0" anchor="ctr"/>
+          <a:lstStyle/>
+          <a:p>
+            <a:pPr algn="ctr" indent="0" marL="0">
+              <a:buNone/>
+            </a:pPr>
+            <a:r>
+              <a:rPr lang="en-US" sz="900" b="1" dirty="0">
+                <a:solidFill>
+                  <a:srgbClr val="9D174D"/>
+                </a:solidFill>
+                <a:latin typeface="Trebuchet MS" pitchFamily="34" charset="0"/>
+                <a:ea typeface="Trebuchet MS" pitchFamily="34" charset="-122"/>
+                <a:cs typeface="Trebuchet MS" pitchFamily="34" charset="-120"/>
+              </a:rPr>
+              <a:t>le</a:t>
             </a:r>
             <a:endParaRPr lang="en-US" sz="900" dirty="0"/>
           </a:p>
@@ -17053,7 +17851,7 @@
                 <a:ea typeface="Calibri" pitchFamily="34" charset="-122"/>
                 <a:cs typeface="Calibri" pitchFamily="34" charset="-120"/>
               </a:rPr>
-              <a:t>Word Labs  •  wordlabs.app  •  Root: 'express' = to push or press out</a:t>
+              <a:t>Word Labs  •  wordlabs.app  •  Root: 'express' = to push or squeeze out</a:t>
             </a:r>
             <a:endParaRPr lang="en-US" sz="800" dirty="0"/>
           </a:p>
@@ -17387,7 +18185,7 @@
                 <a:ea typeface="Trebuchet MS" pitchFamily="34" charset="-122"/>
                 <a:cs typeface="Trebuchet MS" pitchFamily="34" charset="-120"/>
               </a:rPr>
-              <a:t>2</a:t>
+              <a:t>1</a:t>
             </a:r>
             <a:pPr algn="ctr" indent="0" marL="0">
               <a:buNone/>
@@ -17401,7 +18199,7 @@
                 <a:ea typeface="Trebuchet MS" pitchFamily="34" charset="-122"/>
                 <a:cs typeface="Trebuchet MS" pitchFamily="34" charset="-120"/>
               </a:rPr>
-              <a:t>  punctuation marks</a:t>
+              <a:t>  punctuation mark</a:t>
             </a:r>
             <a:endParaRPr lang="en-US" sz="2800" dirty="0"/>
           </a:p>
@@ -17693,7 +18491,7 @@
                 <a:ea typeface="Calibri" pitchFamily="34" charset="-122"/>
                 <a:cs typeface="Calibri" pitchFamily="34" charset="-120"/>
               </a:rPr>
-              <a:t>Word Labs  •  wordlabs.app  •  Root: 'express' = to push or press out</a:t>
+              <a:t>Word Labs  •  wordlabs.app  •  Root: 'express' = to push or squeeze out</a:t>
             </a:r>
             <a:endParaRPr lang="en-US" sz="800" dirty="0"/>
           </a:p>
@@ -17805,7 +18603,7 @@
                 <a:ea typeface="Calibri" pitchFamily="34" charset="-122"/>
                 <a:cs typeface="Calibri" pitchFamily="34" charset="-120"/>
               </a:rPr>
-              <a:t>Although her </a:t>
+              <a:t>The teacher asked us to </a:t>
             </a:r>
             <a:pPr algn="l" indent="0" marL="0">
               <a:buNone/>
@@ -17822,7 +18620,7 @@
                 <a:ea typeface="Calibri" pitchFamily="34" charset="-122"/>
                 <a:cs typeface="Calibri" pitchFamily="34" charset="-120"/>
               </a:rPr>
-              <a:t>expressiveness</a:t>
+              <a:t>reexpress</a:t>
             </a:r>
             <a:pPr algn="l" indent="0" marL="0">
               <a:buNone/>
@@ -17836,7 +18634,7 @@
                 <a:ea typeface="Calibri" pitchFamily="34" charset="-122"/>
                 <a:cs typeface="Calibri" pitchFamily="34" charset="-120"/>
               </a:rPr>
-              <a:t> was remarkable, she found it </a:t>
+              <a:t> our ideas, because </a:t>
             </a:r>
             <a:pPr algn="l" indent="0" marL="0">
               <a:buNone/>
@@ -17853,7 +18651,7 @@
                 <a:ea typeface="Calibri" pitchFamily="34" charset="-122"/>
                 <a:cs typeface="Calibri" pitchFamily="34" charset="-120"/>
               </a:rPr>
-              <a:t>inexpressible</a:t>
+              <a:t>expressiveness</a:t>
             </a:r>
             <a:pPr algn="l" indent="0" marL="0">
               <a:buNone/>
@@ -17867,7 +18665,7 @@
                 <a:ea typeface="Calibri" pitchFamily="34" charset="-122"/>
                 <a:cs typeface="Calibri" pitchFamily="34" charset="-120"/>
               </a:rPr>
-              <a:t> to describe the beauty of the sunset; her </a:t>
+              <a:t> and </a:t>
             </a:r>
             <a:pPr algn="l" indent="0" marL="0">
               <a:buNone/>
@@ -17884,7 +18682,7 @@
                 <a:ea typeface="Calibri" pitchFamily="34" charset="-122"/>
                 <a:cs typeface="Calibri" pitchFamily="34" charset="-120"/>
               </a:rPr>
-              <a:t>expression</a:t>
+              <a:t>expressly</a:t>
             </a:r>
             <a:pPr algn="l" indent="0" marL="0">
               <a:buNone/>
@@ -17898,7 +18696,7 @@
                 <a:ea typeface="Calibri" pitchFamily="34" charset="-122"/>
                 <a:cs typeface="Calibri" pitchFamily="34" charset="-120"/>
               </a:rPr>
-              <a:t> left everyone speechless.</a:t>
+              <a:t> choosing the right words both matter in great writing.</a:t>
             </a:r>
             <a:endParaRPr lang="en-US" sz="1800" dirty="0"/>
           </a:p>
@@ -18053,7 +18851,7 @@
                 <a:ea typeface="Trebuchet MS" pitchFamily="34" charset="-122"/>
                 <a:cs typeface="Trebuchet MS" pitchFamily="34" charset="-120"/>
               </a:rPr>
-              <a:t>expressiveness</a:t>
+              <a:t>reexpress</a:t>
             </a:r>
             <a:endParaRPr lang="en-US" sz="1400" dirty="0"/>
           </a:p>
@@ -18181,7 +18979,7 @@
                 <a:ea typeface="Trebuchet MS" pitchFamily="34" charset="-122"/>
                 <a:cs typeface="Trebuchet MS" pitchFamily="34" charset="-120"/>
               </a:rPr>
-              <a:t>inexpressible</a:t>
+              <a:t>expressiveness</a:t>
             </a:r>
             <a:endParaRPr lang="en-US" sz="1400" dirty="0"/>
           </a:p>
@@ -18309,7 +19107,7 @@
                 <a:ea typeface="Trebuchet MS" pitchFamily="34" charset="-122"/>
                 <a:cs typeface="Trebuchet MS" pitchFamily="34" charset="-120"/>
               </a:rPr>
-              <a:t>expression</a:t>
+              <a:t>expressly</a:t>
             </a:r>
             <a:endParaRPr lang="en-US" sz="1400" dirty="0"/>
           </a:p>
@@ -18640,7 +19438,7 @@
                 <a:ea typeface="Calibri" pitchFamily="34" charset="-122"/>
                 <a:cs typeface="Calibri" pitchFamily="34" charset="-120"/>
               </a:rPr>
-              <a:t>Word Labs  •  wordlabs.app  •  Root: 'express' = to push or press out</a:t>
+              <a:t>Word Labs  •  wordlabs.app  •  Root: 'express' = to push or squeeze out</a:t>
             </a:r>
             <a:endParaRPr lang="en-US" sz="800" dirty="0"/>
           </a:p>
@@ -18779,7 +19577,7 @@
                 <a:ea typeface="Trebuchet MS" pitchFamily="34" charset="-122"/>
                 <a:cs typeface="Trebuchet MS" pitchFamily="34" charset="-120"/>
               </a:rPr>
-              <a:t>expressiveness</a:t>
+              <a:t>reexpress</a:t>
             </a:r>
             <a:endParaRPr lang="en-US" sz="2800" dirty="0"/>
           </a:p>
@@ -19467,7 +20265,7 @@
                 <a:ea typeface="Calibri" pitchFamily="34" charset="-122"/>
                 <a:cs typeface="Calibri" pitchFamily="34" charset="-120"/>
               </a:rPr>
-              <a:t>Word Labs  •  wordlabs.app  •  Root: 'express' = to push or press out</a:t>
+              <a:t>Word Labs  •  wordlabs.app  •  Root: 'express' = to push or squeeze out</a:t>
             </a:r>
             <a:endParaRPr lang="en-US" sz="800" dirty="0"/>
           </a:p>
@@ -19606,7 +20404,7 @@
                 <a:ea typeface="Trebuchet MS" pitchFamily="34" charset="-122"/>
                 <a:cs typeface="Trebuchet MS" pitchFamily="34" charset="-120"/>
               </a:rPr>
-              <a:t>expressiveness</a:t>
+              <a:t>reexpress</a:t>
             </a:r>
             <a:endParaRPr lang="en-US" sz="2800" dirty="0"/>
           </a:p>
@@ -19686,7 +20484,7 @@
         </p:nvSpPr>
         <p:spPr>
           <a:xfrm>
-            <a:off x="2221992" y="2258568"/>
+            <a:off x="2938272" y="2258568"/>
             <a:ext cx="1828800" cy="292608"/>
           </a:xfrm>
           <a:prstGeom prst="rect">
@@ -19695,11 +20493,11 @@
             </a:avLst>
           </a:prstGeom>
           <a:solidFill>
-            <a:srgbClr val="CCFBF1"/>
+            <a:srgbClr val="DDD6FE"/>
           </a:solidFill>
           <a:ln w="19050">
             <a:solidFill>
-              <a:srgbClr val="0D9488"/>
+              <a:srgbClr val="7C3AED"/>
             </a:solidFill>
             <a:prstDash val="solid"/>
           </a:ln>
@@ -19720,7 +20518,7 @@
         </p:nvSpPr>
         <p:spPr>
           <a:xfrm>
-            <a:off x="2221992" y="2258568"/>
+            <a:off x="2938272" y="2258568"/>
             <a:ext cx="1828800" cy="292608"/>
           </a:xfrm>
           <a:prstGeom prst="rect">
@@ -19739,13 +20537,13 @@
             <a:r>
               <a:rPr lang="en-US" sz="1300" b="1" dirty="0">
                 <a:solidFill>
-                  <a:srgbClr val="0F766E"/>
+                  <a:srgbClr val="4C1D95"/>
                 </a:solidFill>
                 <a:latin typeface="Trebuchet MS" pitchFamily="34" charset="0"/>
                 <a:ea typeface="Trebuchet MS" pitchFamily="34" charset="-122"/>
                 <a:cs typeface="Trebuchet MS" pitchFamily="34" charset="-120"/>
               </a:rPr>
-              <a:t>express</a:t>
+              <a:t>re</a:t>
             </a:r>
             <a:endParaRPr lang="en-US" sz="1300" dirty="0"/>
           </a:p>
@@ -19759,7 +20557,7 @@
         </p:nvSpPr>
         <p:spPr>
           <a:xfrm>
-            <a:off x="2221992" y="2569464"/>
+            <a:off x="2938272" y="2569464"/>
             <a:ext cx="1828800" cy="201168"/>
           </a:xfrm>
           <a:prstGeom prst="rect">
@@ -19784,7 +20582,7 @@
                 <a:ea typeface="Calibri" pitchFamily="34" charset="-122"/>
                 <a:cs typeface="Calibri" pitchFamily="34" charset="-120"/>
               </a:rPr>
-              <a:t>to push or press out</a:t>
+              <a:t>again</a:t>
             </a:r>
             <a:endParaRPr lang="en-US" sz="850" dirty="0"/>
           </a:p>
@@ -19798,7 +20596,7 @@
         </p:nvSpPr>
         <p:spPr>
           <a:xfrm>
-            <a:off x="4370832" y="2258568"/>
+            <a:off x="5803392" y="2258568"/>
             <a:ext cx="1828800" cy="292608"/>
           </a:xfrm>
           <a:prstGeom prst="rect">
@@ -19807,11 +20605,11 @@
             </a:avLst>
           </a:prstGeom>
           <a:solidFill>
-            <a:srgbClr val="FCE7F3"/>
+            <a:srgbClr val="CCFBF1"/>
           </a:solidFill>
           <a:ln w="19050">
             <a:solidFill>
-              <a:srgbClr val="DB2777"/>
+              <a:srgbClr val="0D9488"/>
             </a:solidFill>
             <a:prstDash val="solid"/>
           </a:ln>
@@ -19832,7 +20630,7 @@
         </p:nvSpPr>
         <p:spPr>
           <a:xfrm>
-            <a:off x="4370832" y="2258568"/>
+            <a:off x="5803392" y="2258568"/>
             <a:ext cx="1828800" cy="292608"/>
           </a:xfrm>
           <a:prstGeom prst="rect">
@@ -19851,13 +20649,13 @@
             <a:r>
               <a:rPr lang="en-US" sz="1300" b="1" dirty="0">
                 <a:solidFill>
-                  <a:srgbClr val="9D174D"/>
+                  <a:srgbClr val="0F766E"/>
                 </a:solidFill>
                 <a:latin typeface="Trebuchet MS" pitchFamily="34" charset="0"/>
                 <a:ea typeface="Trebuchet MS" pitchFamily="34" charset="-122"/>
                 <a:cs typeface="Trebuchet MS" pitchFamily="34" charset="-120"/>
               </a:rPr>
-              <a:t>ive</a:t>
+              <a:t>express</a:t>
             </a:r>
             <a:endParaRPr lang="en-US" sz="1300" dirty="0"/>
           </a:p>
@@ -19871,7 +20669,7 @@
         </p:nvSpPr>
         <p:spPr>
           <a:xfrm>
-            <a:off x="4370832" y="2569464"/>
+            <a:off x="5803392" y="2569464"/>
             <a:ext cx="1828800" cy="201168"/>
           </a:xfrm>
           <a:prstGeom prst="rect">
@@ -19896,7 +20694,7 @@
                 <a:ea typeface="Calibri" pitchFamily="34" charset="-122"/>
                 <a:cs typeface="Calibri" pitchFamily="34" charset="-120"/>
               </a:rPr>
-              <a:t>having the quality of</a:t>
+              <a:t>to push or squeeze out</a:t>
             </a:r>
             <a:endParaRPr lang="en-US" sz="850" dirty="0"/>
           </a:p>
@@ -19910,30 +20708,23 @@
         </p:nvSpPr>
         <p:spPr>
           <a:xfrm>
-            <a:off x="6519672" y="2258568"/>
-            <a:ext cx="1828800" cy="292608"/>
+            <a:off x="365760" y="3273552"/>
+            <a:ext cx="1371600" cy="658368"/>
           </a:xfrm>
           <a:prstGeom prst="rect">
             <a:avLst>
-              <a:gd name="adj" fmla="val 25000"/>
+              <a:gd name="adj" fmla="val 8333"/>
             </a:avLst>
           </a:prstGeom>
           <a:solidFill>
-            <a:srgbClr val="FCE7F3"/>
-          </a:solidFill>
-          <a:ln w="19050">
-            <a:solidFill>
-              <a:srgbClr val="DB2777"/>
-            </a:solidFill>
-            <a:prstDash val="solid"/>
-          </a:ln>
-          <a:effectLst>
-            <a:outerShdw sx="100000" sy="100000" kx="0" ky="0" algn="bl" rotWithShape="0" blurRad="101600" dist="38100" dir="8100000">
-              <a:srgbClr val="000000">
-                <a:alpha val="12000"/>
-              </a:srgbClr>
-            </a:outerShdw>
-          </a:effectLst>
+            <a:srgbClr val="E2E8F0"/>
+          </a:solidFill>
+          <a:ln w="12700">
+            <a:solidFill>
+              <a:srgbClr val="E2E8F0"/>
+            </a:solidFill>
+            <a:prstDash val="solid"/>
+          </a:ln>
         </p:spPr>
       </p:sp>
       <p:sp>
@@ -19944,90 +20735,117 @@
         </p:nvSpPr>
         <p:spPr>
           <a:xfrm>
-            <a:off x="6519672" y="2258568"/>
-            <a:ext cx="1828800" cy="292608"/>
-          </a:xfrm>
-          <a:prstGeom prst="rect">
-            <a:avLst/>
-          </a:prstGeom>
-          <a:noFill/>
-          <a:ln/>
-        </p:spPr>
-        <p:txBody>
-          <a:bodyPr wrap="square" lIns="0" tIns="0" rIns="0" bIns="0" rtlCol="0" anchor="ctr"/>
-          <a:lstStyle/>
-          <a:p>
-            <a:pPr algn="ctr" indent="0" marL="0">
-              <a:buNone/>
-            </a:pPr>
-            <a:r>
-              <a:rPr lang="en-US" sz="1300" b="1" dirty="0">
-                <a:solidFill>
-                  <a:srgbClr val="9D174D"/>
+            <a:off x="365760" y="3273552"/>
+            <a:ext cx="1371600" cy="658368"/>
+          </a:xfrm>
+          <a:prstGeom prst="rect">
+            <a:avLst/>
+          </a:prstGeom>
+          <a:noFill/>
+          <a:ln/>
+        </p:spPr>
+        <p:txBody>
+          <a:bodyPr wrap="square" lIns="0" tIns="0" rIns="0" bIns="0" rtlCol="0" anchor="ctr"/>
+          <a:lstStyle/>
+          <a:p>
+            <a:pPr algn="ctr" indent="0" marL="0">
+              <a:buNone/>
+            </a:pPr>
+            <a:r>
+              <a:rPr lang="en-US" sz="1100" b="1" dirty="0">
+                <a:solidFill>
+                  <a:srgbClr val="475569"/>
                 </a:solidFill>
                 <a:latin typeface="Trebuchet MS" pitchFamily="34" charset="0"/>
                 <a:ea typeface="Trebuchet MS" pitchFamily="34" charset="-122"/>
                 <a:cs typeface="Trebuchet MS" pitchFamily="34" charset="-120"/>
               </a:rPr>
-              <a:t>ness</a:t>
-            </a:r>
-            <a:endParaRPr lang="en-US" sz="1300" dirty="0"/>
-          </a:p>
-        </p:txBody>
-      </p:sp>
-      <p:sp>
-        <p:nvSpPr>
-          <p:cNvPr id="24" name="Text 22"/>
-          <p:cNvSpPr/>
-          <p:nvPr/>
-        </p:nvSpPr>
-        <p:spPr>
-          <a:xfrm>
-            <a:off x="6519672" y="2569464"/>
-            <a:ext cx="1828800" cy="201168"/>
-          </a:xfrm>
-          <a:prstGeom prst="rect">
-            <a:avLst/>
-          </a:prstGeom>
-          <a:noFill/>
-          <a:ln/>
-        </p:spPr>
-        <p:txBody>
-          <a:bodyPr wrap="square" lIns="0" tIns="0" rIns="0" bIns="0" rtlCol="0" anchor="t"/>
-          <a:lstStyle/>
-          <a:p>
-            <a:pPr algn="ctr" indent="0" marL="0">
-              <a:buNone/>
-            </a:pPr>
-            <a:r>
-              <a:rPr lang="en-US" sz="850" dirty="0">
-                <a:solidFill>
-                  <a:srgbClr val="475569"/>
+              <a:t>Syllables</a:t>
+            </a:r>
+            <a:endParaRPr lang="en-US" sz="1100" dirty="0"/>
+          </a:p>
+        </p:txBody>
+      </p:sp>
+      <p:sp>
+        <p:nvSpPr>
+          <p:cNvPr id="24" name="Shape 22"/>
+          <p:cNvSpPr/>
+          <p:nvPr/>
+        </p:nvSpPr>
+        <p:spPr>
+          <a:xfrm>
+            <a:off x="1874520" y="3273552"/>
+            <a:ext cx="6903720" cy="658368"/>
+          </a:xfrm>
+          <a:prstGeom prst="rect">
+            <a:avLst>
+              <a:gd name="adj" fmla="val 8333"/>
+            </a:avLst>
+          </a:prstGeom>
+          <a:solidFill>
+            <a:srgbClr val="F8FAFC"/>
+          </a:solidFill>
+          <a:ln w="12700">
+            <a:solidFill>
+              <a:srgbClr val="E2E8F0"/>
+            </a:solidFill>
+            <a:prstDash val="dash"/>
+          </a:ln>
+        </p:spPr>
+      </p:sp>
+      <p:sp>
+        <p:nvSpPr>
+          <p:cNvPr id="25" name="Text 23"/>
+          <p:cNvSpPr/>
+          <p:nvPr/>
+        </p:nvSpPr>
+        <p:spPr>
+          <a:xfrm>
+            <a:off x="1874520" y="3273552"/>
+            <a:ext cx="6903720" cy="658368"/>
+          </a:xfrm>
+          <a:prstGeom prst="rect">
+            <a:avLst/>
+          </a:prstGeom>
+          <a:noFill/>
+          <a:ln/>
+        </p:spPr>
+        <p:txBody>
+          <a:bodyPr wrap="square" rtlCol="0" anchor="ctr"/>
+          <a:lstStyle/>
+          <a:p>
+            <a:pPr algn="ctr" indent="0" marL="0">
+              <a:buNone/>
+            </a:pPr>
+            <a:r>
+              <a:rPr lang="en-US" sz="1100" i="1" dirty="0">
+                <a:solidFill>
+                  <a:srgbClr val="CBD5E1"/>
                 </a:solidFill>
                 <a:latin typeface="Calibri" pitchFamily="34" charset="0"/>
                 <a:ea typeface="Calibri" pitchFamily="34" charset="-122"/>
                 <a:cs typeface="Calibri" pitchFamily="34" charset="-120"/>
               </a:rPr>
-              <a:t>state or quality of being</a:t>
-            </a:r>
-            <a:endParaRPr lang="en-US" sz="850" dirty="0"/>
-          </a:p>
-        </p:txBody>
-      </p:sp>
-      <p:sp>
-        <p:nvSpPr>
-          <p:cNvPr id="25" name="Shape 23"/>
-          <p:cNvSpPr/>
-          <p:nvPr/>
-        </p:nvSpPr>
-        <p:spPr>
-          <a:xfrm>
-            <a:off x="365760" y="3273552"/>
-            <a:ext cx="1371600" cy="658368"/>
+              <a:t>Write here...</a:t>
+            </a:r>
+            <a:endParaRPr lang="en-US" sz="1100" dirty="0"/>
+          </a:p>
+        </p:txBody>
+      </p:sp>
+      <p:sp>
+        <p:nvSpPr>
+          <p:cNvPr id="26" name="Shape 24"/>
+          <p:cNvSpPr/>
+          <p:nvPr/>
+        </p:nvSpPr>
+        <p:spPr>
+          <a:xfrm>
+            <a:off x="365760" y="4096512"/>
+            <a:ext cx="1371600" cy="804672"/>
           </a:xfrm>
           <a:prstGeom prst="rect">
             <a:avLst>
-              <a:gd name="adj" fmla="val 8333"/>
+              <a:gd name="adj" fmla="val 6818"/>
             </a:avLst>
           </a:prstGeom>
           <a:solidFill>
@@ -20043,14 +20861,14 @@
       </p:sp>
       <p:sp>
         <p:nvSpPr>
-          <p:cNvPr id="26" name="Text 24"/>
-          <p:cNvSpPr/>
-          <p:nvPr/>
-        </p:nvSpPr>
-        <p:spPr>
-          <a:xfrm>
-            <a:off x="365760" y="3273552"/>
-            <a:ext cx="1371600" cy="658368"/>
+          <p:cNvPr id="27" name="Text 25"/>
+          <p:cNvSpPr/>
+          <p:nvPr/>
+        </p:nvSpPr>
+        <p:spPr>
+          <a:xfrm>
+            <a:off x="365760" y="4096512"/>
+            <a:ext cx="1371600" cy="804672"/>
           </a:xfrm>
           <a:prstGeom prst="rect">
             <a:avLst/>
@@ -20074,7 +20892,7 @@
                 <a:ea typeface="Trebuchet MS" pitchFamily="34" charset="-122"/>
                 <a:cs typeface="Trebuchet MS" pitchFamily="34" charset="-120"/>
               </a:rPr>
-              <a:t>Syllables</a:t>
+              <a:t>Phonemes</a:t>
             </a:r>
             <a:endParaRPr lang="en-US" sz="1100" dirty="0"/>
           </a:p>
@@ -20082,80 +20900,14 @@
       </p:sp>
       <p:sp>
         <p:nvSpPr>
-          <p:cNvPr id="27" name="Shape 25"/>
-          <p:cNvSpPr/>
-          <p:nvPr/>
-        </p:nvSpPr>
-        <p:spPr>
-          <a:xfrm>
-            <a:off x="1874520" y="3273552"/>
-            <a:ext cx="6903720" cy="658368"/>
-          </a:xfrm>
-          <a:prstGeom prst="rect">
-            <a:avLst>
-              <a:gd name="adj" fmla="val 8333"/>
-            </a:avLst>
-          </a:prstGeom>
-          <a:solidFill>
-            <a:srgbClr val="F8FAFC"/>
-          </a:solidFill>
-          <a:ln w="12700">
-            <a:solidFill>
-              <a:srgbClr val="E2E8F0"/>
-            </a:solidFill>
-            <a:prstDash val="dash"/>
-          </a:ln>
-        </p:spPr>
-      </p:sp>
-      <p:sp>
-        <p:nvSpPr>
-          <p:cNvPr id="28" name="Text 26"/>
-          <p:cNvSpPr/>
-          <p:nvPr/>
-        </p:nvSpPr>
-        <p:spPr>
-          <a:xfrm>
-            <a:off x="1874520" y="3273552"/>
-            <a:ext cx="6903720" cy="658368"/>
-          </a:xfrm>
-          <a:prstGeom prst="rect">
-            <a:avLst/>
-          </a:prstGeom>
-          <a:noFill/>
-          <a:ln/>
-        </p:spPr>
-        <p:txBody>
-          <a:bodyPr wrap="square" rtlCol="0" anchor="ctr"/>
-          <a:lstStyle/>
-          <a:p>
-            <a:pPr algn="ctr" indent="0" marL="0">
-              <a:buNone/>
-            </a:pPr>
-            <a:r>
-              <a:rPr lang="en-US" sz="1100" i="1" dirty="0">
-                <a:solidFill>
-                  <a:srgbClr val="CBD5E1"/>
-                </a:solidFill>
-                <a:latin typeface="Calibri" pitchFamily="34" charset="0"/>
-                <a:ea typeface="Calibri" pitchFamily="34" charset="-122"/>
-                <a:cs typeface="Calibri" pitchFamily="34" charset="-120"/>
-              </a:rPr>
-              <a:t>Write here...</a:t>
-            </a:r>
-            <a:endParaRPr lang="en-US" sz="1100" dirty="0"/>
-          </a:p>
-        </p:txBody>
-      </p:sp>
-      <p:sp>
-        <p:nvSpPr>
-          <p:cNvPr id="29" name="Shape 27"/>
-          <p:cNvSpPr/>
-          <p:nvPr/>
-        </p:nvSpPr>
-        <p:spPr>
-          <a:xfrm>
-            <a:off x="365760" y="4096512"/>
-            <a:ext cx="1371600" cy="804672"/>
+          <p:cNvPr id="28" name="Shape 26"/>
+          <p:cNvSpPr/>
+          <p:nvPr/>
+        </p:nvSpPr>
+        <p:spPr>
+          <a:xfrm>
+            <a:off x="1874520" y="4096512"/>
+            <a:ext cx="6903720" cy="804672"/>
           </a:xfrm>
           <a:prstGeom prst="rect">
             <a:avLst>
@@ -20163,85 +20915,19 @@
             </a:avLst>
           </a:prstGeom>
           <a:solidFill>
-            <a:srgbClr val="E2E8F0"/>
+            <a:srgbClr val="F8FAFC"/>
           </a:solidFill>
           <a:ln w="12700">
             <a:solidFill>
               <a:srgbClr val="E2E8F0"/>
             </a:solidFill>
-            <a:prstDash val="solid"/>
-          </a:ln>
-        </p:spPr>
-      </p:sp>
-      <p:sp>
-        <p:nvSpPr>
-          <p:cNvPr id="30" name="Text 28"/>
-          <p:cNvSpPr/>
-          <p:nvPr/>
-        </p:nvSpPr>
-        <p:spPr>
-          <a:xfrm>
-            <a:off x="365760" y="4096512"/>
-            <a:ext cx="1371600" cy="804672"/>
-          </a:xfrm>
-          <a:prstGeom prst="rect">
-            <a:avLst/>
-          </a:prstGeom>
-          <a:noFill/>
-          <a:ln/>
-        </p:spPr>
-        <p:txBody>
-          <a:bodyPr wrap="square" lIns="0" tIns="0" rIns="0" bIns="0" rtlCol="0" anchor="ctr"/>
-          <a:lstStyle/>
-          <a:p>
-            <a:pPr algn="ctr" indent="0" marL="0">
-              <a:buNone/>
-            </a:pPr>
-            <a:r>
-              <a:rPr lang="en-US" sz="1100" b="1" dirty="0">
-                <a:solidFill>
-                  <a:srgbClr val="475569"/>
-                </a:solidFill>
-                <a:latin typeface="Trebuchet MS" pitchFamily="34" charset="0"/>
-                <a:ea typeface="Trebuchet MS" pitchFamily="34" charset="-122"/>
-                <a:cs typeface="Trebuchet MS" pitchFamily="34" charset="-120"/>
-              </a:rPr>
-              <a:t>Phonemes</a:t>
-            </a:r>
-            <a:endParaRPr lang="en-US" sz="1100" dirty="0"/>
-          </a:p>
-        </p:txBody>
-      </p:sp>
-      <p:sp>
-        <p:nvSpPr>
-          <p:cNvPr id="31" name="Shape 29"/>
-          <p:cNvSpPr/>
-          <p:nvPr/>
-        </p:nvSpPr>
-        <p:spPr>
-          <a:xfrm>
-            <a:off x="1874520" y="4096512"/>
-            <a:ext cx="6903720" cy="804672"/>
-          </a:xfrm>
-          <a:prstGeom prst="rect">
-            <a:avLst>
-              <a:gd name="adj" fmla="val 6818"/>
-            </a:avLst>
-          </a:prstGeom>
-          <a:solidFill>
-            <a:srgbClr val="F8FAFC"/>
-          </a:solidFill>
-          <a:ln w="12700">
-            <a:solidFill>
-              <a:srgbClr val="E2E8F0"/>
-            </a:solidFill>
             <a:prstDash val="dash"/>
           </a:ln>
         </p:spPr>
       </p:sp>
       <p:sp>
         <p:nvSpPr>
-          <p:cNvPr id="32" name="Text 30"/>
+          <p:cNvPr id="29" name="Text 27"/>
           <p:cNvSpPr/>
           <p:nvPr/>
         </p:nvSpPr>
@@ -20564,7 +21250,7 @@
                 <a:ea typeface="Calibri" pitchFamily="34" charset="-122"/>
                 <a:cs typeface="Calibri" pitchFamily="34" charset="-120"/>
               </a:rPr>
-              <a:t>Word Labs  •  wordlabs.app  •  Root: 'express' = to push or press out</a:t>
+              <a:t>Word Labs  •  wordlabs.app  •  Root: 'express' = to push or squeeze out</a:t>
             </a:r>
             <a:endParaRPr lang="en-US" sz="800" dirty="0"/>
           </a:p>
@@ -20703,7 +21389,7 @@
                 <a:ea typeface="Trebuchet MS" pitchFamily="34" charset="-122"/>
                 <a:cs typeface="Trebuchet MS" pitchFamily="34" charset="-120"/>
               </a:rPr>
-              <a:t>expressiveness</a:t>
+              <a:t>reexpress</a:t>
             </a:r>
             <a:endParaRPr lang="en-US" sz="2800" dirty="0"/>
           </a:p>
@@ -20783,7 +21469,7 @@
         </p:nvSpPr>
         <p:spPr>
           <a:xfrm>
-            <a:off x="2221992" y="2258568"/>
+            <a:off x="2938272" y="2258568"/>
             <a:ext cx="1828800" cy="292608"/>
           </a:xfrm>
           <a:prstGeom prst="rect">
@@ -20792,11 +21478,11 @@
             </a:avLst>
           </a:prstGeom>
           <a:solidFill>
-            <a:srgbClr val="CCFBF1"/>
+            <a:srgbClr val="DDD6FE"/>
           </a:solidFill>
           <a:ln w="19050">
             <a:solidFill>
-              <a:srgbClr val="0D9488"/>
+              <a:srgbClr val="7C3AED"/>
             </a:solidFill>
             <a:prstDash val="solid"/>
           </a:ln>
@@ -20817,7 +21503,7 @@
         </p:nvSpPr>
         <p:spPr>
           <a:xfrm>
-            <a:off x="2221992" y="2258568"/>
+            <a:off x="2938272" y="2258568"/>
             <a:ext cx="1828800" cy="292608"/>
           </a:xfrm>
           <a:prstGeom prst="rect">
@@ -20836,13 +21522,13 @@
             <a:r>
               <a:rPr lang="en-US" sz="1300" b="1" dirty="0">
                 <a:solidFill>
-                  <a:srgbClr val="0F766E"/>
+                  <a:srgbClr val="4C1D95"/>
                 </a:solidFill>
                 <a:latin typeface="Trebuchet MS" pitchFamily="34" charset="0"/>
                 <a:ea typeface="Trebuchet MS" pitchFamily="34" charset="-122"/>
                 <a:cs typeface="Trebuchet MS" pitchFamily="34" charset="-120"/>
               </a:rPr>
-              <a:t>express</a:t>
+              <a:t>re</a:t>
             </a:r>
             <a:endParaRPr lang="en-US" sz="1300" dirty="0"/>
           </a:p>
@@ -20856,7 +21542,7 @@
         </p:nvSpPr>
         <p:spPr>
           <a:xfrm>
-            <a:off x="2221992" y="2569464"/>
+            <a:off x="2938272" y="2569464"/>
             <a:ext cx="1828800" cy="201168"/>
           </a:xfrm>
           <a:prstGeom prst="rect">
@@ -20881,7 +21567,7 @@
                 <a:ea typeface="Calibri" pitchFamily="34" charset="-122"/>
                 <a:cs typeface="Calibri" pitchFamily="34" charset="-120"/>
               </a:rPr>
-              <a:t>to push or press out</a:t>
+              <a:t>again</a:t>
             </a:r>
             <a:endParaRPr lang="en-US" sz="850" dirty="0"/>
           </a:p>
@@ -20895,7 +21581,7 @@
         </p:nvSpPr>
         <p:spPr>
           <a:xfrm>
-            <a:off x="4370832" y="2258568"/>
+            <a:off x="5803392" y="2258568"/>
             <a:ext cx="1828800" cy="292608"/>
           </a:xfrm>
           <a:prstGeom prst="rect">
@@ -20904,11 +21590,11 @@
             </a:avLst>
           </a:prstGeom>
           <a:solidFill>
-            <a:srgbClr val="FCE7F3"/>
+            <a:srgbClr val="CCFBF1"/>
           </a:solidFill>
           <a:ln w="19050">
             <a:solidFill>
-              <a:srgbClr val="DB2777"/>
+              <a:srgbClr val="0D9488"/>
             </a:solidFill>
             <a:prstDash val="solid"/>
           </a:ln>
@@ -20929,7 +21615,7 @@
         </p:nvSpPr>
         <p:spPr>
           <a:xfrm>
-            <a:off x="4370832" y="2258568"/>
+            <a:off x="5803392" y="2258568"/>
             <a:ext cx="1828800" cy="292608"/>
           </a:xfrm>
           <a:prstGeom prst="rect">
@@ -20948,13 +21634,13 @@
             <a:r>
               <a:rPr lang="en-US" sz="1300" b="1" dirty="0">
                 <a:solidFill>
-                  <a:srgbClr val="9D174D"/>
+                  <a:srgbClr val="0F766E"/>
                 </a:solidFill>
                 <a:latin typeface="Trebuchet MS" pitchFamily="34" charset="0"/>
                 <a:ea typeface="Trebuchet MS" pitchFamily="34" charset="-122"/>
                 <a:cs typeface="Trebuchet MS" pitchFamily="34" charset="-120"/>
               </a:rPr>
-              <a:t>ive</a:t>
+              <a:t>express</a:t>
             </a:r>
             <a:endParaRPr lang="en-US" sz="1300" dirty="0"/>
           </a:p>
@@ -20968,7 +21654,7 @@
         </p:nvSpPr>
         <p:spPr>
           <a:xfrm>
-            <a:off x="4370832" y="2569464"/>
+            <a:off x="5803392" y="2569464"/>
             <a:ext cx="1828800" cy="201168"/>
           </a:xfrm>
           <a:prstGeom prst="rect">
@@ -20993,7 +21679,7 @@
                 <a:ea typeface="Calibri" pitchFamily="34" charset="-122"/>
                 <a:cs typeface="Calibri" pitchFamily="34" charset="-120"/>
               </a:rPr>
-              <a:t>having the quality of</a:t>
+              <a:t>to push or squeeze out</a:t>
             </a:r>
             <a:endParaRPr lang="en-US" sz="850" dirty="0"/>
           </a:p>
@@ -21007,30 +21693,23 @@
         </p:nvSpPr>
         <p:spPr>
           <a:xfrm>
-            <a:off x="6519672" y="2258568"/>
-            <a:ext cx="1828800" cy="292608"/>
+            <a:off x="365760" y="3273552"/>
+            <a:ext cx="1371600" cy="658368"/>
           </a:xfrm>
           <a:prstGeom prst="rect">
             <a:avLst>
-              <a:gd name="adj" fmla="val 25000"/>
+              <a:gd name="adj" fmla="val 8333"/>
             </a:avLst>
           </a:prstGeom>
           <a:solidFill>
-            <a:srgbClr val="FCE7F3"/>
-          </a:solidFill>
-          <a:ln w="19050">
-            <a:solidFill>
-              <a:srgbClr val="DB2777"/>
-            </a:solidFill>
-            <a:prstDash val="solid"/>
-          </a:ln>
-          <a:effectLst>
-            <a:outerShdw sx="100000" sy="100000" kx="0" ky="0" algn="bl" rotWithShape="0" blurRad="101600" dist="38100" dir="8100000">
-              <a:srgbClr val="000000">
-                <a:alpha val="12000"/>
-              </a:srgbClr>
-            </a:outerShdw>
-          </a:effectLst>
+            <a:srgbClr val="E2E8F0"/>
+          </a:solidFill>
+          <a:ln w="12700">
+            <a:solidFill>
+              <a:srgbClr val="E2E8F0"/>
+            </a:solidFill>
+            <a:prstDash val="solid"/>
+          </a:ln>
         </p:spPr>
       </p:sp>
       <p:sp>
@@ -21041,86 +21720,47 @@
         </p:nvSpPr>
         <p:spPr>
           <a:xfrm>
-            <a:off x="6519672" y="2258568"/>
-            <a:ext cx="1828800" cy="292608"/>
-          </a:xfrm>
-          <a:prstGeom prst="rect">
-            <a:avLst/>
-          </a:prstGeom>
-          <a:noFill/>
-          <a:ln/>
-        </p:spPr>
-        <p:txBody>
-          <a:bodyPr wrap="square" lIns="0" tIns="0" rIns="0" bIns="0" rtlCol="0" anchor="ctr"/>
-          <a:lstStyle/>
-          <a:p>
-            <a:pPr algn="ctr" indent="0" marL="0">
-              <a:buNone/>
-            </a:pPr>
-            <a:r>
-              <a:rPr lang="en-US" sz="1300" b="1" dirty="0">
-                <a:solidFill>
-                  <a:srgbClr val="9D174D"/>
+            <a:off x="365760" y="3273552"/>
+            <a:ext cx="1371600" cy="658368"/>
+          </a:xfrm>
+          <a:prstGeom prst="rect">
+            <a:avLst/>
+          </a:prstGeom>
+          <a:noFill/>
+          <a:ln/>
+        </p:spPr>
+        <p:txBody>
+          <a:bodyPr wrap="square" lIns="0" tIns="0" rIns="0" bIns="0" rtlCol="0" anchor="ctr"/>
+          <a:lstStyle/>
+          <a:p>
+            <a:pPr algn="ctr" indent="0" marL="0">
+              <a:buNone/>
+            </a:pPr>
+            <a:r>
+              <a:rPr lang="en-US" sz="1100" b="1" dirty="0">
+                <a:solidFill>
+                  <a:srgbClr val="475569"/>
                 </a:solidFill>
                 <a:latin typeface="Trebuchet MS" pitchFamily="34" charset="0"/>
                 <a:ea typeface="Trebuchet MS" pitchFamily="34" charset="-122"/>
                 <a:cs typeface="Trebuchet MS" pitchFamily="34" charset="-120"/>
               </a:rPr>
-              <a:t>ness</a:t>
-            </a:r>
-            <a:endParaRPr lang="en-US" sz="1300" dirty="0"/>
-          </a:p>
-        </p:txBody>
-      </p:sp>
-      <p:sp>
-        <p:nvSpPr>
-          <p:cNvPr id="24" name="Text 22"/>
-          <p:cNvSpPr/>
-          <p:nvPr/>
-        </p:nvSpPr>
-        <p:spPr>
-          <a:xfrm>
-            <a:off x="6519672" y="2569464"/>
-            <a:ext cx="1828800" cy="201168"/>
-          </a:xfrm>
-          <a:prstGeom prst="rect">
-            <a:avLst/>
-          </a:prstGeom>
-          <a:noFill/>
-          <a:ln/>
-        </p:spPr>
-        <p:txBody>
-          <a:bodyPr wrap="square" lIns="0" tIns="0" rIns="0" bIns="0" rtlCol="0" anchor="t"/>
-          <a:lstStyle/>
-          <a:p>
-            <a:pPr algn="ctr" indent="0" marL="0">
-              <a:buNone/>
-            </a:pPr>
-            <a:r>
-              <a:rPr lang="en-US" sz="850" dirty="0">
-                <a:solidFill>
-                  <a:srgbClr val="475569"/>
-                </a:solidFill>
-                <a:latin typeface="Calibri" pitchFamily="34" charset="0"/>
-                <a:ea typeface="Calibri" pitchFamily="34" charset="-122"/>
-                <a:cs typeface="Calibri" pitchFamily="34" charset="-120"/>
-              </a:rPr>
-              <a:t>state or quality of being</a:t>
-            </a:r>
-            <a:endParaRPr lang="en-US" sz="850" dirty="0"/>
-          </a:p>
-        </p:txBody>
-      </p:sp>
-      <p:sp>
-        <p:nvSpPr>
-          <p:cNvPr id="25" name="Shape 23"/>
-          <p:cNvSpPr/>
-          <p:nvPr/>
-        </p:nvSpPr>
-        <p:spPr>
-          <a:xfrm>
-            <a:off x="365760" y="3273552"/>
-            <a:ext cx="1371600" cy="658368"/>
+              <a:t>Syllables</a:t>
+            </a:r>
+            <a:endParaRPr lang="en-US" sz="1100" dirty="0"/>
+          </a:p>
+        </p:txBody>
+      </p:sp>
+      <p:sp>
+        <p:nvSpPr>
+          <p:cNvPr id="24" name="Shape 22"/>
+          <p:cNvSpPr/>
+          <p:nvPr/>
+        </p:nvSpPr>
+        <p:spPr>
+          <a:xfrm>
+            <a:off x="1874520" y="3273552"/>
+            <a:ext cx="6903720" cy="658368"/>
           </a:xfrm>
           <a:prstGeom prst="rect">
             <a:avLst>
@@ -21128,11 +21768,38 @@
             </a:avLst>
           </a:prstGeom>
           <a:solidFill>
-            <a:srgbClr val="E2E8F0"/>
-          </a:solidFill>
-          <a:ln w="12700">
-            <a:solidFill>
-              <a:srgbClr val="E2E8F0"/>
+            <a:srgbClr val="CCFBF1"/>
+          </a:solidFill>
+          <a:ln w="12700">
+            <a:solidFill>
+              <a:srgbClr val="0D9488"/>
+            </a:solidFill>
+            <a:prstDash val="solid"/>
+          </a:ln>
+        </p:spPr>
+      </p:sp>
+      <p:sp>
+        <p:nvSpPr>
+          <p:cNvPr id="25" name="Shape 23"/>
+          <p:cNvSpPr/>
+          <p:nvPr/>
+        </p:nvSpPr>
+        <p:spPr>
+          <a:xfrm>
+            <a:off x="2313432" y="3364992"/>
+            <a:ext cx="1645920" cy="475488"/>
+          </a:xfrm>
+          <a:prstGeom prst="rect">
+            <a:avLst>
+              <a:gd name="adj" fmla="val 9615"/>
+            </a:avLst>
+          </a:prstGeom>
+          <a:solidFill>
+            <a:srgbClr val="FFFFFF"/>
+          </a:solidFill>
+          <a:ln w="12700">
+            <a:solidFill>
+              <a:srgbClr val="0D9488"/>
             </a:solidFill>
             <a:prstDash val="solid"/>
           </a:ln>
@@ -21146,63 +21813,75 @@
         </p:nvSpPr>
         <p:spPr>
           <a:xfrm>
-            <a:off x="365760" y="3273552"/>
-            <a:ext cx="1371600" cy="658368"/>
-          </a:xfrm>
-          <a:prstGeom prst="rect">
-            <a:avLst/>
-          </a:prstGeom>
-          <a:noFill/>
-          <a:ln/>
-        </p:spPr>
-        <p:txBody>
-          <a:bodyPr wrap="square" lIns="0" tIns="0" rIns="0" bIns="0" rtlCol="0" anchor="ctr"/>
-          <a:lstStyle/>
-          <a:p>
-            <a:pPr algn="ctr" indent="0" marL="0">
-              <a:buNone/>
-            </a:pPr>
-            <a:r>
-              <a:rPr lang="en-US" sz="1100" b="1" dirty="0">
-                <a:solidFill>
-                  <a:srgbClr val="475569"/>
+            <a:off x="2313432" y="3364992"/>
+            <a:ext cx="1645920" cy="475488"/>
+          </a:xfrm>
+          <a:prstGeom prst="rect">
+            <a:avLst/>
+          </a:prstGeom>
+          <a:noFill/>
+          <a:ln/>
+        </p:spPr>
+        <p:txBody>
+          <a:bodyPr wrap="square" lIns="0" tIns="0" rIns="0" bIns="0" rtlCol="0" anchor="ctr"/>
+          <a:lstStyle/>
+          <a:p>
+            <a:pPr algn="ctr" indent="0" marL="0">
+              <a:buNone/>
+            </a:pPr>
+            <a:r>
+              <a:rPr lang="en-US" sz="1400" b="1" dirty="0">
+                <a:solidFill>
+                  <a:srgbClr val="0D9488"/>
                 </a:solidFill>
                 <a:latin typeface="Trebuchet MS" pitchFamily="34" charset="0"/>
                 <a:ea typeface="Trebuchet MS" pitchFamily="34" charset="-122"/>
                 <a:cs typeface="Trebuchet MS" pitchFamily="34" charset="-120"/>
               </a:rPr>
-              <a:t>Syllables</a:t>
-            </a:r>
-            <a:endParaRPr lang="en-US" sz="1100" dirty="0"/>
-          </a:p>
-        </p:txBody>
-      </p:sp>
-      <p:sp>
-        <p:nvSpPr>
-          <p:cNvPr id="27" name="Shape 25"/>
-          <p:cNvSpPr/>
-          <p:nvPr/>
-        </p:nvSpPr>
-        <p:spPr>
-          <a:xfrm>
-            <a:off x="1874520" y="3273552"/>
-            <a:ext cx="6903720" cy="658368"/>
-          </a:xfrm>
-          <a:prstGeom prst="rect">
-            <a:avLst>
-              <a:gd name="adj" fmla="val 8333"/>
-            </a:avLst>
-          </a:prstGeom>
-          <a:solidFill>
-            <a:srgbClr val="CCFBF1"/>
-          </a:solidFill>
-          <a:ln w="12700">
-            <a:solidFill>
-              <a:srgbClr val="0D9488"/>
-            </a:solidFill>
-            <a:prstDash val="solid"/>
-          </a:ln>
-        </p:spPr>
+              <a:t>re</a:t>
+            </a:r>
+            <a:endParaRPr lang="en-US" sz="1400" dirty="0"/>
+          </a:p>
+        </p:txBody>
+      </p:sp>
+      <p:sp>
+        <p:nvSpPr>
+          <p:cNvPr id="27" name="Text 25"/>
+          <p:cNvSpPr/>
+          <p:nvPr/>
+        </p:nvSpPr>
+        <p:spPr>
+          <a:xfrm>
+            <a:off x="3959352" y="3364992"/>
+            <a:ext cx="411480" cy="475488"/>
+          </a:xfrm>
+          <a:prstGeom prst="rect">
+            <a:avLst/>
+          </a:prstGeom>
+          <a:noFill/>
+          <a:ln/>
+        </p:spPr>
+        <p:txBody>
+          <a:bodyPr wrap="square" lIns="0" tIns="0" rIns="0" bIns="0" rtlCol="0" anchor="ctr"/>
+          <a:lstStyle/>
+          <a:p>
+            <a:pPr algn="ctr" indent="0" marL="0">
+              <a:buNone/>
+            </a:pPr>
+            <a:r>
+              <a:rPr lang="en-US" sz="1600" b="1" dirty="0">
+                <a:solidFill>
+                  <a:srgbClr val="0D9488"/>
+                </a:solidFill>
+                <a:latin typeface="Trebuchet MS" pitchFamily="34" charset="0"/>
+                <a:ea typeface="Trebuchet MS" pitchFamily="34" charset="-122"/>
+                <a:cs typeface="Trebuchet MS" pitchFamily="34" charset="-120"/>
+              </a:rPr>
+              <a:t>·</a:t>
+            </a:r>
+            <a:endParaRPr lang="en-US" sz="1600" dirty="0"/>
+          </a:p>
+        </p:txBody>
       </p:sp>
       <p:sp>
         <p:nvSpPr>
@@ -21212,8 +21891,8 @@
         </p:nvSpPr>
         <p:spPr>
           <a:xfrm>
-            <a:off x="1975104" y="3364992"/>
-            <a:ext cx="1554480" cy="475488"/>
+            <a:off x="4370832" y="3364992"/>
+            <a:ext cx="1645920" cy="475488"/>
           </a:xfrm>
           <a:prstGeom prst="rect">
             <a:avLst>
@@ -21239,8 +21918,8 @@
         </p:nvSpPr>
         <p:spPr>
           <a:xfrm>
-            <a:off x="1975104" y="3364992"/>
-            <a:ext cx="1554480" cy="475488"/>
+            <a:off x="4370832" y="3364992"/>
+            <a:ext cx="1645920" cy="475488"/>
           </a:xfrm>
           <a:prstGeom prst="rect">
             <a:avLst/>
@@ -21278,8 +21957,8 @@
         </p:nvSpPr>
         <p:spPr>
           <a:xfrm>
-            <a:off x="3529584" y="3364992"/>
-            <a:ext cx="73152" cy="475488"/>
+            <a:off x="6016752" y="3364992"/>
+            <a:ext cx="411480" cy="475488"/>
           </a:xfrm>
           <a:prstGeom prst="rect">
             <a:avLst/>
@@ -21317,8 +21996,8 @@
         </p:nvSpPr>
         <p:spPr>
           <a:xfrm>
-            <a:off x="3602736" y="3364992"/>
-            <a:ext cx="1554480" cy="475488"/>
+            <a:off x="6428232" y="3364992"/>
+            <a:ext cx="1645920" cy="475488"/>
           </a:xfrm>
           <a:prstGeom prst="rect">
             <a:avLst>
@@ -21344,8 +22023,8 @@
         </p:nvSpPr>
         <p:spPr>
           <a:xfrm>
-            <a:off x="3602736" y="3364992"/>
-            <a:ext cx="1554480" cy="475488"/>
+            <a:off x="6428232" y="3364992"/>
+            <a:ext cx="1645920" cy="475488"/>
           </a:xfrm>
           <a:prstGeom prst="rect">
             <a:avLst/>
@@ -21377,224 +22056,80 @@
       </p:sp>
       <p:sp>
         <p:nvSpPr>
-          <p:cNvPr id="33" name="Text 31"/>
-          <p:cNvSpPr/>
-          <p:nvPr/>
-        </p:nvSpPr>
-        <p:spPr>
-          <a:xfrm>
-            <a:off x="5157216" y="3364992"/>
-            <a:ext cx="73152" cy="475488"/>
-          </a:xfrm>
-          <a:prstGeom prst="rect">
-            <a:avLst/>
-          </a:prstGeom>
-          <a:noFill/>
-          <a:ln/>
-        </p:spPr>
-        <p:txBody>
-          <a:bodyPr wrap="square" lIns="0" tIns="0" rIns="0" bIns="0" rtlCol="0" anchor="ctr"/>
-          <a:lstStyle/>
-          <a:p>
-            <a:pPr algn="ctr" indent="0" marL="0">
-              <a:buNone/>
-            </a:pPr>
-            <a:r>
-              <a:rPr lang="en-US" sz="1600" b="1" dirty="0">
-                <a:solidFill>
-                  <a:srgbClr val="0D9488"/>
+          <p:cNvPr id="33" name="Shape 31"/>
+          <p:cNvSpPr/>
+          <p:nvPr/>
+        </p:nvSpPr>
+        <p:spPr>
+          <a:xfrm>
+            <a:off x="365760" y="4096512"/>
+            <a:ext cx="1371600" cy="804672"/>
+          </a:xfrm>
+          <a:prstGeom prst="rect">
+            <a:avLst>
+              <a:gd name="adj" fmla="val 6818"/>
+            </a:avLst>
+          </a:prstGeom>
+          <a:solidFill>
+            <a:srgbClr val="E2E8F0"/>
+          </a:solidFill>
+          <a:ln w="12700">
+            <a:solidFill>
+              <a:srgbClr val="E2E8F0"/>
+            </a:solidFill>
+            <a:prstDash val="solid"/>
+          </a:ln>
+        </p:spPr>
+      </p:sp>
+      <p:sp>
+        <p:nvSpPr>
+          <p:cNvPr id="34" name="Text 32"/>
+          <p:cNvSpPr/>
+          <p:nvPr/>
+        </p:nvSpPr>
+        <p:spPr>
+          <a:xfrm>
+            <a:off x="365760" y="4096512"/>
+            <a:ext cx="1371600" cy="804672"/>
+          </a:xfrm>
+          <a:prstGeom prst="rect">
+            <a:avLst/>
+          </a:prstGeom>
+          <a:noFill/>
+          <a:ln/>
+        </p:spPr>
+        <p:txBody>
+          <a:bodyPr wrap="square" lIns="0" tIns="0" rIns="0" bIns="0" rtlCol="0" anchor="ctr"/>
+          <a:lstStyle/>
+          <a:p>
+            <a:pPr algn="ctr" indent="0" marL="0">
+              <a:buNone/>
+            </a:pPr>
+            <a:r>
+              <a:rPr lang="en-US" sz="1100" b="1" dirty="0">
+                <a:solidFill>
+                  <a:srgbClr val="475569"/>
                 </a:solidFill>
                 <a:latin typeface="Trebuchet MS" pitchFamily="34" charset="0"/>
                 <a:ea typeface="Trebuchet MS" pitchFamily="34" charset="-122"/>
                 <a:cs typeface="Trebuchet MS" pitchFamily="34" charset="-120"/>
               </a:rPr>
-              <a:t>·</a:t>
-            </a:r>
-            <a:endParaRPr lang="en-US" sz="1600" dirty="0"/>
-          </a:p>
-        </p:txBody>
-      </p:sp>
-      <p:sp>
-        <p:nvSpPr>
-          <p:cNvPr id="34" name="Shape 32"/>
-          <p:cNvSpPr/>
-          <p:nvPr/>
-        </p:nvSpPr>
-        <p:spPr>
-          <a:xfrm>
-            <a:off x="5230368" y="3364992"/>
-            <a:ext cx="1554480" cy="475488"/>
-          </a:xfrm>
-          <a:prstGeom prst="rect">
-            <a:avLst>
-              <a:gd name="adj" fmla="val 9615"/>
-            </a:avLst>
-          </a:prstGeom>
-          <a:solidFill>
-            <a:srgbClr val="FFFFFF"/>
-          </a:solidFill>
-          <a:ln w="12700">
-            <a:solidFill>
-              <a:srgbClr val="0D9488"/>
-            </a:solidFill>
-            <a:prstDash val="solid"/>
-          </a:ln>
-        </p:spPr>
-      </p:sp>
-      <p:sp>
-        <p:nvSpPr>
-          <p:cNvPr id="35" name="Text 33"/>
-          <p:cNvSpPr/>
-          <p:nvPr/>
-        </p:nvSpPr>
-        <p:spPr>
-          <a:xfrm>
-            <a:off x="5230368" y="3364992"/>
-            <a:ext cx="1554480" cy="475488"/>
-          </a:xfrm>
-          <a:prstGeom prst="rect">
-            <a:avLst/>
-          </a:prstGeom>
-          <a:noFill/>
-          <a:ln/>
-        </p:spPr>
-        <p:txBody>
-          <a:bodyPr wrap="square" lIns="0" tIns="0" rIns="0" bIns="0" rtlCol="0" anchor="ctr"/>
-          <a:lstStyle/>
-          <a:p>
-            <a:pPr algn="ctr" indent="0" marL="0">
-              <a:buNone/>
-            </a:pPr>
-            <a:r>
-              <a:rPr lang="en-US" sz="1400" b="1" dirty="0">
-                <a:solidFill>
-                  <a:srgbClr val="0D9488"/>
-                </a:solidFill>
-                <a:latin typeface="Trebuchet MS" pitchFamily="34" charset="0"/>
-                <a:ea typeface="Trebuchet MS" pitchFamily="34" charset="-122"/>
-                <a:cs typeface="Trebuchet MS" pitchFamily="34" charset="-120"/>
-              </a:rPr>
-              <a:t>ive</a:t>
-            </a:r>
-            <a:endParaRPr lang="en-US" sz="1400" dirty="0"/>
-          </a:p>
-        </p:txBody>
-      </p:sp>
-      <p:sp>
-        <p:nvSpPr>
-          <p:cNvPr id="36" name="Text 34"/>
-          <p:cNvSpPr/>
-          <p:nvPr/>
-        </p:nvSpPr>
-        <p:spPr>
-          <a:xfrm>
-            <a:off x="6784848" y="3364992"/>
-            <a:ext cx="73152" cy="475488"/>
-          </a:xfrm>
-          <a:prstGeom prst="rect">
-            <a:avLst/>
-          </a:prstGeom>
-          <a:noFill/>
-          <a:ln/>
-        </p:spPr>
-        <p:txBody>
-          <a:bodyPr wrap="square" lIns="0" tIns="0" rIns="0" bIns="0" rtlCol="0" anchor="ctr"/>
-          <a:lstStyle/>
-          <a:p>
-            <a:pPr algn="ctr" indent="0" marL="0">
-              <a:buNone/>
-            </a:pPr>
-            <a:r>
-              <a:rPr lang="en-US" sz="1600" b="1" dirty="0">
-                <a:solidFill>
-                  <a:srgbClr val="0D9488"/>
-                </a:solidFill>
-                <a:latin typeface="Trebuchet MS" pitchFamily="34" charset="0"/>
-                <a:ea typeface="Trebuchet MS" pitchFamily="34" charset="-122"/>
-                <a:cs typeface="Trebuchet MS" pitchFamily="34" charset="-120"/>
-              </a:rPr>
-              <a:t>·</a:t>
-            </a:r>
-            <a:endParaRPr lang="en-US" sz="1600" dirty="0"/>
-          </a:p>
-        </p:txBody>
-      </p:sp>
-      <p:sp>
-        <p:nvSpPr>
-          <p:cNvPr id="37" name="Shape 35"/>
-          <p:cNvSpPr/>
-          <p:nvPr/>
-        </p:nvSpPr>
-        <p:spPr>
-          <a:xfrm>
-            <a:off x="6858000" y="3364992"/>
-            <a:ext cx="1554480" cy="475488"/>
-          </a:xfrm>
-          <a:prstGeom prst="rect">
-            <a:avLst>
-              <a:gd name="adj" fmla="val 9615"/>
-            </a:avLst>
-          </a:prstGeom>
-          <a:solidFill>
-            <a:srgbClr val="FFFFFF"/>
-          </a:solidFill>
-          <a:ln w="12700">
-            <a:solidFill>
-              <a:srgbClr val="0D9488"/>
-            </a:solidFill>
-            <a:prstDash val="solid"/>
-          </a:ln>
-        </p:spPr>
-      </p:sp>
-      <p:sp>
-        <p:nvSpPr>
-          <p:cNvPr id="38" name="Text 36"/>
-          <p:cNvSpPr/>
-          <p:nvPr/>
-        </p:nvSpPr>
-        <p:spPr>
-          <a:xfrm>
-            <a:off x="6858000" y="3364992"/>
-            <a:ext cx="1554480" cy="475488"/>
-          </a:xfrm>
-          <a:prstGeom prst="rect">
-            <a:avLst/>
-          </a:prstGeom>
-          <a:noFill/>
-          <a:ln/>
-        </p:spPr>
-        <p:txBody>
-          <a:bodyPr wrap="square" lIns="0" tIns="0" rIns="0" bIns="0" rtlCol="0" anchor="ctr"/>
-          <a:lstStyle/>
-          <a:p>
-            <a:pPr algn="ctr" indent="0" marL="0">
-              <a:buNone/>
-            </a:pPr>
-            <a:r>
-              <a:rPr lang="en-US" sz="1400" b="1" dirty="0">
-                <a:solidFill>
-                  <a:srgbClr val="0D9488"/>
-                </a:solidFill>
-                <a:latin typeface="Trebuchet MS" pitchFamily="34" charset="0"/>
-                <a:ea typeface="Trebuchet MS" pitchFamily="34" charset="-122"/>
-                <a:cs typeface="Trebuchet MS" pitchFamily="34" charset="-120"/>
-              </a:rPr>
-              <a:t>ness</a:t>
-            </a:r>
-            <a:endParaRPr lang="en-US" sz="1400" dirty="0"/>
-          </a:p>
-        </p:txBody>
-      </p:sp>
-      <p:sp>
-        <p:nvSpPr>
-          <p:cNvPr id="39" name="Shape 37"/>
-          <p:cNvSpPr/>
-          <p:nvPr/>
-        </p:nvSpPr>
-        <p:spPr>
-          <a:xfrm>
-            <a:off x="365760" y="4096512"/>
-            <a:ext cx="1371600" cy="804672"/>
+              <a:t>Phonemes</a:t>
+            </a:r>
+            <a:endParaRPr lang="en-US" sz="1100" dirty="0"/>
+          </a:p>
+        </p:txBody>
+      </p:sp>
+      <p:sp>
+        <p:nvSpPr>
+          <p:cNvPr id="35" name="Shape 33"/>
+          <p:cNvSpPr/>
+          <p:nvPr/>
+        </p:nvSpPr>
+        <p:spPr>
+          <a:xfrm>
+            <a:off x="1874520" y="4096512"/>
+            <a:ext cx="6903720" cy="804672"/>
           </a:xfrm>
           <a:prstGeom prst="rect">
             <a:avLst>
@@ -21602,85 +22137,19 @@
             </a:avLst>
           </a:prstGeom>
           <a:solidFill>
-            <a:srgbClr val="E2E8F0"/>
+            <a:srgbClr val="F8FAFC"/>
           </a:solidFill>
           <a:ln w="12700">
             <a:solidFill>
               <a:srgbClr val="E2E8F0"/>
             </a:solidFill>
-            <a:prstDash val="solid"/>
-          </a:ln>
-        </p:spPr>
-      </p:sp>
-      <p:sp>
-        <p:nvSpPr>
-          <p:cNvPr id="40" name="Text 38"/>
-          <p:cNvSpPr/>
-          <p:nvPr/>
-        </p:nvSpPr>
-        <p:spPr>
-          <a:xfrm>
-            <a:off x="365760" y="4096512"/>
-            <a:ext cx="1371600" cy="804672"/>
-          </a:xfrm>
-          <a:prstGeom prst="rect">
-            <a:avLst/>
-          </a:prstGeom>
-          <a:noFill/>
-          <a:ln/>
-        </p:spPr>
-        <p:txBody>
-          <a:bodyPr wrap="square" lIns="0" tIns="0" rIns="0" bIns="0" rtlCol="0" anchor="ctr"/>
-          <a:lstStyle/>
-          <a:p>
-            <a:pPr algn="ctr" indent="0" marL="0">
-              <a:buNone/>
-            </a:pPr>
-            <a:r>
-              <a:rPr lang="en-US" sz="1100" b="1" dirty="0">
-                <a:solidFill>
-                  <a:srgbClr val="475569"/>
-                </a:solidFill>
-                <a:latin typeface="Trebuchet MS" pitchFamily="34" charset="0"/>
-                <a:ea typeface="Trebuchet MS" pitchFamily="34" charset="-122"/>
-                <a:cs typeface="Trebuchet MS" pitchFamily="34" charset="-120"/>
-              </a:rPr>
-              <a:t>Phonemes</a:t>
-            </a:r>
-            <a:endParaRPr lang="en-US" sz="1100" dirty="0"/>
-          </a:p>
-        </p:txBody>
-      </p:sp>
-      <p:sp>
-        <p:nvSpPr>
-          <p:cNvPr id="41" name="Shape 39"/>
-          <p:cNvSpPr/>
-          <p:nvPr/>
-        </p:nvSpPr>
-        <p:spPr>
-          <a:xfrm>
-            <a:off x="1874520" y="4096512"/>
-            <a:ext cx="6903720" cy="804672"/>
-          </a:xfrm>
-          <a:prstGeom prst="rect">
-            <a:avLst>
-              <a:gd name="adj" fmla="val 6818"/>
-            </a:avLst>
-          </a:prstGeom>
-          <a:solidFill>
-            <a:srgbClr val="F8FAFC"/>
-          </a:solidFill>
-          <a:ln w="12700">
-            <a:solidFill>
-              <a:srgbClr val="E2E8F0"/>
-            </a:solidFill>
             <a:prstDash val="dash"/>
           </a:ln>
         </p:spPr>
       </p:sp>
       <p:sp>
         <p:nvSpPr>
-          <p:cNvPr id="42" name="Text 40"/>
+          <p:cNvPr id="36" name="Text 34"/>
           <p:cNvSpPr/>
           <p:nvPr/>
         </p:nvSpPr>
@@ -22003,7 +22472,7 @@
                 <a:ea typeface="Calibri" pitchFamily="34" charset="-122"/>
                 <a:cs typeface="Calibri" pitchFamily="34" charset="-120"/>
               </a:rPr>
-              <a:t>Word Labs  •  wordlabs.app  •  Root: 'express' = to push or press out</a:t>
+              <a:t>Word Labs  •  wordlabs.app  •  Root: 'express' = to push or squeeze out</a:t>
             </a:r>
             <a:endParaRPr lang="en-US" sz="800" dirty="0"/>
           </a:p>
@@ -22142,7 +22611,7 @@
                 <a:ea typeface="Trebuchet MS" pitchFamily="34" charset="-122"/>
                 <a:cs typeface="Trebuchet MS" pitchFamily="34" charset="-120"/>
               </a:rPr>
-              <a:t>expressiveness</a:t>
+              <a:t>reexpress</a:t>
             </a:r>
             <a:endParaRPr lang="en-US" sz="2800" dirty="0"/>
           </a:p>
@@ -22222,7 +22691,7 @@
         </p:nvSpPr>
         <p:spPr>
           <a:xfrm>
-            <a:off x="2221992" y="2258568"/>
+            <a:off x="2938272" y="2258568"/>
             <a:ext cx="1828800" cy="292608"/>
           </a:xfrm>
           <a:prstGeom prst="rect">
@@ -22231,11 +22700,11 @@
             </a:avLst>
           </a:prstGeom>
           <a:solidFill>
-            <a:srgbClr val="CCFBF1"/>
+            <a:srgbClr val="DDD6FE"/>
           </a:solidFill>
           <a:ln w="19050">
             <a:solidFill>
-              <a:srgbClr val="0D9488"/>
+              <a:srgbClr val="7C3AED"/>
             </a:solidFill>
             <a:prstDash val="solid"/>
           </a:ln>
@@ -22256,7 +22725,7 @@
         </p:nvSpPr>
         <p:spPr>
           <a:xfrm>
-            <a:off x="2221992" y="2258568"/>
+            <a:off x="2938272" y="2258568"/>
             <a:ext cx="1828800" cy="292608"/>
           </a:xfrm>
           <a:prstGeom prst="rect">
@@ -22275,13 +22744,13 @@
             <a:r>
               <a:rPr lang="en-US" sz="1300" b="1" dirty="0">
                 <a:solidFill>
-                  <a:srgbClr val="0F766E"/>
+                  <a:srgbClr val="4C1D95"/>
                 </a:solidFill>
                 <a:latin typeface="Trebuchet MS" pitchFamily="34" charset="0"/>
                 <a:ea typeface="Trebuchet MS" pitchFamily="34" charset="-122"/>
                 <a:cs typeface="Trebuchet MS" pitchFamily="34" charset="-120"/>
               </a:rPr>
-              <a:t>express</a:t>
+              <a:t>re</a:t>
             </a:r>
             <a:endParaRPr lang="en-US" sz="1300" dirty="0"/>
           </a:p>
@@ -22295,7 +22764,7 @@
         </p:nvSpPr>
         <p:spPr>
           <a:xfrm>
-            <a:off x="2221992" y="2569464"/>
+            <a:off x="2938272" y="2569464"/>
             <a:ext cx="1828800" cy="201168"/>
           </a:xfrm>
           <a:prstGeom prst="rect">
@@ -22320,7 +22789,7 @@
                 <a:ea typeface="Calibri" pitchFamily="34" charset="-122"/>
                 <a:cs typeface="Calibri" pitchFamily="34" charset="-120"/>
               </a:rPr>
-              <a:t>to push or press out</a:t>
+              <a:t>again</a:t>
             </a:r>
             <a:endParaRPr lang="en-US" sz="850" dirty="0"/>
           </a:p>
@@ -22334,7 +22803,7 @@
         </p:nvSpPr>
         <p:spPr>
           <a:xfrm>
-            <a:off x="4370832" y="2258568"/>
+            <a:off x="5803392" y="2258568"/>
             <a:ext cx="1828800" cy="292608"/>
           </a:xfrm>
           <a:prstGeom prst="rect">
@@ -22343,11 +22812,11 @@
             </a:avLst>
           </a:prstGeom>
           <a:solidFill>
-            <a:srgbClr val="FCE7F3"/>
+            <a:srgbClr val="CCFBF1"/>
           </a:solidFill>
           <a:ln w="19050">
             <a:solidFill>
-              <a:srgbClr val="DB2777"/>
+              <a:srgbClr val="0D9488"/>
             </a:solidFill>
             <a:prstDash val="solid"/>
           </a:ln>
@@ -22368,7 +22837,7 @@
         </p:nvSpPr>
         <p:spPr>
           <a:xfrm>
-            <a:off x="4370832" y="2258568"/>
+            <a:off x="5803392" y="2258568"/>
             <a:ext cx="1828800" cy="292608"/>
           </a:xfrm>
           <a:prstGeom prst="rect">
@@ -22387,13 +22856,13 @@
             <a:r>
               <a:rPr lang="en-US" sz="1300" b="1" dirty="0">
                 <a:solidFill>
-                  <a:srgbClr val="9D174D"/>
+                  <a:srgbClr val="0F766E"/>
                 </a:solidFill>
                 <a:latin typeface="Trebuchet MS" pitchFamily="34" charset="0"/>
                 <a:ea typeface="Trebuchet MS" pitchFamily="34" charset="-122"/>
                 <a:cs typeface="Trebuchet MS" pitchFamily="34" charset="-120"/>
               </a:rPr>
-              <a:t>ive</a:t>
+              <a:t>express</a:t>
             </a:r>
             <a:endParaRPr lang="en-US" sz="1300" dirty="0"/>
           </a:p>
@@ -22407,7 +22876,7 @@
         </p:nvSpPr>
         <p:spPr>
           <a:xfrm>
-            <a:off x="4370832" y="2569464"/>
+            <a:off x="5803392" y="2569464"/>
             <a:ext cx="1828800" cy="201168"/>
           </a:xfrm>
           <a:prstGeom prst="rect">
@@ -22432,7 +22901,7 @@
                 <a:ea typeface="Calibri" pitchFamily="34" charset="-122"/>
                 <a:cs typeface="Calibri" pitchFamily="34" charset="-120"/>
               </a:rPr>
-              <a:t>having the quality of</a:t>
+              <a:t>to push or squeeze out</a:t>
             </a:r>
             <a:endParaRPr lang="en-US" sz="850" dirty="0"/>
           </a:p>
@@ -22446,30 +22915,23 @@
         </p:nvSpPr>
         <p:spPr>
           <a:xfrm>
-            <a:off x="6519672" y="2258568"/>
-            <a:ext cx="1828800" cy="292608"/>
+            <a:off x="365760" y="3273552"/>
+            <a:ext cx="1371600" cy="658368"/>
           </a:xfrm>
           <a:prstGeom prst="rect">
             <a:avLst>
-              <a:gd name="adj" fmla="val 25000"/>
+              <a:gd name="adj" fmla="val 8333"/>
             </a:avLst>
           </a:prstGeom>
           <a:solidFill>
-            <a:srgbClr val="FCE7F3"/>
-          </a:solidFill>
-          <a:ln w="19050">
-            <a:solidFill>
-              <a:srgbClr val="DB2777"/>
-            </a:solidFill>
-            <a:prstDash val="solid"/>
-          </a:ln>
-          <a:effectLst>
-            <a:outerShdw sx="100000" sy="100000" kx="0" ky="0" algn="bl" rotWithShape="0" blurRad="101600" dist="38100" dir="8100000">
-              <a:srgbClr val="000000">
-                <a:alpha val="12000"/>
-              </a:srgbClr>
-            </a:outerShdw>
-          </a:effectLst>
+            <a:srgbClr val="E2E8F0"/>
+          </a:solidFill>
+          <a:ln w="12700">
+            <a:solidFill>
+              <a:srgbClr val="E2E8F0"/>
+            </a:solidFill>
+            <a:prstDash val="solid"/>
+          </a:ln>
         </p:spPr>
       </p:sp>
       <p:sp>
@@ -22480,47 +22942,707 @@
         </p:nvSpPr>
         <p:spPr>
           <a:xfrm>
-            <a:off x="6519672" y="2258568"/>
-            <a:ext cx="1828800" cy="292608"/>
-          </a:xfrm>
-          <a:prstGeom prst="rect">
-            <a:avLst/>
-          </a:prstGeom>
-          <a:noFill/>
-          <a:ln/>
-        </p:spPr>
-        <p:txBody>
-          <a:bodyPr wrap="square" lIns="0" tIns="0" rIns="0" bIns="0" rtlCol="0" anchor="ctr"/>
-          <a:lstStyle/>
-          <a:p>
-            <a:pPr algn="ctr" indent="0" marL="0">
-              <a:buNone/>
-            </a:pPr>
-            <a:r>
-              <a:rPr lang="en-US" sz="1300" b="1" dirty="0">
-                <a:solidFill>
-                  <a:srgbClr val="9D174D"/>
+            <a:off x="365760" y="3273552"/>
+            <a:ext cx="1371600" cy="658368"/>
+          </a:xfrm>
+          <a:prstGeom prst="rect">
+            <a:avLst/>
+          </a:prstGeom>
+          <a:noFill/>
+          <a:ln/>
+        </p:spPr>
+        <p:txBody>
+          <a:bodyPr wrap="square" lIns="0" tIns="0" rIns="0" bIns="0" rtlCol="0" anchor="ctr"/>
+          <a:lstStyle/>
+          <a:p>
+            <a:pPr algn="ctr" indent="0" marL="0">
+              <a:buNone/>
+            </a:pPr>
+            <a:r>
+              <a:rPr lang="en-US" sz="1100" b="1" dirty="0">
+                <a:solidFill>
+                  <a:srgbClr val="475569"/>
                 </a:solidFill>
                 <a:latin typeface="Trebuchet MS" pitchFamily="34" charset="0"/>
                 <a:ea typeface="Trebuchet MS" pitchFamily="34" charset="-122"/>
                 <a:cs typeface="Trebuchet MS" pitchFamily="34" charset="-120"/>
               </a:rPr>
-              <a:t>ness</a:t>
-            </a:r>
-            <a:endParaRPr lang="en-US" sz="1300" dirty="0"/>
-          </a:p>
-        </p:txBody>
-      </p:sp>
-      <p:sp>
-        <p:nvSpPr>
-          <p:cNvPr id="24" name="Text 22"/>
-          <p:cNvSpPr/>
-          <p:nvPr/>
-        </p:nvSpPr>
-        <p:spPr>
-          <a:xfrm>
-            <a:off x="6519672" y="2569464"/>
-            <a:ext cx="1828800" cy="201168"/>
+              <a:t>Syllables</a:t>
+            </a:r>
+            <a:endParaRPr lang="en-US" sz="1100" dirty="0"/>
+          </a:p>
+        </p:txBody>
+      </p:sp>
+      <p:sp>
+        <p:nvSpPr>
+          <p:cNvPr id="24" name="Shape 22"/>
+          <p:cNvSpPr/>
+          <p:nvPr/>
+        </p:nvSpPr>
+        <p:spPr>
+          <a:xfrm>
+            <a:off x="1874520" y="3273552"/>
+            <a:ext cx="6903720" cy="658368"/>
+          </a:xfrm>
+          <a:prstGeom prst="rect">
+            <a:avLst>
+              <a:gd name="adj" fmla="val 8333"/>
+            </a:avLst>
+          </a:prstGeom>
+          <a:solidFill>
+            <a:srgbClr val="CCFBF1"/>
+          </a:solidFill>
+          <a:ln w="12700">
+            <a:solidFill>
+              <a:srgbClr val="0D9488"/>
+            </a:solidFill>
+            <a:prstDash val="solid"/>
+          </a:ln>
+        </p:spPr>
+      </p:sp>
+      <p:sp>
+        <p:nvSpPr>
+          <p:cNvPr id="25" name="Shape 23"/>
+          <p:cNvSpPr/>
+          <p:nvPr/>
+        </p:nvSpPr>
+        <p:spPr>
+          <a:xfrm>
+            <a:off x="2313432" y="3364992"/>
+            <a:ext cx="1645920" cy="475488"/>
+          </a:xfrm>
+          <a:prstGeom prst="rect">
+            <a:avLst>
+              <a:gd name="adj" fmla="val 9615"/>
+            </a:avLst>
+          </a:prstGeom>
+          <a:solidFill>
+            <a:srgbClr val="FFFFFF"/>
+          </a:solidFill>
+          <a:ln w="12700">
+            <a:solidFill>
+              <a:srgbClr val="0D9488"/>
+            </a:solidFill>
+            <a:prstDash val="solid"/>
+          </a:ln>
+        </p:spPr>
+      </p:sp>
+      <p:sp>
+        <p:nvSpPr>
+          <p:cNvPr id="26" name="Text 24"/>
+          <p:cNvSpPr/>
+          <p:nvPr/>
+        </p:nvSpPr>
+        <p:spPr>
+          <a:xfrm>
+            <a:off x="2313432" y="3364992"/>
+            <a:ext cx="1645920" cy="475488"/>
+          </a:xfrm>
+          <a:prstGeom prst="rect">
+            <a:avLst/>
+          </a:prstGeom>
+          <a:noFill/>
+          <a:ln/>
+        </p:spPr>
+        <p:txBody>
+          <a:bodyPr wrap="square" lIns="0" tIns="0" rIns="0" bIns="0" rtlCol="0" anchor="ctr"/>
+          <a:lstStyle/>
+          <a:p>
+            <a:pPr algn="ctr" indent="0" marL="0">
+              <a:buNone/>
+            </a:pPr>
+            <a:r>
+              <a:rPr lang="en-US" sz="1400" b="1" dirty="0">
+                <a:solidFill>
+                  <a:srgbClr val="0D9488"/>
+                </a:solidFill>
+                <a:latin typeface="Trebuchet MS" pitchFamily="34" charset="0"/>
+                <a:ea typeface="Trebuchet MS" pitchFamily="34" charset="-122"/>
+                <a:cs typeface="Trebuchet MS" pitchFamily="34" charset="-120"/>
+              </a:rPr>
+              <a:t>re</a:t>
+            </a:r>
+            <a:endParaRPr lang="en-US" sz="1400" dirty="0"/>
+          </a:p>
+        </p:txBody>
+      </p:sp>
+      <p:sp>
+        <p:nvSpPr>
+          <p:cNvPr id="27" name="Text 25"/>
+          <p:cNvSpPr/>
+          <p:nvPr/>
+        </p:nvSpPr>
+        <p:spPr>
+          <a:xfrm>
+            <a:off x="3959352" y="3364992"/>
+            <a:ext cx="411480" cy="475488"/>
+          </a:xfrm>
+          <a:prstGeom prst="rect">
+            <a:avLst/>
+          </a:prstGeom>
+          <a:noFill/>
+          <a:ln/>
+        </p:spPr>
+        <p:txBody>
+          <a:bodyPr wrap="square" lIns="0" tIns="0" rIns="0" bIns="0" rtlCol="0" anchor="ctr"/>
+          <a:lstStyle/>
+          <a:p>
+            <a:pPr algn="ctr" indent="0" marL="0">
+              <a:buNone/>
+            </a:pPr>
+            <a:r>
+              <a:rPr lang="en-US" sz="1600" b="1" dirty="0">
+                <a:solidFill>
+                  <a:srgbClr val="0D9488"/>
+                </a:solidFill>
+                <a:latin typeface="Trebuchet MS" pitchFamily="34" charset="0"/>
+                <a:ea typeface="Trebuchet MS" pitchFamily="34" charset="-122"/>
+                <a:cs typeface="Trebuchet MS" pitchFamily="34" charset="-120"/>
+              </a:rPr>
+              <a:t>·</a:t>
+            </a:r>
+            <a:endParaRPr lang="en-US" sz="1600" dirty="0"/>
+          </a:p>
+        </p:txBody>
+      </p:sp>
+      <p:sp>
+        <p:nvSpPr>
+          <p:cNvPr id="28" name="Shape 26"/>
+          <p:cNvSpPr/>
+          <p:nvPr/>
+        </p:nvSpPr>
+        <p:spPr>
+          <a:xfrm>
+            <a:off x="4370832" y="3364992"/>
+            <a:ext cx="1645920" cy="475488"/>
+          </a:xfrm>
+          <a:prstGeom prst="rect">
+            <a:avLst>
+              <a:gd name="adj" fmla="val 9615"/>
+            </a:avLst>
+          </a:prstGeom>
+          <a:solidFill>
+            <a:srgbClr val="FFFFFF"/>
+          </a:solidFill>
+          <a:ln w="12700">
+            <a:solidFill>
+              <a:srgbClr val="0D9488"/>
+            </a:solidFill>
+            <a:prstDash val="solid"/>
+          </a:ln>
+        </p:spPr>
+      </p:sp>
+      <p:sp>
+        <p:nvSpPr>
+          <p:cNvPr id="29" name="Text 27"/>
+          <p:cNvSpPr/>
+          <p:nvPr/>
+        </p:nvSpPr>
+        <p:spPr>
+          <a:xfrm>
+            <a:off x="4370832" y="3364992"/>
+            <a:ext cx="1645920" cy="475488"/>
+          </a:xfrm>
+          <a:prstGeom prst="rect">
+            <a:avLst/>
+          </a:prstGeom>
+          <a:noFill/>
+          <a:ln/>
+        </p:spPr>
+        <p:txBody>
+          <a:bodyPr wrap="square" lIns="0" tIns="0" rIns="0" bIns="0" rtlCol="0" anchor="ctr"/>
+          <a:lstStyle/>
+          <a:p>
+            <a:pPr algn="ctr" indent="0" marL="0">
+              <a:buNone/>
+            </a:pPr>
+            <a:r>
+              <a:rPr lang="en-US" sz="1400" b="1" dirty="0">
+                <a:solidFill>
+                  <a:srgbClr val="0D9488"/>
+                </a:solidFill>
+                <a:latin typeface="Trebuchet MS" pitchFamily="34" charset="0"/>
+                <a:ea typeface="Trebuchet MS" pitchFamily="34" charset="-122"/>
+                <a:cs typeface="Trebuchet MS" pitchFamily="34" charset="-120"/>
+              </a:rPr>
+              <a:t>ex</a:t>
+            </a:r>
+            <a:endParaRPr lang="en-US" sz="1400" dirty="0"/>
+          </a:p>
+        </p:txBody>
+      </p:sp>
+      <p:sp>
+        <p:nvSpPr>
+          <p:cNvPr id="30" name="Text 28"/>
+          <p:cNvSpPr/>
+          <p:nvPr/>
+        </p:nvSpPr>
+        <p:spPr>
+          <a:xfrm>
+            <a:off x="6016752" y="3364992"/>
+            <a:ext cx="411480" cy="475488"/>
+          </a:xfrm>
+          <a:prstGeom prst="rect">
+            <a:avLst/>
+          </a:prstGeom>
+          <a:noFill/>
+          <a:ln/>
+        </p:spPr>
+        <p:txBody>
+          <a:bodyPr wrap="square" lIns="0" tIns="0" rIns="0" bIns="0" rtlCol="0" anchor="ctr"/>
+          <a:lstStyle/>
+          <a:p>
+            <a:pPr algn="ctr" indent="0" marL="0">
+              <a:buNone/>
+            </a:pPr>
+            <a:r>
+              <a:rPr lang="en-US" sz="1600" b="1" dirty="0">
+                <a:solidFill>
+                  <a:srgbClr val="0D9488"/>
+                </a:solidFill>
+                <a:latin typeface="Trebuchet MS" pitchFamily="34" charset="0"/>
+                <a:ea typeface="Trebuchet MS" pitchFamily="34" charset="-122"/>
+                <a:cs typeface="Trebuchet MS" pitchFamily="34" charset="-120"/>
+              </a:rPr>
+              <a:t>·</a:t>
+            </a:r>
+            <a:endParaRPr lang="en-US" sz="1600" dirty="0"/>
+          </a:p>
+        </p:txBody>
+      </p:sp>
+      <p:sp>
+        <p:nvSpPr>
+          <p:cNvPr id="31" name="Shape 29"/>
+          <p:cNvSpPr/>
+          <p:nvPr/>
+        </p:nvSpPr>
+        <p:spPr>
+          <a:xfrm>
+            <a:off x="6428232" y="3364992"/>
+            <a:ext cx="1645920" cy="475488"/>
+          </a:xfrm>
+          <a:prstGeom prst="rect">
+            <a:avLst>
+              <a:gd name="adj" fmla="val 9615"/>
+            </a:avLst>
+          </a:prstGeom>
+          <a:solidFill>
+            <a:srgbClr val="FFFFFF"/>
+          </a:solidFill>
+          <a:ln w="12700">
+            <a:solidFill>
+              <a:srgbClr val="0D9488"/>
+            </a:solidFill>
+            <a:prstDash val="solid"/>
+          </a:ln>
+        </p:spPr>
+      </p:sp>
+      <p:sp>
+        <p:nvSpPr>
+          <p:cNvPr id="32" name="Text 30"/>
+          <p:cNvSpPr/>
+          <p:nvPr/>
+        </p:nvSpPr>
+        <p:spPr>
+          <a:xfrm>
+            <a:off x="6428232" y="3364992"/>
+            <a:ext cx="1645920" cy="475488"/>
+          </a:xfrm>
+          <a:prstGeom prst="rect">
+            <a:avLst/>
+          </a:prstGeom>
+          <a:noFill/>
+          <a:ln/>
+        </p:spPr>
+        <p:txBody>
+          <a:bodyPr wrap="square" lIns="0" tIns="0" rIns="0" bIns="0" rtlCol="0" anchor="ctr"/>
+          <a:lstStyle/>
+          <a:p>
+            <a:pPr algn="ctr" indent="0" marL="0">
+              <a:buNone/>
+            </a:pPr>
+            <a:r>
+              <a:rPr lang="en-US" sz="1400" b="1" dirty="0">
+                <a:solidFill>
+                  <a:srgbClr val="0D9488"/>
+                </a:solidFill>
+                <a:latin typeface="Trebuchet MS" pitchFamily="34" charset="0"/>
+                <a:ea typeface="Trebuchet MS" pitchFamily="34" charset="-122"/>
+                <a:cs typeface="Trebuchet MS" pitchFamily="34" charset="-120"/>
+              </a:rPr>
+              <a:t>press</a:t>
+            </a:r>
+            <a:endParaRPr lang="en-US" sz="1400" dirty="0"/>
+          </a:p>
+        </p:txBody>
+      </p:sp>
+      <p:sp>
+        <p:nvSpPr>
+          <p:cNvPr id="33" name="Shape 31"/>
+          <p:cNvSpPr/>
+          <p:nvPr/>
+        </p:nvSpPr>
+        <p:spPr>
+          <a:xfrm>
+            <a:off x="365760" y="4096512"/>
+            <a:ext cx="1371600" cy="804672"/>
+          </a:xfrm>
+          <a:prstGeom prst="rect">
+            <a:avLst>
+              <a:gd name="adj" fmla="val 6818"/>
+            </a:avLst>
+          </a:prstGeom>
+          <a:solidFill>
+            <a:srgbClr val="E2E8F0"/>
+          </a:solidFill>
+          <a:ln w="12700">
+            <a:solidFill>
+              <a:srgbClr val="E2E8F0"/>
+            </a:solidFill>
+            <a:prstDash val="solid"/>
+          </a:ln>
+        </p:spPr>
+      </p:sp>
+      <p:sp>
+        <p:nvSpPr>
+          <p:cNvPr id="34" name="Text 32"/>
+          <p:cNvSpPr/>
+          <p:nvPr/>
+        </p:nvSpPr>
+        <p:spPr>
+          <a:xfrm>
+            <a:off x="365760" y="4096512"/>
+            <a:ext cx="1371600" cy="804672"/>
+          </a:xfrm>
+          <a:prstGeom prst="rect">
+            <a:avLst/>
+          </a:prstGeom>
+          <a:noFill/>
+          <a:ln/>
+        </p:spPr>
+        <p:txBody>
+          <a:bodyPr wrap="square" lIns="0" tIns="0" rIns="0" bIns="0" rtlCol="0" anchor="ctr"/>
+          <a:lstStyle/>
+          <a:p>
+            <a:pPr algn="ctr" indent="0" marL="0">
+              <a:buNone/>
+            </a:pPr>
+            <a:r>
+              <a:rPr lang="en-US" sz="1100" b="1" dirty="0">
+                <a:solidFill>
+                  <a:srgbClr val="475569"/>
+                </a:solidFill>
+                <a:latin typeface="Trebuchet MS" pitchFamily="34" charset="0"/>
+                <a:ea typeface="Trebuchet MS" pitchFamily="34" charset="-122"/>
+                <a:cs typeface="Trebuchet MS" pitchFamily="34" charset="-120"/>
+              </a:rPr>
+              <a:t>Phonemes</a:t>
+            </a:r>
+            <a:endParaRPr lang="en-US" sz="1100" dirty="0"/>
+          </a:p>
+        </p:txBody>
+      </p:sp>
+      <p:sp>
+        <p:nvSpPr>
+          <p:cNvPr id="35" name="Shape 33"/>
+          <p:cNvSpPr/>
+          <p:nvPr/>
+        </p:nvSpPr>
+        <p:spPr>
+          <a:xfrm>
+            <a:off x="1874520" y="4096512"/>
+            <a:ext cx="6903720" cy="804672"/>
+          </a:xfrm>
+          <a:prstGeom prst="rect">
+            <a:avLst>
+              <a:gd name="adj" fmla="val 6818"/>
+            </a:avLst>
+          </a:prstGeom>
+          <a:solidFill>
+            <a:srgbClr val="FCE7F3"/>
+          </a:solidFill>
+          <a:ln w="12700">
+            <a:solidFill>
+              <a:srgbClr val="DB2777"/>
+            </a:solidFill>
+            <a:prstDash val="solid"/>
+          </a:ln>
+        </p:spPr>
+      </p:sp>
+      <p:sp>
+        <p:nvSpPr>
+          <p:cNvPr id="36" name="Shape 34"/>
+          <p:cNvSpPr/>
+          <p:nvPr/>
+        </p:nvSpPr>
+        <p:spPr>
+          <a:xfrm>
+            <a:off x="2023872" y="4169664"/>
+            <a:ext cx="685800" cy="384048"/>
+          </a:xfrm>
+          <a:prstGeom prst="rect">
+            <a:avLst>
+              <a:gd name="adj" fmla="val 9524"/>
+            </a:avLst>
+          </a:prstGeom>
+          <a:solidFill>
+            <a:srgbClr val="FFFFFF"/>
+          </a:solidFill>
+          <a:ln w="12700">
+            <a:solidFill>
+              <a:srgbClr val="DB2777"/>
+            </a:solidFill>
+            <a:prstDash val="solid"/>
+          </a:ln>
+        </p:spPr>
+      </p:sp>
+      <p:sp>
+        <p:nvSpPr>
+          <p:cNvPr id="37" name="Text 35"/>
+          <p:cNvSpPr/>
+          <p:nvPr/>
+        </p:nvSpPr>
+        <p:spPr>
+          <a:xfrm>
+            <a:off x="2023872" y="4169664"/>
+            <a:ext cx="685800" cy="384048"/>
+          </a:xfrm>
+          <a:prstGeom prst="rect">
+            <a:avLst/>
+          </a:prstGeom>
+          <a:noFill/>
+          <a:ln/>
+        </p:spPr>
+        <p:txBody>
+          <a:bodyPr wrap="square" lIns="0" tIns="0" rIns="0" bIns="0" rtlCol="0" anchor="ctr"/>
+          <a:lstStyle/>
+          <a:p>
+            <a:pPr algn="ctr" indent="0" marL="0">
+              <a:buNone/>
+            </a:pPr>
+            <a:r>
+              <a:rPr lang="en-US" sz="900" b="1" dirty="0">
+                <a:solidFill>
+                  <a:srgbClr val="9D174D"/>
+                </a:solidFill>
+                <a:latin typeface="Trebuchet MS" pitchFamily="34" charset="0"/>
+                <a:ea typeface="Trebuchet MS" pitchFamily="34" charset="-122"/>
+                <a:cs typeface="Trebuchet MS" pitchFamily="34" charset="-120"/>
+              </a:rPr>
+              <a:t>r</a:t>
+            </a:r>
+            <a:endParaRPr lang="en-US" sz="900" dirty="0"/>
+          </a:p>
+        </p:txBody>
+      </p:sp>
+      <p:sp>
+        <p:nvSpPr>
+          <p:cNvPr id="38" name="Shape 36"/>
+          <p:cNvSpPr/>
+          <p:nvPr/>
+        </p:nvSpPr>
+        <p:spPr>
+          <a:xfrm>
+            <a:off x="2831592" y="4169664"/>
+            <a:ext cx="685800" cy="384048"/>
+          </a:xfrm>
+          <a:prstGeom prst="rect">
+            <a:avLst>
+              <a:gd name="adj" fmla="val 9524"/>
+            </a:avLst>
+          </a:prstGeom>
+          <a:solidFill>
+            <a:srgbClr val="FFFFFF"/>
+          </a:solidFill>
+          <a:ln w="12700">
+            <a:solidFill>
+              <a:srgbClr val="DB2777"/>
+            </a:solidFill>
+            <a:prstDash val="solid"/>
+          </a:ln>
+        </p:spPr>
+      </p:sp>
+      <p:sp>
+        <p:nvSpPr>
+          <p:cNvPr id="39" name="Text 37"/>
+          <p:cNvSpPr/>
+          <p:nvPr/>
+        </p:nvSpPr>
+        <p:spPr>
+          <a:xfrm>
+            <a:off x="2831592" y="4169664"/>
+            <a:ext cx="685800" cy="384048"/>
+          </a:xfrm>
+          <a:prstGeom prst="rect">
+            <a:avLst/>
+          </a:prstGeom>
+          <a:noFill/>
+          <a:ln/>
+        </p:spPr>
+        <p:txBody>
+          <a:bodyPr wrap="square" lIns="0" tIns="0" rIns="0" bIns="0" rtlCol="0" anchor="ctr"/>
+          <a:lstStyle/>
+          <a:p>
+            <a:pPr algn="ctr" indent="0" marL="0">
+              <a:buNone/>
+            </a:pPr>
+            <a:r>
+              <a:rPr lang="en-US" sz="900" b="1" dirty="0">
+                <a:solidFill>
+                  <a:srgbClr val="9D174D"/>
+                </a:solidFill>
+                <a:latin typeface="Trebuchet MS" pitchFamily="34" charset="0"/>
+                <a:ea typeface="Trebuchet MS" pitchFamily="34" charset="-122"/>
+                <a:cs typeface="Trebuchet MS" pitchFamily="34" charset="-120"/>
+              </a:rPr>
+              <a:t>e</a:t>
+            </a:r>
+            <a:endParaRPr lang="en-US" sz="900" dirty="0"/>
+          </a:p>
+        </p:txBody>
+      </p:sp>
+      <p:sp>
+        <p:nvSpPr>
+          <p:cNvPr id="40" name="Shape 38"/>
+          <p:cNvSpPr/>
+          <p:nvPr/>
+        </p:nvSpPr>
+        <p:spPr>
+          <a:xfrm>
+            <a:off x="3639312" y="4169664"/>
+            <a:ext cx="685800" cy="384048"/>
+          </a:xfrm>
+          <a:prstGeom prst="rect">
+            <a:avLst>
+              <a:gd name="adj" fmla="val 9524"/>
+            </a:avLst>
+          </a:prstGeom>
+          <a:solidFill>
+            <a:srgbClr val="FFFFFF"/>
+          </a:solidFill>
+          <a:ln w="12700">
+            <a:solidFill>
+              <a:srgbClr val="DB2777"/>
+            </a:solidFill>
+            <a:prstDash val="solid"/>
+          </a:ln>
+        </p:spPr>
+      </p:sp>
+      <p:sp>
+        <p:nvSpPr>
+          <p:cNvPr id="41" name="Text 39"/>
+          <p:cNvSpPr/>
+          <p:nvPr/>
+        </p:nvSpPr>
+        <p:spPr>
+          <a:xfrm>
+            <a:off x="3639312" y="4169664"/>
+            <a:ext cx="685800" cy="384048"/>
+          </a:xfrm>
+          <a:prstGeom prst="rect">
+            <a:avLst/>
+          </a:prstGeom>
+          <a:noFill/>
+          <a:ln/>
+        </p:spPr>
+        <p:txBody>
+          <a:bodyPr wrap="square" lIns="0" tIns="0" rIns="0" bIns="0" rtlCol="0" anchor="ctr"/>
+          <a:lstStyle/>
+          <a:p>
+            <a:pPr algn="ctr" indent="0" marL="0">
+              <a:buNone/>
+            </a:pPr>
+            <a:r>
+              <a:rPr lang="en-US" sz="900" b="1" dirty="0">
+                <a:solidFill>
+                  <a:srgbClr val="9D174D"/>
+                </a:solidFill>
+                <a:latin typeface="Trebuchet MS" pitchFamily="34" charset="0"/>
+                <a:ea typeface="Trebuchet MS" pitchFamily="34" charset="-122"/>
+                <a:cs typeface="Trebuchet MS" pitchFamily="34" charset="-120"/>
+              </a:rPr>
+              <a:t>e</a:t>
+            </a:r>
+            <a:endParaRPr lang="en-US" sz="900" dirty="0"/>
+          </a:p>
+        </p:txBody>
+      </p:sp>
+      <p:sp>
+        <p:nvSpPr>
+          <p:cNvPr id="42" name="Shape 40"/>
+          <p:cNvSpPr/>
+          <p:nvPr/>
+        </p:nvSpPr>
+        <p:spPr>
+          <a:xfrm>
+            <a:off x="4447032" y="4169664"/>
+            <a:ext cx="685800" cy="384048"/>
+          </a:xfrm>
+          <a:prstGeom prst="rect">
+            <a:avLst>
+              <a:gd name="adj" fmla="val 9524"/>
+            </a:avLst>
+          </a:prstGeom>
+          <a:solidFill>
+            <a:srgbClr val="FFFFFF"/>
+          </a:solidFill>
+          <a:ln w="12700">
+            <a:solidFill>
+              <a:srgbClr val="DB2777"/>
+            </a:solidFill>
+            <a:prstDash val="solid"/>
+          </a:ln>
+        </p:spPr>
+      </p:sp>
+      <p:sp>
+        <p:nvSpPr>
+          <p:cNvPr id="43" name="Text 41"/>
+          <p:cNvSpPr/>
+          <p:nvPr/>
+        </p:nvSpPr>
+        <p:spPr>
+          <a:xfrm>
+            <a:off x="4447032" y="4169664"/>
+            <a:ext cx="685800" cy="384048"/>
+          </a:xfrm>
+          <a:prstGeom prst="rect">
+            <a:avLst/>
+          </a:prstGeom>
+          <a:noFill/>
+          <a:ln/>
+        </p:spPr>
+        <p:txBody>
+          <a:bodyPr wrap="square" lIns="0" tIns="0" rIns="0" bIns="0" rtlCol="0" anchor="ctr"/>
+          <a:lstStyle/>
+          <a:p>
+            <a:pPr algn="ctr" indent="0" marL="0">
+              <a:buNone/>
+            </a:pPr>
+            <a:r>
+              <a:rPr lang="en-US" sz="900" b="1" dirty="0">
+                <a:solidFill>
+                  <a:srgbClr val="9D174D"/>
+                </a:solidFill>
+                <a:latin typeface="Trebuchet MS" pitchFamily="34" charset="0"/>
+                <a:ea typeface="Trebuchet MS" pitchFamily="34" charset="-122"/>
+                <a:cs typeface="Trebuchet MS" pitchFamily="34" charset="-120"/>
+              </a:rPr>
+              <a:t>x</a:t>
+            </a:r>
+            <a:endParaRPr lang="en-US" sz="900" dirty="0"/>
+          </a:p>
+        </p:txBody>
+      </p:sp>
+      <p:sp>
+        <p:nvSpPr>
+          <p:cNvPr id="44" name="Text 42"/>
+          <p:cNvSpPr/>
+          <p:nvPr/>
+        </p:nvSpPr>
+        <p:spPr>
+          <a:xfrm>
+            <a:off x="4447032" y="4572000"/>
+            <a:ext cx="685800" cy="219456"/>
           </a:xfrm>
           <a:prstGeom prst="rect">
             <a:avLst/>
@@ -22536,597 +23658,228 @@
               <a:buNone/>
             </a:pPr>
             <a:r>
-              <a:rPr lang="en-US" sz="850" dirty="0">
-                <a:solidFill>
-                  <a:srgbClr val="475569"/>
+              <a:rPr lang="en-US" sz="750" i="1" dirty="0">
+                <a:solidFill>
+                  <a:srgbClr val="94A3B8"/>
                 </a:solidFill>
                 <a:latin typeface="Calibri" pitchFamily="34" charset="0"/>
                 <a:ea typeface="Calibri" pitchFamily="34" charset="-122"/>
                 <a:cs typeface="Calibri" pitchFamily="34" charset="-120"/>
               </a:rPr>
-              <a:t>state or quality of being</a:t>
-            </a:r>
-            <a:endParaRPr lang="en-US" sz="850" dirty="0"/>
-          </a:p>
-        </p:txBody>
-      </p:sp>
-      <p:sp>
-        <p:nvSpPr>
-          <p:cNvPr id="25" name="Shape 23"/>
-          <p:cNvSpPr/>
-          <p:nvPr/>
-        </p:nvSpPr>
-        <p:spPr>
-          <a:xfrm>
-            <a:off x="365760" y="3273552"/>
-            <a:ext cx="1371600" cy="658368"/>
+              <a:t>/ks/</a:t>
+            </a:r>
+            <a:endParaRPr lang="en-US" sz="750" dirty="0"/>
+          </a:p>
+        </p:txBody>
+      </p:sp>
+      <p:sp>
+        <p:nvSpPr>
+          <p:cNvPr id="45" name="Shape 43"/>
+          <p:cNvSpPr/>
+          <p:nvPr/>
+        </p:nvSpPr>
+        <p:spPr>
+          <a:xfrm>
+            <a:off x="5254752" y="4169664"/>
+            <a:ext cx="685800" cy="384048"/>
           </a:xfrm>
           <a:prstGeom prst="rect">
             <a:avLst>
-              <a:gd name="adj" fmla="val 8333"/>
+              <a:gd name="adj" fmla="val 9524"/>
             </a:avLst>
           </a:prstGeom>
           <a:solidFill>
-            <a:srgbClr val="E2E8F0"/>
-          </a:solidFill>
-          <a:ln w="12700">
-            <a:solidFill>
-              <a:srgbClr val="E2E8F0"/>
-            </a:solidFill>
-            <a:prstDash val="solid"/>
-          </a:ln>
-        </p:spPr>
-      </p:sp>
-      <p:sp>
-        <p:nvSpPr>
-          <p:cNvPr id="26" name="Text 24"/>
-          <p:cNvSpPr/>
-          <p:nvPr/>
-        </p:nvSpPr>
-        <p:spPr>
-          <a:xfrm>
-            <a:off x="365760" y="3273552"/>
-            <a:ext cx="1371600" cy="658368"/>
-          </a:xfrm>
-          <a:prstGeom prst="rect">
-            <a:avLst/>
-          </a:prstGeom>
-          <a:noFill/>
-          <a:ln/>
-        </p:spPr>
-        <p:txBody>
-          <a:bodyPr wrap="square" lIns="0" tIns="0" rIns="0" bIns="0" rtlCol="0" anchor="ctr"/>
-          <a:lstStyle/>
-          <a:p>
-            <a:pPr algn="ctr" indent="0" marL="0">
-              <a:buNone/>
-            </a:pPr>
-            <a:r>
-              <a:rPr lang="en-US" sz="1100" b="1" dirty="0">
-                <a:solidFill>
-                  <a:srgbClr val="475569"/>
+            <a:srgbClr val="FFFFFF"/>
+          </a:solidFill>
+          <a:ln w="12700">
+            <a:solidFill>
+              <a:srgbClr val="DB2777"/>
+            </a:solidFill>
+            <a:prstDash val="solid"/>
+          </a:ln>
+        </p:spPr>
+      </p:sp>
+      <p:sp>
+        <p:nvSpPr>
+          <p:cNvPr id="46" name="Text 44"/>
+          <p:cNvSpPr/>
+          <p:nvPr/>
+        </p:nvSpPr>
+        <p:spPr>
+          <a:xfrm>
+            <a:off x="5254752" y="4169664"/>
+            <a:ext cx="685800" cy="384048"/>
+          </a:xfrm>
+          <a:prstGeom prst="rect">
+            <a:avLst/>
+          </a:prstGeom>
+          <a:noFill/>
+          <a:ln/>
+        </p:spPr>
+        <p:txBody>
+          <a:bodyPr wrap="square" lIns="0" tIns="0" rIns="0" bIns="0" rtlCol="0" anchor="ctr"/>
+          <a:lstStyle/>
+          <a:p>
+            <a:pPr algn="ctr" indent="0" marL="0">
+              <a:buNone/>
+            </a:pPr>
+            <a:r>
+              <a:rPr lang="en-US" sz="900" b="1" dirty="0">
+                <a:solidFill>
+                  <a:srgbClr val="9D174D"/>
                 </a:solidFill>
                 <a:latin typeface="Trebuchet MS" pitchFamily="34" charset="0"/>
                 <a:ea typeface="Trebuchet MS" pitchFamily="34" charset="-122"/>
                 <a:cs typeface="Trebuchet MS" pitchFamily="34" charset="-120"/>
               </a:rPr>
-              <a:t>Syllables</a:t>
-            </a:r>
-            <a:endParaRPr lang="en-US" sz="1100" dirty="0"/>
-          </a:p>
-        </p:txBody>
-      </p:sp>
-      <p:sp>
-        <p:nvSpPr>
-          <p:cNvPr id="27" name="Shape 25"/>
-          <p:cNvSpPr/>
-          <p:nvPr/>
-        </p:nvSpPr>
-        <p:spPr>
-          <a:xfrm>
-            <a:off x="1874520" y="3273552"/>
-            <a:ext cx="6903720" cy="658368"/>
+              <a:t>p</a:t>
+            </a:r>
+            <a:endParaRPr lang="en-US" sz="900" dirty="0"/>
+          </a:p>
+        </p:txBody>
+      </p:sp>
+      <p:sp>
+        <p:nvSpPr>
+          <p:cNvPr id="47" name="Shape 45"/>
+          <p:cNvSpPr/>
+          <p:nvPr/>
+        </p:nvSpPr>
+        <p:spPr>
+          <a:xfrm>
+            <a:off x="6062472" y="4169664"/>
+            <a:ext cx="685800" cy="384048"/>
           </a:xfrm>
           <a:prstGeom prst="rect">
             <a:avLst>
-              <a:gd name="adj" fmla="val 8333"/>
+              <a:gd name="adj" fmla="val 9524"/>
             </a:avLst>
           </a:prstGeom>
           <a:solidFill>
-            <a:srgbClr val="CCFBF1"/>
-          </a:solidFill>
-          <a:ln w="12700">
-            <a:solidFill>
-              <a:srgbClr val="0D9488"/>
-            </a:solidFill>
-            <a:prstDash val="solid"/>
-          </a:ln>
-        </p:spPr>
-      </p:sp>
-      <p:sp>
-        <p:nvSpPr>
-          <p:cNvPr id="28" name="Shape 26"/>
-          <p:cNvSpPr/>
-          <p:nvPr/>
-        </p:nvSpPr>
-        <p:spPr>
-          <a:xfrm>
-            <a:off x="1975104" y="3364992"/>
-            <a:ext cx="1554480" cy="475488"/>
-          </a:xfrm>
-          <a:prstGeom prst="rect">
-            <a:avLst>
-              <a:gd name="adj" fmla="val 9615"/>
-            </a:avLst>
-          </a:prstGeom>
-          <a:solidFill>
             <a:srgbClr val="FFFFFF"/>
           </a:solidFill>
           <a:ln w="12700">
             <a:solidFill>
-              <a:srgbClr val="0D9488"/>
-            </a:solidFill>
-            <a:prstDash val="solid"/>
-          </a:ln>
-        </p:spPr>
-      </p:sp>
-      <p:sp>
-        <p:nvSpPr>
-          <p:cNvPr id="29" name="Text 27"/>
-          <p:cNvSpPr/>
-          <p:nvPr/>
-        </p:nvSpPr>
-        <p:spPr>
-          <a:xfrm>
-            <a:off x="1975104" y="3364992"/>
-            <a:ext cx="1554480" cy="475488"/>
-          </a:xfrm>
-          <a:prstGeom prst="rect">
-            <a:avLst/>
-          </a:prstGeom>
-          <a:noFill/>
-          <a:ln/>
-        </p:spPr>
-        <p:txBody>
-          <a:bodyPr wrap="square" lIns="0" tIns="0" rIns="0" bIns="0" rtlCol="0" anchor="ctr"/>
-          <a:lstStyle/>
-          <a:p>
-            <a:pPr algn="ctr" indent="0" marL="0">
-              <a:buNone/>
-            </a:pPr>
-            <a:r>
-              <a:rPr lang="en-US" sz="1400" b="1" dirty="0">
-                <a:solidFill>
-                  <a:srgbClr val="0D9488"/>
+              <a:srgbClr val="DB2777"/>
+            </a:solidFill>
+            <a:prstDash val="solid"/>
+          </a:ln>
+        </p:spPr>
+      </p:sp>
+      <p:sp>
+        <p:nvSpPr>
+          <p:cNvPr id="48" name="Text 46"/>
+          <p:cNvSpPr/>
+          <p:nvPr/>
+        </p:nvSpPr>
+        <p:spPr>
+          <a:xfrm>
+            <a:off x="6062472" y="4169664"/>
+            <a:ext cx="685800" cy="384048"/>
+          </a:xfrm>
+          <a:prstGeom prst="rect">
+            <a:avLst/>
+          </a:prstGeom>
+          <a:noFill/>
+          <a:ln/>
+        </p:spPr>
+        <p:txBody>
+          <a:bodyPr wrap="square" lIns="0" tIns="0" rIns="0" bIns="0" rtlCol="0" anchor="ctr"/>
+          <a:lstStyle/>
+          <a:p>
+            <a:pPr algn="ctr" indent="0" marL="0">
+              <a:buNone/>
+            </a:pPr>
+            <a:r>
+              <a:rPr lang="en-US" sz="900" b="1" dirty="0">
+                <a:solidFill>
+                  <a:srgbClr val="9D174D"/>
                 </a:solidFill>
                 <a:latin typeface="Trebuchet MS" pitchFamily="34" charset="0"/>
                 <a:ea typeface="Trebuchet MS" pitchFamily="34" charset="-122"/>
                 <a:cs typeface="Trebuchet MS" pitchFamily="34" charset="-120"/>
               </a:rPr>
-              <a:t>ex</a:t>
-            </a:r>
-            <a:endParaRPr lang="en-US" sz="1400" dirty="0"/>
-          </a:p>
-        </p:txBody>
-      </p:sp>
-      <p:sp>
-        <p:nvSpPr>
-          <p:cNvPr id="30" name="Text 28"/>
-          <p:cNvSpPr/>
-          <p:nvPr/>
-        </p:nvSpPr>
-        <p:spPr>
-          <a:xfrm>
-            <a:off x="3529584" y="3364992"/>
-            <a:ext cx="73152" cy="475488"/>
-          </a:xfrm>
-          <a:prstGeom prst="rect">
-            <a:avLst/>
-          </a:prstGeom>
-          <a:noFill/>
-          <a:ln/>
-        </p:spPr>
-        <p:txBody>
-          <a:bodyPr wrap="square" lIns="0" tIns="0" rIns="0" bIns="0" rtlCol="0" anchor="ctr"/>
-          <a:lstStyle/>
-          <a:p>
-            <a:pPr algn="ctr" indent="0" marL="0">
-              <a:buNone/>
-            </a:pPr>
-            <a:r>
-              <a:rPr lang="en-US" sz="1600" b="1" dirty="0">
-                <a:solidFill>
-                  <a:srgbClr val="0D9488"/>
+              <a:t>r</a:t>
+            </a:r>
+            <a:endParaRPr lang="en-US" sz="900" dirty="0"/>
+          </a:p>
+        </p:txBody>
+      </p:sp>
+      <p:sp>
+        <p:nvSpPr>
+          <p:cNvPr id="49" name="Shape 47"/>
+          <p:cNvSpPr/>
+          <p:nvPr/>
+        </p:nvSpPr>
+        <p:spPr>
+          <a:xfrm>
+            <a:off x="6870192" y="4169664"/>
+            <a:ext cx="685800" cy="384048"/>
+          </a:xfrm>
+          <a:prstGeom prst="rect">
+            <a:avLst>
+              <a:gd name="adj" fmla="val 9524"/>
+            </a:avLst>
+          </a:prstGeom>
+          <a:solidFill>
+            <a:srgbClr val="FFFFFF"/>
+          </a:solidFill>
+          <a:ln w="12700">
+            <a:solidFill>
+              <a:srgbClr val="DB2777"/>
+            </a:solidFill>
+            <a:prstDash val="solid"/>
+          </a:ln>
+        </p:spPr>
+      </p:sp>
+      <p:sp>
+        <p:nvSpPr>
+          <p:cNvPr id="50" name="Text 48"/>
+          <p:cNvSpPr/>
+          <p:nvPr/>
+        </p:nvSpPr>
+        <p:spPr>
+          <a:xfrm>
+            <a:off x="6870192" y="4169664"/>
+            <a:ext cx="685800" cy="384048"/>
+          </a:xfrm>
+          <a:prstGeom prst="rect">
+            <a:avLst/>
+          </a:prstGeom>
+          <a:noFill/>
+          <a:ln/>
+        </p:spPr>
+        <p:txBody>
+          <a:bodyPr wrap="square" lIns="0" tIns="0" rIns="0" bIns="0" rtlCol="0" anchor="ctr"/>
+          <a:lstStyle/>
+          <a:p>
+            <a:pPr algn="ctr" indent="0" marL="0">
+              <a:buNone/>
+            </a:pPr>
+            <a:r>
+              <a:rPr lang="en-US" sz="900" b="1" dirty="0">
+                <a:solidFill>
+                  <a:srgbClr val="9D174D"/>
                 </a:solidFill>
                 <a:latin typeface="Trebuchet MS" pitchFamily="34" charset="0"/>
                 <a:ea typeface="Trebuchet MS" pitchFamily="34" charset="-122"/>
                 <a:cs typeface="Trebuchet MS" pitchFamily="34" charset="-120"/>
               </a:rPr>
-              <a:t>·</a:t>
-            </a:r>
-            <a:endParaRPr lang="en-US" sz="1600" dirty="0"/>
-          </a:p>
-        </p:txBody>
-      </p:sp>
-      <p:sp>
-        <p:nvSpPr>
-          <p:cNvPr id="31" name="Shape 29"/>
-          <p:cNvSpPr/>
-          <p:nvPr/>
-        </p:nvSpPr>
-        <p:spPr>
-          <a:xfrm>
-            <a:off x="3602736" y="3364992"/>
-            <a:ext cx="1554480" cy="475488"/>
-          </a:xfrm>
-          <a:prstGeom prst="rect">
-            <a:avLst>
-              <a:gd name="adj" fmla="val 9615"/>
-            </a:avLst>
-          </a:prstGeom>
-          <a:solidFill>
-            <a:srgbClr val="FFFFFF"/>
-          </a:solidFill>
-          <a:ln w="12700">
-            <a:solidFill>
-              <a:srgbClr val="0D9488"/>
-            </a:solidFill>
-            <a:prstDash val="solid"/>
-          </a:ln>
-        </p:spPr>
-      </p:sp>
-      <p:sp>
-        <p:nvSpPr>
-          <p:cNvPr id="32" name="Text 30"/>
-          <p:cNvSpPr/>
-          <p:nvPr/>
-        </p:nvSpPr>
-        <p:spPr>
-          <a:xfrm>
-            <a:off x="3602736" y="3364992"/>
-            <a:ext cx="1554480" cy="475488"/>
-          </a:xfrm>
-          <a:prstGeom prst="rect">
-            <a:avLst/>
-          </a:prstGeom>
-          <a:noFill/>
-          <a:ln/>
-        </p:spPr>
-        <p:txBody>
-          <a:bodyPr wrap="square" lIns="0" tIns="0" rIns="0" bIns="0" rtlCol="0" anchor="ctr"/>
-          <a:lstStyle/>
-          <a:p>
-            <a:pPr algn="ctr" indent="0" marL="0">
-              <a:buNone/>
-            </a:pPr>
-            <a:r>
-              <a:rPr lang="en-US" sz="1400" b="1" dirty="0">
-                <a:solidFill>
-                  <a:srgbClr val="0D9488"/>
-                </a:solidFill>
-                <a:latin typeface="Trebuchet MS" pitchFamily="34" charset="0"/>
-                <a:ea typeface="Trebuchet MS" pitchFamily="34" charset="-122"/>
-                <a:cs typeface="Trebuchet MS" pitchFamily="34" charset="-120"/>
-              </a:rPr>
-              <a:t>press</a:t>
-            </a:r>
-            <a:endParaRPr lang="en-US" sz="1400" dirty="0"/>
-          </a:p>
-        </p:txBody>
-      </p:sp>
-      <p:sp>
-        <p:nvSpPr>
-          <p:cNvPr id="33" name="Text 31"/>
-          <p:cNvSpPr/>
-          <p:nvPr/>
-        </p:nvSpPr>
-        <p:spPr>
-          <a:xfrm>
-            <a:off x="5157216" y="3364992"/>
-            <a:ext cx="73152" cy="475488"/>
-          </a:xfrm>
-          <a:prstGeom prst="rect">
-            <a:avLst/>
-          </a:prstGeom>
-          <a:noFill/>
-          <a:ln/>
-        </p:spPr>
-        <p:txBody>
-          <a:bodyPr wrap="square" lIns="0" tIns="0" rIns="0" bIns="0" rtlCol="0" anchor="ctr"/>
-          <a:lstStyle/>
-          <a:p>
-            <a:pPr algn="ctr" indent="0" marL="0">
-              <a:buNone/>
-            </a:pPr>
-            <a:r>
-              <a:rPr lang="en-US" sz="1600" b="1" dirty="0">
-                <a:solidFill>
-                  <a:srgbClr val="0D9488"/>
-                </a:solidFill>
-                <a:latin typeface="Trebuchet MS" pitchFamily="34" charset="0"/>
-                <a:ea typeface="Trebuchet MS" pitchFamily="34" charset="-122"/>
-                <a:cs typeface="Trebuchet MS" pitchFamily="34" charset="-120"/>
-              </a:rPr>
-              <a:t>·</a:t>
-            </a:r>
-            <a:endParaRPr lang="en-US" sz="1600" dirty="0"/>
-          </a:p>
-        </p:txBody>
-      </p:sp>
-      <p:sp>
-        <p:nvSpPr>
-          <p:cNvPr id="34" name="Shape 32"/>
-          <p:cNvSpPr/>
-          <p:nvPr/>
-        </p:nvSpPr>
-        <p:spPr>
-          <a:xfrm>
-            <a:off x="5230368" y="3364992"/>
-            <a:ext cx="1554480" cy="475488"/>
-          </a:xfrm>
-          <a:prstGeom prst="rect">
-            <a:avLst>
-              <a:gd name="adj" fmla="val 9615"/>
-            </a:avLst>
-          </a:prstGeom>
-          <a:solidFill>
-            <a:srgbClr val="FFFFFF"/>
-          </a:solidFill>
-          <a:ln w="12700">
-            <a:solidFill>
-              <a:srgbClr val="0D9488"/>
-            </a:solidFill>
-            <a:prstDash val="solid"/>
-          </a:ln>
-        </p:spPr>
-      </p:sp>
-      <p:sp>
-        <p:nvSpPr>
-          <p:cNvPr id="35" name="Text 33"/>
-          <p:cNvSpPr/>
-          <p:nvPr/>
-        </p:nvSpPr>
-        <p:spPr>
-          <a:xfrm>
-            <a:off x="5230368" y="3364992"/>
-            <a:ext cx="1554480" cy="475488"/>
-          </a:xfrm>
-          <a:prstGeom prst="rect">
-            <a:avLst/>
-          </a:prstGeom>
-          <a:noFill/>
-          <a:ln/>
-        </p:spPr>
-        <p:txBody>
-          <a:bodyPr wrap="square" lIns="0" tIns="0" rIns="0" bIns="0" rtlCol="0" anchor="ctr"/>
-          <a:lstStyle/>
-          <a:p>
-            <a:pPr algn="ctr" indent="0" marL="0">
-              <a:buNone/>
-            </a:pPr>
-            <a:r>
-              <a:rPr lang="en-US" sz="1400" b="1" dirty="0">
-                <a:solidFill>
-                  <a:srgbClr val="0D9488"/>
-                </a:solidFill>
-                <a:latin typeface="Trebuchet MS" pitchFamily="34" charset="0"/>
-                <a:ea typeface="Trebuchet MS" pitchFamily="34" charset="-122"/>
-                <a:cs typeface="Trebuchet MS" pitchFamily="34" charset="-120"/>
-              </a:rPr>
-              <a:t>ive</a:t>
-            </a:r>
-            <a:endParaRPr lang="en-US" sz="1400" dirty="0"/>
-          </a:p>
-        </p:txBody>
-      </p:sp>
-      <p:sp>
-        <p:nvSpPr>
-          <p:cNvPr id="36" name="Text 34"/>
-          <p:cNvSpPr/>
-          <p:nvPr/>
-        </p:nvSpPr>
-        <p:spPr>
-          <a:xfrm>
-            <a:off x="6784848" y="3364992"/>
-            <a:ext cx="73152" cy="475488"/>
-          </a:xfrm>
-          <a:prstGeom prst="rect">
-            <a:avLst/>
-          </a:prstGeom>
-          <a:noFill/>
-          <a:ln/>
-        </p:spPr>
-        <p:txBody>
-          <a:bodyPr wrap="square" lIns="0" tIns="0" rIns="0" bIns="0" rtlCol="0" anchor="ctr"/>
-          <a:lstStyle/>
-          <a:p>
-            <a:pPr algn="ctr" indent="0" marL="0">
-              <a:buNone/>
-            </a:pPr>
-            <a:r>
-              <a:rPr lang="en-US" sz="1600" b="1" dirty="0">
-                <a:solidFill>
-                  <a:srgbClr val="0D9488"/>
-                </a:solidFill>
-                <a:latin typeface="Trebuchet MS" pitchFamily="34" charset="0"/>
-                <a:ea typeface="Trebuchet MS" pitchFamily="34" charset="-122"/>
-                <a:cs typeface="Trebuchet MS" pitchFamily="34" charset="-120"/>
-              </a:rPr>
-              <a:t>·</a:t>
-            </a:r>
-            <a:endParaRPr lang="en-US" sz="1600" dirty="0"/>
-          </a:p>
-        </p:txBody>
-      </p:sp>
-      <p:sp>
-        <p:nvSpPr>
-          <p:cNvPr id="37" name="Shape 35"/>
-          <p:cNvSpPr/>
-          <p:nvPr/>
-        </p:nvSpPr>
-        <p:spPr>
-          <a:xfrm>
-            <a:off x="6858000" y="3364992"/>
-            <a:ext cx="1554480" cy="475488"/>
-          </a:xfrm>
-          <a:prstGeom prst="rect">
-            <a:avLst>
-              <a:gd name="adj" fmla="val 9615"/>
-            </a:avLst>
-          </a:prstGeom>
-          <a:solidFill>
-            <a:srgbClr val="FFFFFF"/>
-          </a:solidFill>
-          <a:ln w="12700">
-            <a:solidFill>
-              <a:srgbClr val="0D9488"/>
-            </a:solidFill>
-            <a:prstDash val="solid"/>
-          </a:ln>
-        </p:spPr>
-      </p:sp>
-      <p:sp>
-        <p:nvSpPr>
-          <p:cNvPr id="38" name="Text 36"/>
-          <p:cNvSpPr/>
-          <p:nvPr/>
-        </p:nvSpPr>
-        <p:spPr>
-          <a:xfrm>
-            <a:off x="6858000" y="3364992"/>
-            <a:ext cx="1554480" cy="475488"/>
-          </a:xfrm>
-          <a:prstGeom prst="rect">
-            <a:avLst/>
-          </a:prstGeom>
-          <a:noFill/>
-          <a:ln/>
-        </p:spPr>
-        <p:txBody>
-          <a:bodyPr wrap="square" lIns="0" tIns="0" rIns="0" bIns="0" rtlCol="0" anchor="ctr"/>
-          <a:lstStyle/>
-          <a:p>
-            <a:pPr algn="ctr" indent="0" marL="0">
-              <a:buNone/>
-            </a:pPr>
-            <a:r>
-              <a:rPr lang="en-US" sz="1400" b="1" dirty="0">
-                <a:solidFill>
-                  <a:srgbClr val="0D9488"/>
-                </a:solidFill>
-                <a:latin typeface="Trebuchet MS" pitchFamily="34" charset="0"/>
-                <a:ea typeface="Trebuchet MS" pitchFamily="34" charset="-122"/>
-                <a:cs typeface="Trebuchet MS" pitchFamily="34" charset="-120"/>
-              </a:rPr>
-              <a:t>ness</a:t>
-            </a:r>
-            <a:endParaRPr lang="en-US" sz="1400" dirty="0"/>
-          </a:p>
-        </p:txBody>
-      </p:sp>
-      <p:sp>
-        <p:nvSpPr>
-          <p:cNvPr id="39" name="Shape 37"/>
-          <p:cNvSpPr/>
-          <p:nvPr/>
-        </p:nvSpPr>
-        <p:spPr>
-          <a:xfrm>
-            <a:off x="365760" y="4096512"/>
-            <a:ext cx="1371600" cy="804672"/>
-          </a:xfrm>
-          <a:prstGeom prst="rect">
-            <a:avLst>
-              <a:gd name="adj" fmla="val 6818"/>
-            </a:avLst>
-          </a:prstGeom>
-          <a:solidFill>
-            <a:srgbClr val="E2E8F0"/>
-          </a:solidFill>
-          <a:ln w="12700">
-            <a:solidFill>
-              <a:srgbClr val="E2E8F0"/>
-            </a:solidFill>
-            <a:prstDash val="solid"/>
-          </a:ln>
-        </p:spPr>
-      </p:sp>
-      <p:sp>
-        <p:nvSpPr>
-          <p:cNvPr id="40" name="Text 38"/>
-          <p:cNvSpPr/>
-          <p:nvPr/>
-        </p:nvSpPr>
-        <p:spPr>
-          <a:xfrm>
-            <a:off x="365760" y="4096512"/>
-            <a:ext cx="1371600" cy="804672"/>
-          </a:xfrm>
-          <a:prstGeom prst="rect">
-            <a:avLst/>
-          </a:prstGeom>
-          <a:noFill/>
-          <a:ln/>
-        </p:spPr>
-        <p:txBody>
-          <a:bodyPr wrap="square" lIns="0" tIns="0" rIns="0" bIns="0" rtlCol="0" anchor="ctr"/>
-          <a:lstStyle/>
-          <a:p>
-            <a:pPr algn="ctr" indent="0" marL="0">
-              <a:buNone/>
-            </a:pPr>
-            <a:r>
-              <a:rPr lang="en-US" sz="1100" b="1" dirty="0">
-                <a:solidFill>
-                  <a:srgbClr val="475569"/>
-                </a:solidFill>
-                <a:latin typeface="Trebuchet MS" pitchFamily="34" charset="0"/>
-                <a:ea typeface="Trebuchet MS" pitchFamily="34" charset="-122"/>
-                <a:cs typeface="Trebuchet MS" pitchFamily="34" charset="-120"/>
-              </a:rPr>
-              <a:t>Phonemes</a:t>
-            </a:r>
-            <a:endParaRPr lang="en-US" sz="1100" dirty="0"/>
-          </a:p>
-        </p:txBody>
-      </p:sp>
-      <p:sp>
-        <p:nvSpPr>
-          <p:cNvPr id="41" name="Shape 39"/>
-          <p:cNvSpPr/>
-          <p:nvPr/>
-        </p:nvSpPr>
-        <p:spPr>
-          <a:xfrm>
-            <a:off x="1874520" y="4096512"/>
-            <a:ext cx="6903720" cy="804672"/>
-          </a:xfrm>
-          <a:prstGeom prst="rect">
-            <a:avLst>
-              <a:gd name="adj" fmla="val 6818"/>
-            </a:avLst>
-          </a:prstGeom>
-          <a:solidFill>
-            <a:srgbClr val="FCE7F3"/>
-          </a:solidFill>
-          <a:ln w="12700">
-            <a:solidFill>
-              <a:srgbClr val="DB2777"/>
-            </a:solidFill>
-            <a:prstDash val="solid"/>
-          </a:ln>
-        </p:spPr>
-      </p:sp>
-      <p:sp>
-        <p:nvSpPr>
-          <p:cNvPr id="42" name="Shape 40"/>
-          <p:cNvSpPr/>
-          <p:nvPr/>
-        </p:nvSpPr>
-        <p:spPr>
-          <a:xfrm>
-            <a:off x="1952596" y="4169664"/>
-            <a:ext cx="493776" cy="384048"/>
+              <a:t>e</a:t>
+            </a:r>
+            <a:endParaRPr lang="en-US" sz="900" dirty="0"/>
+          </a:p>
+        </p:txBody>
+      </p:sp>
+      <p:sp>
+        <p:nvSpPr>
+          <p:cNvPr id="51" name="Shape 49"/>
+          <p:cNvSpPr/>
+          <p:nvPr/>
+        </p:nvSpPr>
+        <p:spPr>
+          <a:xfrm>
+            <a:off x="7677912" y="4169664"/>
+            <a:ext cx="685800" cy="384048"/>
           </a:xfrm>
           <a:prstGeom prst="rect">
             <a:avLst>
@@ -23146,779 +23899,14 @@
       </p:sp>
       <p:sp>
         <p:nvSpPr>
-          <p:cNvPr id="43" name="Text 41"/>
-          <p:cNvSpPr/>
-          <p:nvPr/>
-        </p:nvSpPr>
-        <p:spPr>
-          <a:xfrm>
-            <a:off x="1952596" y="4169664"/>
-            <a:ext cx="493776" cy="384048"/>
-          </a:xfrm>
-          <a:prstGeom prst="rect">
-            <a:avLst/>
-          </a:prstGeom>
-          <a:noFill/>
-          <a:ln/>
-        </p:spPr>
-        <p:txBody>
-          <a:bodyPr wrap="square" lIns="0" tIns="0" rIns="0" bIns="0" rtlCol="0" anchor="ctr"/>
-          <a:lstStyle/>
-          <a:p>
-            <a:pPr algn="ctr" indent="0" marL="0">
-              <a:buNone/>
-            </a:pPr>
-            <a:r>
-              <a:rPr lang="en-US" sz="900" b="1" dirty="0">
-                <a:solidFill>
-                  <a:srgbClr val="9D174D"/>
-                </a:solidFill>
-                <a:latin typeface="Trebuchet MS" pitchFamily="34" charset="0"/>
-                <a:ea typeface="Trebuchet MS" pitchFamily="34" charset="-122"/>
-                <a:cs typeface="Trebuchet MS" pitchFamily="34" charset="-120"/>
-              </a:rPr>
-              <a:t>e</a:t>
-            </a:r>
-            <a:endParaRPr lang="en-US" sz="900" dirty="0"/>
-          </a:p>
-        </p:txBody>
-      </p:sp>
-      <p:sp>
-        <p:nvSpPr>
-          <p:cNvPr id="44" name="Shape 42"/>
-          <p:cNvSpPr/>
-          <p:nvPr/>
-        </p:nvSpPr>
-        <p:spPr>
-          <a:xfrm>
-            <a:off x="2497015" y="4169664"/>
-            <a:ext cx="493776" cy="384048"/>
-          </a:xfrm>
-          <a:prstGeom prst="rect">
-            <a:avLst>
-              <a:gd name="adj" fmla="val 9524"/>
-            </a:avLst>
-          </a:prstGeom>
-          <a:solidFill>
-            <a:srgbClr val="FFFFFF"/>
-          </a:solidFill>
-          <a:ln w="12700">
-            <a:solidFill>
-              <a:srgbClr val="DB2777"/>
-            </a:solidFill>
-            <a:prstDash val="solid"/>
-          </a:ln>
-        </p:spPr>
-      </p:sp>
-      <p:sp>
-        <p:nvSpPr>
-          <p:cNvPr id="45" name="Text 43"/>
-          <p:cNvSpPr/>
-          <p:nvPr/>
-        </p:nvSpPr>
-        <p:spPr>
-          <a:xfrm>
-            <a:off x="2497015" y="4169664"/>
-            <a:ext cx="493776" cy="384048"/>
-          </a:xfrm>
-          <a:prstGeom prst="rect">
-            <a:avLst/>
-          </a:prstGeom>
-          <a:noFill/>
-          <a:ln/>
-        </p:spPr>
-        <p:txBody>
-          <a:bodyPr wrap="square" lIns="0" tIns="0" rIns="0" bIns="0" rtlCol="0" anchor="ctr"/>
-          <a:lstStyle/>
-          <a:p>
-            <a:pPr algn="ctr" indent="0" marL="0">
-              <a:buNone/>
-            </a:pPr>
-            <a:r>
-              <a:rPr lang="en-US" sz="900" b="1" dirty="0">
-                <a:solidFill>
-                  <a:srgbClr val="9D174D"/>
-                </a:solidFill>
-                <a:latin typeface="Trebuchet MS" pitchFamily="34" charset="0"/>
-                <a:ea typeface="Trebuchet MS" pitchFamily="34" charset="-122"/>
-                <a:cs typeface="Trebuchet MS" pitchFamily="34" charset="-120"/>
-              </a:rPr>
-              <a:t>x</a:t>
-            </a:r>
-            <a:endParaRPr lang="en-US" sz="900" dirty="0"/>
-          </a:p>
-        </p:txBody>
-      </p:sp>
-      <p:sp>
-        <p:nvSpPr>
-          <p:cNvPr id="46" name="Text 44"/>
-          <p:cNvSpPr/>
-          <p:nvPr/>
-        </p:nvSpPr>
-        <p:spPr>
-          <a:xfrm>
-            <a:off x="2497015" y="4572000"/>
-            <a:ext cx="493776" cy="219456"/>
-          </a:xfrm>
-          <a:prstGeom prst="rect">
-            <a:avLst/>
-          </a:prstGeom>
-          <a:noFill/>
-          <a:ln/>
-        </p:spPr>
-        <p:txBody>
-          <a:bodyPr wrap="square" lIns="0" tIns="0" rIns="0" bIns="0" rtlCol="0" anchor="t"/>
-          <a:lstStyle/>
-          <a:p>
-            <a:pPr algn="ctr" indent="0" marL="0">
-              <a:buNone/>
-            </a:pPr>
-            <a:r>
-              <a:rPr lang="en-US" sz="750" i="1" dirty="0">
-                <a:solidFill>
-                  <a:srgbClr val="94A3B8"/>
-                </a:solidFill>
-                <a:latin typeface="Calibri" pitchFamily="34" charset="0"/>
-                <a:ea typeface="Calibri" pitchFamily="34" charset="-122"/>
-                <a:cs typeface="Calibri" pitchFamily="34" charset="-120"/>
-              </a:rPr>
-              <a:t>/ks/</a:t>
-            </a:r>
-            <a:endParaRPr lang="en-US" sz="750" dirty="0"/>
-          </a:p>
-        </p:txBody>
-      </p:sp>
-      <p:sp>
-        <p:nvSpPr>
-          <p:cNvPr id="47" name="Shape 45"/>
-          <p:cNvSpPr/>
-          <p:nvPr/>
-        </p:nvSpPr>
-        <p:spPr>
-          <a:xfrm>
-            <a:off x="3041435" y="4169664"/>
-            <a:ext cx="493776" cy="384048"/>
-          </a:xfrm>
-          <a:prstGeom prst="rect">
-            <a:avLst>
-              <a:gd name="adj" fmla="val 9524"/>
-            </a:avLst>
-          </a:prstGeom>
-          <a:solidFill>
-            <a:srgbClr val="FFFFFF"/>
-          </a:solidFill>
-          <a:ln w="12700">
-            <a:solidFill>
-              <a:srgbClr val="DB2777"/>
-            </a:solidFill>
-            <a:prstDash val="solid"/>
-          </a:ln>
-        </p:spPr>
-      </p:sp>
-      <p:sp>
-        <p:nvSpPr>
-          <p:cNvPr id="48" name="Text 46"/>
-          <p:cNvSpPr/>
-          <p:nvPr/>
-        </p:nvSpPr>
-        <p:spPr>
-          <a:xfrm>
-            <a:off x="3041435" y="4169664"/>
-            <a:ext cx="493776" cy="384048"/>
-          </a:xfrm>
-          <a:prstGeom prst="rect">
-            <a:avLst/>
-          </a:prstGeom>
-          <a:noFill/>
-          <a:ln/>
-        </p:spPr>
-        <p:txBody>
-          <a:bodyPr wrap="square" lIns="0" tIns="0" rIns="0" bIns="0" rtlCol="0" anchor="ctr"/>
-          <a:lstStyle/>
-          <a:p>
-            <a:pPr algn="ctr" indent="0" marL="0">
-              <a:buNone/>
-            </a:pPr>
-            <a:r>
-              <a:rPr lang="en-US" sz="900" b="1" dirty="0">
-                <a:solidFill>
-                  <a:srgbClr val="9D174D"/>
-                </a:solidFill>
-                <a:latin typeface="Trebuchet MS" pitchFamily="34" charset="0"/>
-                <a:ea typeface="Trebuchet MS" pitchFamily="34" charset="-122"/>
-                <a:cs typeface="Trebuchet MS" pitchFamily="34" charset="-120"/>
-              </a:rPr>
-              <a:t>p</a:t>
-            </a:r>
-            <a:endParaRPr lang="en-US" sz="900" dirty="0"/>
-          </a:p>
-        </p:txBody>
-      </p:sp>
-      <p:sp>
-        <p:nvSpPr>
-          <p:cNvPr id="49" name="Shape 47"/>
-          <p:cNvSpPr/>
-          <p:nvPr/>
-        </p:nvSpPr>
-        <p:spPr>
-          <a:xfrm>
-            <a:off x="3585855" y="4169664"/>
-            <a:ext cx="493776" cy="384048"/>
-          </a:xfrm>
-          <a:prstGeom prst="rect">
-            <a:avLst>
-              <a:gd name="adj" fmla="val 9524"/>
-            </a:avLst>
-          </a:prstGeom>
-          <a:solidFill>
-            <a:srgbClr val="FFFFFF"/>
-          </a:solidFill>
-          <a:ln w="12700">
-            <a:solidFill>
-              <a:srgbClr val="DB2777"/>
-            </a:solidFill>
-            <a:prstDash val="solid"/>
-          </a:ln>
-        </p:spPr>
-      </p:sp>
-      <p:sp>
-        <p:nvSpPr>
-          <p:cNvPr id="50" name="Text 48"/>
-          <p:cNvSpPr/>
-          <p:nvPr/>
-        </p:nvSpPr>
-        <p:spPr>
-          <a:xfrm>
-            <a:off x="3585855" y="4169664"/>
-            <a:ext cx="493776" cy="384048"/>
-          </a:xfrm>
-          <a:prstGeom prst="rect">
-            <a:avLst/>
-          </a:prstGeom>
-          <a:noFill/>
-          <a:ln/>
-        </p:spPr>
-        <p:txBody>
-          <a:bodyPr wrap="square" lIns="0" tIns="0" rIns="0" bIns="0" rtlCol="0" anchor="ctr"/>
-          <a:lstStyle/>
-          <a:p>
-            <a:pPr algn="ctr" indent="0" marL="0">
-              <a:buNone/>
-            </a:pPr>
-            <a:r>
-              <a:rPr lang="en-US" sz="900" b="1" dirty="0">
-                <a:solidFill>
-                  <a:srgbClr val="9D174D"/>
-                </a:solidFill>
-                <a:latin typeface="Trebuchet MS" pitchFamily="34" charset="0"/>
-                <a:ea typeface="Trebuchet MS" pitchFamily="34" charset="-122"/>
-                <a:cs typeface="Trebuchet MS" pitchFamily="34" charset="-120"/>
-              </a:rPr>
-              <a:t>r</a:t>
-            </a:r>
-            <a:endParaRPr lang="en-US" sz="900" dirty="0"/>
-          </a:p>
-        </p:txBody>
-      </p:sp>
-      <p:sp>
-        <p:nvSpPr>
-          <p:cNvPr id="51" name="Shape 49"/>
-          <p:cNvSpPr/>
-          <p:nvPr/>
-        </p:nvSpPr>
-        <p:spPr>
-          <a:xfrm>
-            <a:off x="4130274" y="4169664"/>
-            <a:ext cx="493776" cy="384048"/>
-          </a:xfrm>
-          <a:prstGeom prst="rect">
-            <a:avLst>
-              <a:gd name="adj" fmla="val 9524"/>
-            </a:avLst>
-          </a:prstGeom>
-          <a:solidFill>
-            <a:srgbClr val="FFFFFF"/>
-          </a:solidFill>
-          <a:ln w="12700">
-            <a:solidFill>
-              <a:srgbClr val="DB2777"/>
-            </a:solidFill>
-            <a:prstDash val="solid"/>
-          </a:ln>
-        </p:spPr>
-      </p:sp>
-      <p:sp>
-        <p:nvSpPr>
           <p:cNvPr id="52" name="Text 50"/>
           <p:cNvSpPr/>
           <p:nvPr/>
         </p:nvSpPr>
         <p:spPr>
           <a:xfrm>
-            <a:off x="4130274" y="4169664"/>
-            <a:ext cx="493776" cy="384048"/>
-          </a:xfrm>
-          <a:prstGeom prst="rect">
-            <a:avLst/>
-          </a:prstGeom>
-          <a:noFill/>
-          <a:ln/>
-        </p:spPr>
-        <p:txBody>
-          <a:bodyPr wrap="square" lIns="0" tIns="0" rIns="0" bIns="0" rtlCol="0" anchor="ctr"/>
-          <a:lstStyle/>
-          <a:p>
-            <a:pPr algn="ctr" indent="0" marL="0">
-              <a:buNone/>
-            </a:pPr>
-            <a:r>
-              <a:rPr lang="en-US" sz="900" b="1" dirty="0">
-                <a:solidFill>
-                  <a:srgbClr val="9D174D"/>
-                </a:solidFill>
-                <a:latin typeface="Trebuchet MS" pitchFamily="34" charset="0"/>
-                <a:ea typeface="Trebuchet MS" pitchFamily="34" charset="-122"/>
-                <a:cs typeface="Trebuchet MS" pitchFamily="34" charset="-120"/>
-              </a:rPr>
-              <a:t>e</a:t>
-            </a:r>
-            <a:endParaRPr lang="en-US" sz="900" dirty="0"/>
-          </a:p>
-        </p:txBody>
-      </p:sp>
-      <p:sp>
-        <p:nvSpPr>
-          <p:cNvPr id="53" name="Shape 51"/>
-          <p:cNvSpPr/>
-          <p:nvPr/>
-        </p:nvSpPr>
-        <p:spPr>
-          <a:xfrm>
-            <a:off x="4674694" y="4169664"/>
-            <a:ext cx="493776" cy="384048"/>
-          </a:xfrm>
-          <a:prstGeom prst="rect">
-            <a:avLst>
-              <a:gd name="adj" fmla="val 9524"/>
-            </a:avLst>
-          </a:prstGeom>
-          <a:solidFill>
-            <a:srgbClr val="FFFFFF"/>
-          </a:solidFill>
-          <a:ln w="12700">
-            <a:solidFill>
-              <a:srgbClr val="DB2777"/>
-            </a:solidFill>
-            <a:prstDash val="solid"/>
-          </a:ln>
-        </p:spPr>
-      </p:sp>
-      <p:sp>
-        <p:nvSpPr>
-          <p:cNvPr id="54" name="Text 52"/>
-          <p:cNvSpPr/>
-          <p:nvPr/>
-        </p:nvSpPr>
-        <p:spPr>
-          <a:xfrm>
-            <a:off x="4674694" y="4169664"/>
-            <a:ext cx="493776" cy="384048"/>
-          </a:xfrm>
-          <a:prstGeom prst="rect">
-            <a:avLst/>
-          </a:prstGeom>
-          <a:noFill/>
-          <a:ln/>
-        </p:spPr>
-        <p:txBody>
-          <a:bodyPr wrap="square" lIns="0" tIns="0" rIns="0" bIns="0" rtlCol="0" anchor="ctr"/>
-          <a:lstStyle/>
-          <a:p>
-            <a:pPr algn="ctr" indent="0" marL="0">
-              <a:buNone/>
-            </a:pPr>
-            <a:r>
-              <a:rPr lang="en-US" sz="900" b="1" dirty="0">
-                <a:solidFill>
-                  <a:srgbClr val="9D174D"/>
-                </a:solidFill>
-                <a:latin typeface="Trebuchet MS" pitchFamily="34" charset="0"/>
-                <a:ea typeface="Trebuchet MS" pitchFamily="34" charset="-122"/>
-                <a:cs typeface="Trebuchet MS" pitchFamily="34" charset="-120"/>
-              </a:rPr>
-              <a:t>ss</a:t>
-            </a:r>
-            <a:endParaRPr lang="en-US" sz="900" dirty="0"/>
-          </a:p>
-        </p:txBody>
-      </p:sp>
-      <p:sp>
-        <p:nvSpPr>
-          <p:cNvPr id="55" name="Shape 53"/>
-          <p:cNvSpPr/>
-          <p:nvPr/>
-        </p:nvSpPr>
-        <p:spPr>
-          <a:xfrm>
-            <a:off x="5219114" y="4169664"/>
-            <a:ext cx="493776" cy="384048"/>
-          </a:xfrm>
-          <a:prstGeom prst="rect">
-            <a:avLst>
-              <a:gd name="adj" fmla="val 9524"/>
-            </a:avLst>
-          </a:prstGeom>
-          <a:solidFill>
-            <a:srgbClr val="FFFFFF"/>
-          </a:solidFill>
-          <a:ln w="12700">
-            <a:solidFill>
-              <a:srgbClr val="DB2777"/>
-            </a:solidFill>
-            <a:prstDash val="solid"/>
-          </a:ln>
-        </p:spPr>
-      </p:sp>
-      <p:sp>
-        <p:nvSpPr>
-          <p:cNvPr id="56" name="Text 54"/>
-          <p:cNvSpPr/>
-          <p:nvPr/>
-        </p:nvSpPr>
-        <p:spPr>
-          <a:xfrm>
-            <a:off x="5219114" y="4169664"/>
-            <a:ext cx="493776" cy="384048"/>
-          </a:xfrm>
-          <a:prstGeom prst="rect">
-            <a:avLst/>
-          </a:prstGeom>
-          <a:noFill/>
-          <a:ln/>
-        </p:spPr>
-        <p:txBody>
-          <a:bodyPr wrap="square" lIns="0" tIns="0" rIns="0" bIns="0" rtlCol="0" anchor="ctr"/>
-          <a:lstStyle/>
-          <a:p>
-            <a:pPr algn="ctr" indent="0" marL="0">
-              <a:buNone/>
-            </a:pPr>
-            <a:r>
-              <a:rPr lang="en-US" sz="900" b="1" dirty="0">
-                <a:solidFill>
-                  <a:srgbClr val="9D174D"/>
-                </a:solidFill>
-                <a:latin typeface="Trebuchet MS" pitchFamily="34" charset="0"/>
-                <a:ea typeface="Trebuchet MS" pitchFamily="34" charset="-122"/>
-                <a:cs typeface="Trebuchet MS" pitchFamily="34" charset="-120"/>
-              </a:rPr>
-              <a:t>i</a:t>
-            </a:r>
-            <a:endParaRPr lang="en-US" sz="900" dirty="0"/>
-          </a:p>
-        </p:txBody>
-      </p:sp>
-      <p:sp>
-        <p:nvSpPr>
-          <p:cNvPr id="57" name="Shape 55"/>
-          <p:cNvSpPr/>
-          <p:nvPr/>
-        </p:nvSpPr>
-        <p:spPr>
-          <a:xfrm>
-            <a:off x="5763534" y="4169664"/>
-            <a:ext cx="493776" cy="384048"/>
-          </a:xfrm>
-          <a:prstGeom prst="rect">
-            <a:avLst>
-              <a:gd name="adj" fmla="val 9524"/>
-            </a:avLst>
-          </a:prstGeom>
-          <a:solidFill>
-            <a:srgbClr val="FFFFFF"/>
-          </a:solidFill>
-          <a:ln w="12700">
-            <a:solidFill>
-              <a:srgbClr val="DB2777"/>
-            </a:solidFill>
-            <a:prstDash val="solid"/>
-          </a:ln>
-        </p:spPr>
-      </p:sp>
-      <p:sp>
-        <p:nvSpPr>
-          <p:cNvPr id="58" name="Text 56"/>
-          <p:cNvSpPr/>
-          <p:nvPr/>
-        </p:nvSpPr>
-        <p:spPr>
-          <a:xfrm>
-            <a:off x="5763534" y="4169664"/>
-            <a:ext cx="493776" cy="384048"/>
-          </a:xfrm>
-          <a:prstGeom prst="rect">
-            <a:avLst/>
-          </a:prstGeom>
-          <a:noFill/>
-          <a:ln/>
-        </p:spPr>
-        <p:txBody>
-          <a:bodyPr wrap="square" lIns="0" tIns="0" rIns="0" bIns="0" rtlCol="0" anchor="ctr"/>
-          <a:lstStyle/>
-          <a:p>
-            <a:pPr algn="ctr" indent="0" marL="0">
-              <a:buNone/>
-            </a:pPr>
-            <a:r>
-              <a:rPr lang="en-US" sz="900" b="1" dirty="0">
-                <a:solidFill>
-                  <a:srgbClr val="9D174D"/>
-                </a:solidFill>
-                <a:latin typeface="Trebuchet MS" pitchFamily="34" charset="0"/>
-                <a:ea typeface="Trebuchet MS" pitchFamily="34" charset="-122"/>
-                <a:cs typeface="Trebuchet MS" pitchFamily="34" charset="-120"/>
-              </a:rPr>
-              <a:t>v</a:t>
-            </a:r>
-            <a:endParaRPr lang="en-US" sz="900" dirty="0"/>
-          </a:p>
-        </p:txBody>
-      </p:sp>
-      <p:sp>
-        <p:nvSpPr>
-          <p:cNvPr id="59" name="Shape 57"/>
-          <p:cNvSpPr/>
-          <p:nvPr/>
-        </p:nvSpPr>
-        <p:spPr>
-          <a:xfrm>
-            <a:off x="6307953" y="4169664"/>
-            <a:ext cx="493776" cy="384048"/>
-          </a:xfrm>
-          <a:prstGeom prst="rect">
-            <a:avLst>
-              <a:gd name="adj" fmla="val 9524"/>
-            </a:avLst>
-          </a:prstGeom>
-          <a:solidFill>
-            <a:srgbClr val="FFFFFF"/>
-          </a:solidFill>
-          <a:ln w="12700">
-            <a:solidFill>
-              <a:srgbClr val="DB2777"/>
-            </a:solidFill>
-            <a:prstDash val="solid"/>
-          </a:ln>
-        </p:spPr>
-      </p:sp>
-      <p:sp>
-        <p:nvSpPr>
-          <p:cNvPr id="60" name="Text 58"/>
-          <p:cNvSpPr/>
-          <p:nvPr/>
-        </p:nvSpPr>
-        <p:spPr>
-          <a:xfrm>
-            <a:off x="6307953" y="4169664"/>
-            <a:ext cx="493776" cy="384048"/>
-          </a:xfrm>
-          <a:prstGeom prst="rect">
-            <a:avLst/>
-          </a:prstGeom>
-          <a:noFill/>
-          <a:ln/>
-        </p:spPr>
-        <p:txBody>
-          <a:bodyPr wrap="square" lIns="0" tIns="0" rIns="0" bIns="0" rtlCol="0" anchor="ctr"/>
-          <a:lstStyle/>
-          <a:p>
-            <a:pPr algn="ctr" indent="0" marL="0">
-              <a:buNone/>
-            </a:pPr>
-            <a:r>
-              <a:rPr lang="en-US" sz="900" b="1" dirty="0">
-                <a:solidFill>
-                  <a:srgbClr val="9D174D"/>
-                </a:solidFill>
-                <a:latin typeface="Trebuchet MS" pitchFamily="34" charset="0"/>
-                <a:ea typeface="Trebuchet MS" pitchFamily="34" charset="-122"/>
-                <a:cs typeface="Trebuchet MS" pitchFamily="34" charset="-120"/>
-              </a:rPr>
-              <a:t>e</a:t>
-            </a:r>
-            <a:endParaRPr lang="en-US" sz="900" dirty="0"/>
-          </a:p>
-        </p:txBody>
-      </p:sp>
-      <p:sp>
-        <p:nvSpPr>
-          <p:cNvPr id="61" name="Shape 59"/>
-          <p:cNvSpPr/>
-          <p:nvPr/>
-        </p:nvSpPr>
-        <p:spPr>
-          <a:xfrm>
-            <a:off x="6852373" y="4169664"/>
-            <a:ext cx="493776" cy="384048"/>
-          </a:xfrm>
-          <a:prstGeom prst="rect">
-            <a:avLst>
-              <a:gd name="adj" fmla="val 9524"/>
-            </a:avLst>
-          </a:prstGeom>
-          <a:solidFill>
-            <a:srgbClr val="FFFFFF"/>
-          </a:solidFill>
-          <a:ln w="12700">
-            <a:solidFill>
-              <a:srgbClr val="DB2777"/>
-            </a:solidFill>
-            <a:prstDash val="solid"/>
-          </a:ln>
-        </p:spPr>
-      </p:sp>
-      <p:sp>
-        <p:nvSpPr>
-          <p:cNvPr id="62" name="Text 60"/>
-          <p:cNvSpPr/>
-          <p:nvPr/>
-        </p:nvSpPr>
-        <p:spPr>
-          <a:xfrm>
-            <a:off x="6852373" y="4169664"/>
-            <a:ext cx="493776" cy="384048"/>
-          </a:xfrm>
-          <a:prstGeom prst="rect">
-            <a:avLst/>
-          </a:prstGeom>
-          <a:noFill/>
-          <a:ln/>
-        </p:spPr>
-        <p:txBody>
-          <a:bodyPr wrap="square" lIns="0" tIns="0" rIns="0" bIns="0" rtlCol="0" anchor="ctr"/>
-          <a:lstStyle/>
-          <a:p>
-            <a:pPr algn="ctr" indent="0" marL="0">
-              <a:buNone/>
-            </a:pPr>
-            <a:r>
-              <a:rPr lang="en-US" sz="900" b="1" dirty="0">
-                <a:solidFill>
-                  <a:srgbClr val="9D174D"/>
-                </a:solidFill>
-                <a:latin typeface="Trebuchet MS" pitchFamily="34" charset="0"/>
-                <a:ea typeface="Trebuchet MS" pitchFamily="34" charset="-122"/>
-                <a:cs typeface="Trebuchet MS" pitchFamily="34" charset="-120"/>
-              </a:rPr>
-              <a:t>n</a:t>
-            </a:r>
-            <a:endParaRPr lang="en-US" sz="900" dirty="0"/>
-          </a:p>
-        </p:txBody>
-      </p:sp>
-      <p:sp>
-        <p:nvSpPr>
-          <p:cNvPr id="63" name="Shape 61"/>
-          <p:cNvSpPr/>
-          <p:nvPr/>
-        </p:nvSpPr>
-        <p:spPr>
-          <a:xfrm>
-            <a:off x="7396793" y="4169664"/>
-            <a:ext cx="493776" cy="384048"/>
-          </a:xfrm>
-          <a:prstGeom prst="rect">
-            <a:avLst>
-              <a:gd name="adj" fmla="val 9524"/>
-            </a:avLst>
-          </a:prstGeom>
-          <a:solidFill>
-            <a:srgbClr val="FFFFFF"/>
-          </a:solidFill>
-          <a:ln w="12700">
-            <a:solidFill>
-              <a:srgbClr val="DB2777"/>
-            </a:solidFill>
-            <a:prstDash val="solid"/>
-          </a:ln>
-        </p:spPr>
-      </p:sp>
-      <p:sp>
-        <p:nvSpPr>
-          <p:cNvPr id="64" name="Text 62"/>
-          <p:cNvSpPr/>
-          <p:nvPr/>
-        </p:nvSpPr>
-        <p:spPr>
-          <a:xfrm>
-            <a:off x="7396793" y="4169664"/>
-            <a:ext cx="493776" cy="384048"/>
-          </a:xfrm>
-          <a:prstGeom prst="rect">
-            <a:avLst/>
-          </a:prstGeom>
-          <a:noFill/>
-          <a:ln/>
-        </p:spPr>
-        <p:txBody>
-          <a:bodyPr wrap="square" lIns="0" tIns="0" rIns="0" bIns="0" rtlCol="0" anchor="ctr"/>
-          <a:lstStyle/>
-          <a:p>
-            <a:pPr algn="ctr" indent="0" marL="0">
-              <a:buNone/>
-            </a:pPr>
-            <a:r>
-              <a:rPr lang="en-US" sz="900" b="1" dirty="0">
-                <a:solidFill>
-                  <a:srgbClr val="9D174D"/>
-                </a:solidFill>
-                <a:latin typeface="Trebuchet MS" pitchFamily="34" charset="0"/>
-                <a:ea typeface="Trebuchet MS" pitchFamily="34" charset="-122"/>
-                <a:cs typeface="Trebuchet MS" pitchFamily="34" charset="-120"/>
-              </a:rPr>
-              <a:t>e</a:t>
-            </a:r>
-            <a:endParaRPr lang="en-US" sz="900" dirty="0"/>
-          </a:p>
-        </p:txBody>
-      </p:sp>
-      <p:sp>
-        <p:nvSpPr>
-          <p:cNvPr id="65" name="Shape 63"/>
-          <p:cNvSpPr/>
-          <p:nvPr/>
-        </p:nvSpPr>
-        <p:spPr>
-          <a:xfrm>
-            <a:off x="7941212" y="4169664"/>
-            <a:ext cx="493776" cy="384048"/>
-          </a:xfrm>
-          <a:prstGeom prst="rect">
-            <a:avLst>
-              <a:gd name="adj" fmla="val 9524"/>
-            </a:avLst>
-          </a:prstGeom>
-          <a:solidFill>
-            <a:srgbClr val="FFFFFF"/>
-          </a:solidFill>
-          <a:ln w="12700">
-            <a:solidFill>
-              <a:srgbClr val="DB2777"/>
-            </a:solidFill>
-            <a:prstDash val="solid"/>
-          </a:ln>
-        </p:spPr>
-      </p:sp>
-      <p:sp>
-        <p:nvSpPr>
-          <p:cNvPr id="66" name="Text 64"/>
-          <p:cNvSpPr/>
-          <p:nvPr/>
-        </p:nvSpPr>
-        <p:spPr>
-          <a:xfrm>
-            <a:off x="7941212" y="4169664"/>
-            <a:ext cx="493776" cy="384048"/>
+            <a:off x="7677912" y="4169664"/>
+            <a:ext cx="685800" cy="384048"/>
           </a:xfrm>
           <a:prstGeom prst="rect">
             <a:avLst/>
@@ -24234,7 +24222,7 @@
                 <a:ea typeface="Calibri" pitchFamily="34" charset="-122"/>
                 <a:cs typeface="Calibri" pitchFamily="34" charset="-120"/>
               </a:rPr>
-              <a:t>Word Labs  •  wordlabs.app  •  Root: 'express' = to push or press out</a:t>
+              <a:t>Word Labs  •  wordlabs.app  •  Root: 'express' = to push or squeeze out</a:t>
             </a:r>
             <a:endParaRPr lang="en-US" sz="800" dirty="0"/>
           </a:p>
@@ -24373,7 +24361,7 @@
                 <a:ea typeface="Trebuchet MS" pitchFamily="34" charset="-122"/>
                 <a:cs typeface="Trebuchet MS" pitchFamily="34" charset="-120"/>
               </a:rPr>
-              <a:t>inexpressible</a:t>
+              <a:t>expressiveness</a:t>
             </a:r>
             <a:endParaRPr lang="en-US" sz="2800" dirty="0"/>
           </a:p>
@@ -25061,7 +25049,7 @@
                 <a:ea typeface="Calibri" pitchFamily="34" charset="-122"/>
                 <a:cs typeface="Calibri" pitchFamily="34" charset="-120"/>
               </a:rPr>
-              <a:t>Word Labs  •  wordlabs.app  •  Root: 'express' = to push or press out</a:t>
+              <a:t>Word Labs  •  wordlabs.app  •  Root: 'express' = to push or squeeze out</a:t>
             </a:r>
             <a:endParaRPr lang="en-US" sz="800" dirty="0"/>
           </a:p>
@@ -25200,7 +25188,7 @@
                 <a:ea typeface="Trebuchet MS" pitchFamily="34" charset="-122"/>
                 <a:cs typeface="Trebuchet MS" pitchFamily="34" charset="-120"/>
               </a:rPr>
-              <a:t>inexpressible</a:t>
+              <a:t>expressiveness</a:t>
             </a:r>
             <a:endParaRPr lang="en-US" sz="2800" dirty="0"/>
           </a:p>
@@ -25289,11 +25277,11 @@
             </a:avLst>
           </a:prstGeom>
           <a:solidFill>
-            <a:srgbClr val="DDD6FE"/>
+            <a:srgbClr val="CCFBF1"/>
           </a:solidFill>
           <a:ln w="19050">
             <a:solidFill>
-              <a:srgbClr val="7C3AED"/>
+              <a:srgbClr val="0D9488"/>
             </a:solidFill>
             <a:prstDash val="solid"/>
           </a:ln>
@@ -25333,13 +25321,13 @@
             <a:r>
               <a:rPr lang="en-US" sz="1300" b="1" dirty="0">
                 <a:solidFill>
-                  <a:srgbClr val="4C1D95"/>
+                  <a:srgbClr val="0F766E"/>
                 </a:solidFill>
                 <a:latin typeface="Trebuchet MS" pitchFamily="34" charset="0"/>
                 <a:ea typeface="Trebuchet MS" pitchFamily="34" charset="-122"/>
                 <a:cs typeface="Trebuchet MS" pitchFamily="34" charset="-120"/>
               </a:rPr>
-              <a:t>in</a:t>
+              <a:t>express</a:t>
             </a:r>
             <a:endParaRPr lang="en-US" sz="1300" dirty="0"/>
           </a:p>
@@ -25378,7 +25366,7 @@
                 <a:ea typeface="Calibri" pitchFamily="34" charset="-122"/>
                 <a:cs typeface="Calibri" pitchFamily="34" charset="-120"/>
               </a:rPr>
-              <a:t>not</a:t>
+              <a:t>to push or squeeze out</a:t>
             </a:r>
             <a:endParaRPr lang="en-US" sz="850" dirty="0"/>
           </a:p>
@@ -25401,11 +25389,11 @@
             </a:avLst>
           </a:prstGeom>
           <a:solidFill>
-            <a:srgbClr val="CCFBF1"/>
+            <a:srgbClr val="FCE7F3"/>
           </a:solidFill>
           <a:ln w="19050">
             <a:solidFill>
-              <a:srgbClr val="0D9488"/>
+              <a:srgbClr val="DB2777"/>
             </a:solidFill>
             <a:prstDash val="solid"/>
           </a:ln>
@@ -25445,13 +25433,13 @@
             <a:r>
               <a:rPr lang="en-US" sz="1300" b="1" dirty="0">
                 <a:solidFill>
-                  <a:srgbClr val="0F766E"/>
+                  <a:srgbClr val="9D174D"/>
                 </a:solidFill>
                 <a:latin typeface="Trebuchet MS" pitchFamily="34" charset="0"/>
                 <a:ea typeface="Trebuchet MS" pitchFamily="34" charset="-122"/>
                 <a:cs typeface="Trebuchet MS" pitchFamily="34" charset="-120"/>
               </a:rPr>
-              <a:t>express</a:t>
+              <a:t>ive</a:t>
             </a:r>
             <a:endParaRPr lang="en-US" sz="1300" dirty="0"/>
           </a:p>
@@ -25490,7 +25478,7 @@
                 <a:ea typeface="Calibri" pitchFamily="34" charset="-122"/>
                 <a:cs typeface="Calibri" pitchFamily="34" charset="-120"/>
               </a:rPr>
-              <a:t>to push or press out</a:t>
+              <a:t>having the quality of</a:t>
             </a:r>
             <a:endParaRPr lang="en-US" sz="850" dirty="0"/>
           </a:p>
@@ -25563,7 +25551,7 @@
                 <a:ea typeface="Trebuchet MS" pitchFamily="34" charset="-122"/>
                 <a:cs typeface="Trebuchet MS" pitchFamily="34" charset="-120"/>
               </a:rPr>
-              <a:t>ible</a:t>
+              <a:t>ness</a:t>
             </a:r>
             <a:endParaRPr lang="en-US" sz="1300" dirty="0"/>
           </a:p>
@@ -25602,7 +25590,7 @@
                 <a:ea typeface="Calibri" pitchFamily="34" charset="-122"/>
                 <a:cs typeface="Calibri" pitchFamily="34" charset="-120"/>
               </a:rPr>
-              <a:t>able to be</a:t>
+              <a:t>the state or quality of</a:t>
             </a:r>
             <a:endParaRPr lang="en-US" sz="850" dirty="0"/>
           </a:p>
@@ -26158,7 +26146,7 @@
                 <a:ea typeface="Calibri" pitchFamily="34" charset="-122"/>
                 <a:cs typeface="Calibri" pitchFamily="34" charset="-120"/>
               </a:rPr>
-              <a:t>Word Labs  •  wordlabs.app  •  Root: 'express' = to push or press out</a:t>
+              <a:t>Word Labs  •  wordlabs.app  •  Root: 'express' = to push or squeeze out</a:t>
             </a:r>
             <a:endParaRPr lang="en-US" sz="800" dirty="0"/>
           </a:p>
@@ -26231,7 +26219,7 @@
                 <a:ea typeface="Trebuchet MS" pitchFamily="34" charset="-122"/>
                 <a:cs typeface="Trebuchet MS" pitchFamily="34" charset="-120"/>
               </a:rPr>
-              <a:t>We are learning that the root 'express' means 'to push or press out'.</a:t>
+              <a:t>We are learning that the root 'express' means 'to push or squeeze out'.</a:t>
             </a:r>
             <a:endParaRPr lang="en-US" sz="2000" dirty="0"/>
           </a:p>
@@ -26877,7 +26865,7 @@
                 <a:ea typeface="Calibri" pitchFamily="34" charset="-122"/>
                 <a:cs typeface="Calibri" pitchFamily="34" charset="-120"/>
               </a:rPr>
-              <a:t>Word Labs  •  wordlabs.app  •  Root: 'express' = to push or press out</a:t>
+              <a:t>Word Labs  •  wordlabs.app  •  Root: 'express' = to push or squeeze out</a:t>
             </a:r>
             <a:endParaRPr lang="en-US" sz="800" dirty="0"/>
           </a:p>
@@ -27016,7 +27004,7 @@
                 <a:ea typeface="Trebuchet MS" pitchFamily="34" charset="-122"/>
                 <a:cs typeface="Trebuchet MS" pitchFamily="34" charset="-120"/>
               </a:rPr>
-              <a:t>inexpressible</a:t>
+              <a:t>expressiveness</a:t>
             </a:r>
             <a:endParaRPr lang="en-US" sz="2800" dirty="0"/>
           </a:p>
@@ -27105,11 +27093,11 @@
             </a:avLst>
           </a:prstGeom>
           <a:solidFill>
-            <a:srgbClr val="DDD6FE"/>
+            <a:srgbClr val="CCFBF1"/>
           </a:solidFill>
           <a:ln w="19050">
             <a:solidFill>
-              <a:srgbClr val="7C3AED"/>
+              <a:srgbClr val="0D9488"/>
             </a:solidFill>
             <a:prstDash val="solid"/>
           </a:ln>
@@ -27149,13 +27137,13 @@
             <a:r>
               <a:rPr lang="en-US" sz="1300" b="1" dirty="0">
                 <a:solidFill>
-                  <a:srgbClr val="4C1D95"/>
+                  <a:srgbClr val="0F766E"/>
                 </a:solidFill>
                 <a:latin typeface="Trebuchet MS" pitchFamily="34" charset="0"/>
                 <a:ea typeface="Trebuchet MS" pitchFamily="34" charset="-122"/>
                 <a:cs typeface="Trebuchet MS" pitchFamily="34" charset="-120"/>
               </a:rPr>
-              <a:t>in</a:t>
+              <a:t>express</a:t>
             </a:r>
             <a:endParaRPr lang="en-US" sz="1300" dirty="0"/>
           </a:p>
@@ -27194,7 +27182,7 @@
                 <a:ea typeface="Calibri" pitchFamily="34" charset="-122"/>
                 <a:cs typeface="Calibri" pitchFamily="34" charset="-120"/>
               </a:rPr>
-              <a:t>not</a:t>
+              <a:t>to push or squeeze out</a:t>
             </a:r>
             <a:endParaRPr lang="en-US" sz="850" dirty="0"/>
           </a:p>
@@ -27217,11 +27205,11 @@
             </a:avLst>
           </a:prstGeom>
           <a:solidFill>
-            <a:srgbClr val="CCFBF1"/>
+            <a:srgbClr val="FCE7F3"/>
           </a:solidFill>
           <a:ln w="19050">
             <a:solidFill>
-              <a:srgbClr val="0D9488"/>
+              <a:srgbClr val="DB2777"/>
             </a:solidFill>
             <a:prstDash val="solid"/>
           </a:ln>
@@ -27261,13 +27249,13 @@
             <a:r>
               <a:rPr lang="en-US" sz="1300" b="1" dirty="0">
                 <a:solidFill>
-                  <a:srgbClr val="0F766E"/>
+                  <a:srgbClr val="9D174D"/>
                 </a:solidFill>
                 <a:latin typeface="Trebuchet MS" pitchFamily="34" charset="0"/>
                 <a:ea typeface="Trebuchet MS" pitchFamily="34" charset="-122"/>
                 <a:cs typeface="Trebuchet MS" pitchFamily="34" charset="-120"/>
               </a:rPr>
-              <a:t>express</a:t>
+              <a:t>ive</a:t>
             </a:r>
             <a:endParaRPr lang="en-US" sz="1300" dirty="0"/>
           </a:p>
@@ -27306,7 +27294,7 @@
                 <a:ea typeface="Calibri" pitchFamily="34" charset="-122"/>
                 <a:cs typeface="Calibri" pitchFamily="34" charset="-120"/>
               </a:rPr>
-              <a:t>to push or press out</a:t>
+              <a:t>having the quality of</a:t>
             </a:r>
             <a:endParaRPr lang="en-US" sz="850" dirty="0"/>
           </a:p>
@@ -27379,7 +27367,7 @@
                 <a:ea typeface="Trebuchet MS" pitchFamily="34" charset="-122"/>
                 <a:cs typeface="Trebuchet MS" pitchFamily="34" charset="-120"/>
               </a:rPr>
-              <a:t>ible</a:t>
+              <a:t>ness</a:t>
             </a:r>
             <a:endParaRPr lang="en-US" sz="1300" dirty="0"/>
           </a:p>
@@ -27418,7 +27406,7 @@
                 <a:ea typeface="Calibri" pitchFamily="34" charset="-122"/>
                 <a:cs typeface="Calibri" pitchFamily="34" charset="-120"/>
               </a:rPr>
-              <a:t>able to be</a:t>
+              <a:t>the state or quality of</a:t>
             </a:r>
             <a:endParaRPr lang="en-US" sz="850" dirty="0"/>
           </a:p>
@@ -27525,8 +27513,8 @@
         </p:nvSpPr>
         <p:spPr>
           <a:xfrm>
-            <a:off x="1978152" y="3364992"/>
-            <a:ext cx="1225296" cy="475488"/>
+            <a:off x="1975104" y="3364992"/>
+            <a:ext cx="1554480" cy="475488"/>
           </a:xfrm>
           <a:prstGeom prst="rect">
             <a:avLst>
@@ -27552,8 +27540,8 @@
         </p:nvSpPr>
         <p:spPr>
           <a:xfrm>
-            <a:off x="1978152" y="3364992"/>
-            <a:ext cx="1225296" cy="475488"/>
+            <a:off x="1975104" y="3364992"/>
+            <a:ext cx="1554480" cy="475488"/>
           </a:xfrm>
           <a:prstGeom prst="rect">
             <a:avLst/>
@@ -27577,7 +27565,7 @@
                 <a:ea typeface="Trebuchet MS" pitchFamily="34" charset="-122"/>
                 <a:cs typeface="Trebuchet MS" pitchFamily="34" charset="-120"/>
               </a:rPr>
-              <a:t>in</a:t>
+              <a:t>ex</a:t>
             </a:r>
             <a:endParaRPr lang="en-US" sz="1400" dirty="0"/>
           </a:p>
@@ -27591,8 +27579,8 @@
         </p:nvSpPr>
         <p:spPr>
           <a:xfrm>
-            <a:off x="3203448" y="3364992"/>
-            <a:ext cx="76200" cy="475488"/>
+            <a:off x="3529584" y="3364992"/>
+            <a:ext cx="73152" cy="475488"/>
           </a:xfrm>
           <a:prstGeom prst="rect">
             <a:avLst/>
@@ -27630,8 +27618,8 @@
         </p:nvSpPr>
         <p:spPr>
           <a:xfrm>
-            <a:off x="3279648" y="3364992"/>
-            <a:ext cx="1225296" cy="475488"/>
+            <a:off x="3602736" y="3364992"/>
+            <a:ext cx="1554480" cy="475488"/>
           </a:xfrm>
           <a:prstGeom prst="rect">
             <a:avLst>
@@ -27657,8 +27645,8 @@
         </p:nvSpPr>
         <p:spPr>
           <a:xfrm>
-            <a:off x="3279648" y="3364992"/>
-            <a:ext cx="1225296" cy="475488"/>
+            <a:off x="3602736" y="3364992"/>
+            <a:ext cx="1554480" cy="475488"/>
           </a:xfrm>
           <a:prstGeom prst="rect">
             <a:avLst/>
@@ -27682,7 +27670,7 @@
                 <a:ea typeface="Trebuchet MS" pitchFamily="34" charset="-122"/>
                 <a:cs typeface="Trebuchet MS" pitchFamily="34" charset="-120"/>
               </a:rPr>
-              <a:t>ex</a:t>
+              <a:t>press</a:t>
             </a:r>
             <a:endParaRPr lang="en-US" sz="1400" dirty="0"/>
           </a:p>
@@ -27696,8 +27684,8 @@
         </p:nvSpPr>
         <p:spPr>
           <a:xfrm>
-            <a:off x="4504944" y="3364992"/>
-            <a:ext cx="76200" cy="475488"/>
+            <a:off x="5157216" y="3364992"/>
+            <a:ext cx="73152" cy="475488"/>
           </a:xfrm>
           <a:prstGeom prst="rect">
             <a:avLst/>
@@ -27735,8 +27723,8 @@
         </p:nvSpPr>
         <p:spPr>
           <a:xfrm>
-            <a:off x="4581144" y="3364992"/>
-            <a:ext cx="1225296" cy="475488"/>
+            <a:off x="5230368" y="3364992"/>
+            <a:ext cx="1554480" cy="475488"/>
           </a:xfrm>
           <a:prstGeom prst="rect">
             <a:avLst>
@@ -27762,8 +27750,8 @@
         </p:nvSpPr>
         <p:spPr>
           <a:xfrm>
-            <a:off x="4581144" y="3364992"/>
-            <a:ext cx="1225296" cy="475488"/>
+            <a:off x="5230368" y="3364992"/>
+            <a:ext cx="1554480" cy="475488"/>
           </a:xfrm>
           <a:prstGeom prst="rect">
             <a:avLst/>
@@ -27787,7 +27775,7 @@
                 <a:ea typeface="Trebuchet MS" pitchFamily="34" charset="-122"/>
                 <a:cs typeface="Trebuchet MS" pitchFamily="34" charset="-120"/>
               </a:rPr>
-              <a:t>press</a:t>
+              <a:t>ive</a:t>
             </a:r>
             <a:endParaRPr lang="en-US" sz="1400" dirty="0"/>
           </a:p>
@@ -27801,8 +27789,8 @@
         </p:nvSpPr>
         <p:spPr>
           <a:xfrm>
-            <a:off x="5806440" y="3364992"/>
-            <a:ext cx="76200" cy="475488"/>
+            <a:off x="6784848" y="3364992"/>
+            <a:ext cx="73152" cy="475488"/>
           </a:xfrm>
           <a:prstGeom prst="rect">
             <a:avLst/>
@@ -27840,8 +27828,8 @@
         </p:nvSpPr>
         <p:spPr>
           <a:xfrm>
-            <a:off x="5882640" y="3364992"/>
-            <a:ext cx="1225296" cy="475488"/>
+            <a:off x="6858000" y="3364992"/>
+            <a:ext cx="1554480" cy="475488"/>
           </a:xfrm>
           <a:prstGeom prst="rect">
             <a:avLst>
@@ -27867,8 +27855,8 @@
         </p:nvSpPr>
         <p:spPr>
           <a:xfrm>
-            <a:off x="5882640" y="3364992"/>
-            <a:ext cx="1225296" cy="475488"/>
+            <a:off x="6858000" y="3364992"/>
+            <a:ext cx="1554480" cy="475488"/>
           </a:xfrm>
           <a:prstGeom prst="rect">
             <a:avLst/>
@@ -27892,7 +27880,7 @@
                 <a:ea typeface="Trebuchet MS" pitchFamily="34" charset="-122"/>
                 <a:cs typeface="Trebuchet MS" pitchFamily="34" charset="-120"/>
               </a:rPr>
-              <a:t>i</a:t>
+              <a:t>ness</a:t>
             </a:r>
             <a:endParaRPr lang="en-US" sz="1400" dirty="0"/>
           </a:p>
@@ -27900,119 +27888,80 @@
       </p:sp>
       <p:sp>
         <p:nvSpPr>
-          <p:cNvPr id="39" name="Text 37"/>
-          <p:cNvSpPr/>
-          <p:nvPr/>
-        </p:nvSpPr>
-        <p:spPr>
-          <a:xfrm>
-            <a:off x="7107936" y="3364992"/>
-            <a:ext cx="76200" cy="475488"/>
-          </a:xfrm>
-          <a:prstGeom prst="rect">
-            <a:avLst/>
-          </a:prstGeom>
-          <a:noFill/>
-          <a:ln/>
-        </p:spPr>
-        <p:txBody>
-          <a:bodyPr wrap="square" lIns="0" tIns="0" rIns="0" bIns="0" rtlCol="0" anchor="ctr"/>
-          <a:lstStyle/>
-          <a:p>
-            <a:pPr algn="ctr" indent="0" marL="0">
-              <a:buNone/>
-            </a:pPr>
-            <a:r>
-              <a:rPr lang="en-US" sz="1600" b="1" dirty="0">
-                <a:solidFill>
-                  <a:srgbClr val="0D9488"/>
+          <p:cNvPr id="39" name="Shape 37"/>
+          <p:cNvSpPr/>
+          <p:nvPr/>
+        </p:nvSpPr>
+        <p:spPr>
+          <a:xfrm>
+            <a:off x="365760" y="4096512"/>
+            <a:ext cx="1371600" cy="804672"/>
+          </a:xfrm>
+          <a:prstGeom prst="rect">
+            <a:avLst>
+              <a:gd name="adj" fmla="val 6818"/>
+            </a:avLst>
+          </a:prstGeom>
+          <a:solidFill>
+            <a:srgbClr val="E2E8F0"/>
+          </a:solidFill>
+          <a:ln w="12700">
+            <a:solidFill>
+              <a:srgbClr val="E2E8F0"/>
+            </a:solidFill>
+            <a:prstDash val="solid"/>
+          </a:ln>
+        </p:spPr>
+      </p:sp>
+      <p:sp>
+        <p:nvSpPr>
+          <p:cNvPr id="40" name="Text 38"/>
+          <p:cNvSpPr/>
+          <p:nvPr/>
+        </p:nvSpPr>
+        <p:spPr>
+          <a:xfrm>
+            <a:off x="365760" y="4096512"/>
+            <a:ext cx="1371600" cy="804672"/>
+          </a:xfrm>
+          <a:prstGeom prst="rect">
+            <a:avLst/>
+          </a:prstGeom>
+          <a:noFill/>
+          <a:ln/>
+        </p:spPr>
+        <p:txBody>
+          <a:bodyPr wrap="square" lIns="0" tIns="0" rIns="0" bIns="0" rtlCol="0" anchor="ctr"/>
+          <a:lstStyle/>
+          <a:p>
+            <a:pPr algn="ctr" indent="0" marL="0">
+              <a:buNone/>
+            </a:pPr>
+            <a:r>
+              <a:rPr lang="en-US" sz="1100" b="1" dirty="0">
+                <a:solidFill>
+                  <a:srgbClr val="475569"/>
                 </a:solidFill>
                 <a:latin typeface="Trebuchet MS" pitchFamily="34" charset="0"/>
                 <a:ea typeface="Trebuchet MS" pitchFamily="34" charset="-122"/>
                 <a:cs typeface="Trebuchet MS" pitchFamily="34" charset="-120"/>
               </a:rPr>
-              <a:t>·</a:t>
-            </a:r>
-            <a:endParaRPr lang="en-US" sz="1600" dirty="0"/>
-          </a:p>
-        </p:txBody>
-      </p:sp>
-      <p:sp>
-        <p:nvSpPr>
-          <p:cNvPr id="40" name="Shape 38"/>
-          <p:cNvSpPr/>
-          <p:nvPr/>
-        </p:nvSpPr>
-        <p:spPr>
-          <a:xfrm>
-            <a:off x="7184136" y="3364992"/>
-            <a:ext cx="1225296" cy="475488"/>
-          </a:xfrm>
-          <a:prstGeom prst="rect">
-            <a:avLst>
-              <a:gd name="adj" fmla="val 9615"/>
-            </a:avLst>
-          </a:prstGeom>
-          <a:solidFill>
-            <a:srgbClr val="FFFFFF"/>
-          </a:solidFill>
-          <a:ln w="12700">
-            <a:solidFill>
-              <a:srgbClr val="0D9488"/>
-            </a:solidFill>
-            <a:prstDash val="solid"/>
-          </a:ln>
-        </p:spPr>
-      </p:sp>
-      <p:sp>
-        <p:nvSpPr>
-          <p:cNvPr id="41" name="Text 39"/>
-          <p:cNvSpPr/>
-          <p:nvPr/>
-        </p:nvSpPr>
-        <p:spPr>
-          <a:xfrm>
-            <a:off x="7184136" y="3364992"/>
-            <a:ext cx="1225296" cy="475488"/>
-          </a:xfrm>
-          <a:prstGeom prst="rect">
-            <a:avLst/>
-          </a:prstGeom>
-          <a:noFill/>
-          <a:ln/>
-        </p:spPr>
-        <p:txBody>
-          <a:bodyPr wrap="square" lIns="0" tIns="0" rIns="0" bIns="0" rtlCol="0" anchor="ctr"/>
-          <a:lstStyle/>
-          <a:p>
-            <a:pPr algn="ctr" indent="0" marL="0">
-              <a:buNone/>
-            </a:pPr>
-            <a:r>
-              <a:rPr lang="en-US" sz="1400" b="1" dirty="0">
-                <a:solidFill>
-                  <a:srgbClr val="0D9488"/>
-                </a:solidFill>
-                <a:latin typeface="Trebuchet MS" pitchFamily="34" charset="0"/>
-                <a:ea typeface="Trebuchet MS" pitchFamily="34" charset="-122"/>
-                <a:cs typeface="Trebuchet MS" pitchFamily="34" charset="-120"/>
-              </a:rPr>
-              <a:t>ble</a:t>
-            </a:r>
-            <a:endParaRPr lang="en-US" sz="1400" dirty="0"/>
-          </a:p>
-        </p:txBody>
-      </p:sp>
-      <p:sp>
-        <p:nvSpPr>
-          <p:cNvPr id="42" name="Shape 40"/>
-          <p:cNvSpPr/>
-          <p:nvPr/>
-        </p:nvSpPr>
-        <p:spPr>
-          <a:xfrm>
-            <a:off x="365760" y="4096512"/>
-            <a:ext cx="1371600" cy="804672"/>
+              <a:t>Phonemes</a:t>
+            </a:r>
+            <a:endParaRPr lang="en-US" sz="1100" dirty="0"/>
+          </a:p>
+        </p:txBody>
+      </p:sp>
+      <p:sp>
+        <p:nvSpPr>
+          <p:cNvPr id="41" name="Shape 39"/>
+          <p:cNvSpPr/>
+          <p:nvPr/>
+        </p:nvSpPr>
+        <p:spPr>
+          <a:xfrm>
+            <a:off x="1874520" y="4096512"/>
+            <a:ext cx="6903720" cy="804672"/>
           </a:xfrm>
           <a:prstGeom prst="rect">
             <a:avLst>
@@ -28020,85 +27969,19 @@
             </a:avLst>
           </a:prstGeom>
           <a:solidFill>
-            <a:srgbClr val="E2E8F0"/>
+            <a:srgbClr val="F8FAFC"/>
           </a:solidFill>
           <a:ln w="12700">
             <a:solidFill>
               <a:srgbClr val="E2E8F0"/>
             </a:solidFill>
-            <a:prstDash val="solid"/>
-          </a:ln>
-        </p:spPr>
-      </p:sp>
-      <p:sp>
-        <p:nvSpPr>
-          <p:cNvPr id="43" name="Text 41"/>
-          <p:cNvSpPr/>
-          <p:nvPr/>
-        </p:nvSpPr>
-        <p:spPr>
-          <a:xfrm>
-            <a:off x="365760" y="4096512"/>
-            <a:ext cx="1371600" cy="804672"/>
-          </a:xfrm>
-          <a:prstGeom prst="rect">
-            <a:avLst/>
-          </a:prstGeom>
-          <a:noFill/>
-          <a:ln/>
-        </p:spPr>
-        <p:txBody>
-          <a:bodyPr wrap="square" lIns="0" tIns="0" rIns="0" bIns="0" rtlCol="0" anchor="ctr"/>
-          <a:lstStyle/>
-          <a:p>
-            <a:pPr algn="ctr" indent="0" marL="0">
-              <a:buNone/>
-            </a:pPr>
-            <a:r>
-              <a:rPr lang="en-US" sz="1100" b="1" dirty="0">
-                <a:solidFill>
-                  <a:srgbClr val="475569"/>
-                </a:solidFill>
-                <a:latin typeface="Trebuchet MS" pitchFamily="34" charset="0"/>
-                <a:ea typeface="Trebuchet MS" pitchFamily="34" charset="-122"/>
-                <a:cs typeface="Trebuchet MS" pitchFamily="34" charset="-120"/>
-              </a:rPr>
-              <a:t>Phonemes</a:t>
-            </a:r>
-            <a:endParaRPr lang="en-US" sz="1100" dirty="0"/>
-          </a:p>
-        </p:txBody>
-      </p:sp>
-      <p:sp>
-        <p:nvSpPr>
-          <p:cNvPr id="44" name="Shape 42"/>
-          <p:cNvSpPr/>
-          <p:nvPr/>
-        </p:nvSpPr>
-        <p:spPr>
-          <a:xfrm>
-            <a:off x="1874520" y="4096512"/>
-            <a:ext cx="6903720" cy="804672"/>
-          </a:xfrm>
-          <a:prstGeom prst="rect">
-            <a:avLst>
-              <a:gd name="adj" fmla="val 6818"/>
-            </a:avLst>
-          </a:prstGeom>
-          <a:solidFill>
-            <a:srgbClr val="F8FAFC"/>
-          </a:solidFill>
-          <a:ln w="12700">
-            <a:solidFill>
-              <a:srgbClr val="E2E8F0"/>
-            </a:solidFill>
             <a:prstDash val="dash"/>
           </a:ln>
         </p:spPr>
       </p:sp>
       <p:sp>
         <p:nvSpPr>
-          <p:cNvPr id="45" name="Text 43"/>
+          <p:cNvPr id="42" name="Text 40"/>
           <p:cNvSpPr/>
           <p:nvPr/>
         </p:nvSpPr>
@@ -28421,7 +28304,7 @@
                 <a:ea typeface="Calibri" pitchFamily="34" charset="-122"/>
                 <a:cs typeface="Calibri" pitchFamily="34" charset="-120"/>
               </a:rPr>
-              <a:t>Word Labs  •  wordlabs.app  •  Root: 'express' = to push or press out</a:t>
+              <a:t>Word Labs  •  wordlabs.app  •  Root: 'express' = to push or squeeze out</a:t>
             </a:r>
             <a:endParaRPr lang="en-US" sz="800" dirty="0"/>
           </a:p>
@@ -28560,7 +28443,7 @@
                 <a:ea typeface="Trebuchet MS" pitchFamily="34" charset="-122"/>
                 <a:cs typeface="Trebuchet MS" pitchFamily="34" charset="-120"/>
               </a:rPr>
-              <a:t>inexpressible</a:t>
+              <a:t>expressiveness</a:t>
             </a:r>
             <a:endParaRPr lang="en-US" sz="2800" dirty="0"/>
           </a:p>
@@ -28649,11 +28532,11 @@
             </a:avLst>
           </a:prstGeom>
           <a:solidFill>
-            <a:srgbClr val="DDD6FE"/>
+            <a:srgbClr val="CCFBF1"/>
           </a:solidFill>
           <a:ln w="19050">
             <a:solidFill>
-              <a:srgbClr val="7C3AED"/>
+              <a:srgbClr val="0D9488"/>
             </a:solidFill>
             <a:prstDash val="solid"/>
           </a:ln>
@@ -28693,13 +28576,13 @@
             <a:r>
               <a:rPr lang="en-US" sz="1300" b="1" dirty="0">
                 <a:solidFill>
-                  <a:srgbClr val="4C1D95"/>
+                  <a:srgbClr val="0F766E"/>
                 </a:solidFill>
                 <a:latin typeface="Trebuchet MS" pitchFamily="34" charset="0"/>
                 <a:ea typeface="Trebuchet MS" pitchFamily="34" charset="-122"/>
                 <a:cs typeface="Trebuchet MS" pitchFamily="34" charset="-120"/>
               </a:rPr>
-              <a:t>in</a:t>
+              <a:t>express</a:t>
             </a:r>
             <a:endParaRPr lang="en-US" sz="1300" dirty="0"/>
           </a:p>
@@ -28738,7 +28621,7 @@
                 <a:ea typeface="Calibri" pitchFamily="34" charset="-122"/>
                 <a:cs typeface="Calibri" pitchFamily="34" charset="-120"/>
               </a:rPr>
-              <a:t>not</a:t>
+              <a:t>to push or squeeze out</a:t>
             </a:r>
             <a:endParaRPr lang="en-US" sz="850" dirty="0"/>
           </a:p>
@@ -28761,11 +28644,11 @@
             </a:avLst>
           </a:prstGeom>
           <a:solidFill>
-            <a:srgbClr val="CCFBF1"/>
+            <a:srgbClr val="FCE7F3"/>
           </a:solidFill>
           <a:ln w="19050">
             <a:solidFill>
-              <a:srgbClr val="0D9488"/>
+              <a:srgbClr val="DB2777"/>
             </a:solidFill>
             <a:prstDash val="solid"/>
           </a:ln>
@@ -28805,13 +28688,13 @@
             <a:r>
               <a:rPr lang="en-US" sz="1300" b="1" dirty="0">
                 <a:solidFill>
-                  <a:srgbClr val="0F766E"/>
+                  <a:srgbClr val="9D174D"/>
                 </a:solidFill>
                 <a:latin typeface="Trebuchet MS" pitchFamily="34" charset="0"/>
                 <a:ea typeface="Trebuchet MS" pitchFamily="34" charset="-122"/>
                 <a:cs typeface="Trebuchet MS" pitchFamily="34" charset="-120"/>
               </a:rPr>
-              <a:t>express</a:t>
+              <a:t>ive</a:t>
             </a:r>
             <a:endParaRPr lang="en-US" sz="1300" dirty="0"/>
           </a:p>
@@ -28850,7 +28733,7 @@
                 <a:ea typeface="Calibri" pitchFamily="34" charset="-122"/>
                 <a:cs typeface="Calibri" pitchFamily="34" charset="-120"/>
               </a:rPr>
-              <a:t>to push or press out</a:t>
+              <a:t>having the quality of</a:t>
             </a:r>
             <a:endParaRPr lang="en-US" sz="850" dirty="0"/>
           </a:p>
@@ -28923,7 +28806,7 @@
                 <a:ea typeface="Trebuchet MS" pitchFamily="34" charset="-122"/>
                 <a:cs typeface="Trebuchet MS" pitchFamily="34" charset="-120"/>
               </a:rPr>
-              <a:t>ible</a:t>
+              <a:t>ness</a:t>
             </a:r>
             <a:endParaRPr lang="en-US" sz="1300" dirty="0"/>
           </a:p>
@@ -28962,7 +28845,7 @@
                 <a:ea typeface="Calibri" pitchFamily="34" charset="-122"/>
                 <a:cs typeface="Calibri" pitchFamily="34" charset="-120"/>
               </a:rPr>
-              <a:t>able to be</a:t>
+              <a:t>the state or quality of</a:t>
             </a:r>
             <a:endParaRPr lang="en-US" sz="850" dirty="0"/>
           </a:p>
@@ -29069,8 +28952,8 @@
         </p:nvSpPr>
         <p:spPr>
           <a:xfrm>
-            <a:off x="1978152" y="3364992"/>
-            <a:ext cx="1225296" cy="475488"/>
+            <a:off x="1975104" y="3364992"/>
+            <a:ext cx="1554480" cy="475488"/>
           </a:xfrm>
           <a:prstGeom prst="rect">
             <a:avLst>
@@ -29096,8 +28979,8 @@
         </p:nvSpPr>
         <p:spPr>
           <a:xfrm>
-            <a:off x="1978152" y="3364992"/>
-            <a:ext cx="1225296" cy="475488"/>
+            <a:off x="1975104" y="3364992"/>
+            <a:ext cx="1554480" cy="475488"/>
           </a:xfrm>
           <a:prstGeom prst="rect">
             <a:avLst/>
@@ -29121,7 +29004,7 @@
                 <a:ea typeface="Trebuchet MS" pitchFamily="34" charset="-122"/>
                 <a:cs typeface="Trebuchet MS" pitchFamily="34" charset="-120"/>
               </a:rPr>
-              <a:t>in</a:t>
+              <a:t>ex</a:t>
             </a:r>
             <a:endParaRPr lang="en-US" sz="1400" dirty="0"/>
           </a:p>
@@ -29135,8 +29018,8 @@
         </p:nvSpPr>
         <p:spPr>
           <a:xfrm>
-            <a:off x="3203448" y="3364992"/>
-            <a:ext cx="76200" cy="475488"/>
+            <a:off x="3529584" y="3364992"/>
+            <a:ext cx="73152" cy="475488"/>
           </a:xfrm>
           <a:prstGeom prst="rect">
             <a:avLst/>
@@ -29174,8 +29057,8 @@
         </p:nvSpPr>
         <p:spPr>
           <a:xfrm>
-            <a:off x="3279648" y="3364992"/>
-            <a:ext cx="1225296" cy="475488"/>
+            <a:off x="3602736" y="3364992"/>
+            <a:ext cx="1554480" cy="475488"/>
           </a:xfrm>
           <a:prstGeom prst="rect">
             <a:avLst>
@@ -29201,8 +29084,8 @@
         </p:nvSpPr>
         <p:spPr>
           <a:xfrm>
-            <a:off x="3279648" y="3364992"/>
-            <a:ext cx="1225296" cy="475488"/>
+            <a:off x="3602736" y="3364992"/>
+            <a:ext cx="1554480" cy="475488"/>
           </a:xfrm>
           <a:prstGeom prst="rect">
             <a:avLst/>
@@ -29226,7 +29109,7 @@
                 <a:ea typeface="Trebuchet MS" pitchFamily="34" charset="-122"/>
                 <a:cs typeface="Trebuchet MS" pitchFamily="34" charset="-120"/>
               </a:rPr>
-              <a:t>ex</a:t>
+              <a:t>press</a:t>
             </a:r>
             <a:endParaRPr lang="en-US" sz="1400" dirty="0"/>
           </a:p>
@@ -29240,8 +29123,8 @@
         </p:nvSpPr>
         <p:spPr>
           <a:xfrm>
-            <a:off x="4504944" y="3364992"/>
-            <a:ext cx="76200" cy="475488"/>
+            <a:off x="5157216" y="3364992"/>
+            <a:ext cx="73152" cy="475488"/>
           </a:xfrm>
           <a:prstGeom prst="rect">
             <a:avLst/>
@@ -29279,8 +29162,8 @@
         </p:nvSpPr>
         <p:spPr>
           <a:xfrm>
-            <a:off x="4581144" y="3364992"/>
-            <a:ext cx="1225296" cy="475488"/>
+            <a:off x="5230368" y="3364992"/>
+            <a:ext cx="1554480" cy="475488"/>
           </a:xfrm>
           <a:prstGeom prst="rect">
             <a:avLst>
@@ -29306,8 +29189,8 @@
         </p:nvSpPr>
         <p:spPr>
           <a:xfrm>
-            <a:off x="4581144" y="3364992"/>
-            <a:ext cx="1225296" cy="475488"/>
+            <a:off x="5230368" y="3364992"/>
+            <a:ext cx="1554480" cy="475488"/>
           </a:xfrm>
           <a:prstGeom prst="rect">
             <a:avLst/>
@@ -29331,7 +29214,7 @@
                 <a:ea typeface="Trebuchet MS" pitchFamily="34" charset="-122"/>
                 <a:cs typeface="Trebuchet MS" pitchFamily="34" charset="-120"/>
               </a:rPr>
-              <a:t>press</a:t>
+              <a:t>ive</a:t>
             </a:r>
             <a:endParaRPr lang="en-US" sz="1400" dirty="0"/>
           </a:p>
@@ -29345,8 +29228,8 @@
         </p:nvSpPr>
         <p:spPr>
           <a:xfrm>
-            <a:off x="5806440" y="3364992"/>
-            <a:ext cx="76200" cy="475488"/>
+            <a:off x="6784848" y="3364992"/>
+            <a:ext cx="73152" cy="475488"/>
           </a:xfrm>
           <a:prstGeom prst="rect">
             <a:avLst/>
@@ -29384,8 +29267,8 @@
         </p:nvSpPr>
         <p:spPr>
           <a:xfrm>
-            <a:off x="5882640" y="3364992"/>
-            <a:ext cx="1225296" cy="475488"/>
+            <a:off x="6858000" y="3364992"/>
+            <a:ext cx="1554480" cy="475488"/>
           </a:xfrm>
           <a:prstGeom prst="rect">
             <a:avLst>
@@ -29411,8 +29294,8 @@
         </p:nvSpPr>
         <p:spPr>
           <a:xfrm>
-            <a:off x="5882640" y="3364992"/>
-            <a:ext cx="1225296" cy="475488"/>
+            <a:off x="6858000" y="3364992"/>
+            <a:ext cx="1554480" cy="475488"/>
           </a:xfrm>
           <a:prstGeom prst="rect">
             <a:avLst/>
@@ -29436,7 +29319,7 @@
                 <a:ea typeface="Trebuchet MS" pitchFamily="34" charset="-122"/>
                 <a:cs typeface="Trebuchet MS" pitchFamily="34" charset="-120"/>
               </a:rPr>
-              <a:t>i</a:t>
+              <a:t>ness</a:t>
             </a:r>
             <a:endParaRPr lang="en-US" sz="1400" dirty="0"/>
           </a:p>
@@ -29444,212 +29327,278 @@
       </p:sp>
       <p:sp>
         <p:nvSpPr>
-          <p:cNvPr id="39" name="Text 37"/>
-          <p:cNvSpPr/>
-          <p:nvPr/>
-        </p:nvSpPr>
-        <p:spPr>
-          <a:xfrm>
-            <a:off x="7107936" y="3364992"/>
-            <a:ext cx="76200" cy="475488"/>
-          </a:xfrm>
-          <a:prstGeom prst="rect">
-            <a:avLst/>
-          </a:prstGeom>
-          <a:noFill/>
-          <a:ln/>
-        </p:spPr>
-        <p:txBody>
-          <a:bodyPr wrap="square" lIns="0" tIns="0" rIns="0" bIns="0" rtlCol="0" anchor="ctr"/>
-          <a:lstStyle/>
-          <a:p>
-            <a:pPr algn="ctr" indent="0" marL="0">
-              <a:buNone/>
-            </a:pPr>
-            <a:r>
-              <a:rPr lang="en-US" sz="1600" b="1" dirty="0">
-                <a:solidFill>
-                  <a:srgbClr val="0D9488"/>
+          <p:cNvPr id="39" name="Shape 37"/>
+          <p:cNvSpPr/>
+          <p:nvPr/>
+        </p:nvSpPr>
+        <p:spPr>
+          <a:xfrm>
+            <a:off x="365760" y="4096512"/>
+            <a:ext cx="1371600" cy="804672"/>
+          </a:xfrm>
+          <a:prstGeom prst="rect">
+            <a:avLst>
+              <a:gd name="adj" fmla="val 6818"/>
+            </a:avLst>
+          </a:prstGeom>
+          <a:solidFill>
+            <a:srgbClr val="E2E8F0"/>
+          </a:solidFill>
+          <a:ln w="12700">
+            <a:solidFill>
+              <a:srgbClr val="E2E8F0"/>
+            </a:solidFill>
+            <a:prstDash val="solid"/>
+          </a:ln>
+        </p:spPr>
+      </p:sp>
+      <p:sp>
+        <p:nvSpPr>
+          <p:cNvPr id="40" name="Text 38"/>
+          <p:cNvSpPr/>
+          <p:nvPr/>
+        </p:nvSpPr>
+        <p:spPr>
+          <a:xfrm>
+            <a:off x="365760" y="4096512"/>
+            <a:ext cx="1371600" cy="804672"/>
+          </a:xfrm>
+          <a:prstGeom prst="rect">
+            <a:avLst/>
+          </a:prstGeom>
+          <a:noFill/>
+          <a:ln/>
+        </p:spPr>
+        <p:txBody>
+          <a:bodyPr wrap="square" lIns="0" tIns="0" rIns="0" bIns="0" rtlCol="0" anchor="ctr"/>
+          <a:lstStyle/>
+          <a:p>
+            <a:pPr algn="ctr" indent="0" marL="0">
+              <a:buNone/>
+            </a:pPr>
+            <a:r>
+              <a:rPr lang="en-US" sz="1100" b="1" dirty="0">
+                <a:solidFill>
+                  <a:srgbClr val="475569"/>
                 </a:solidFill>
                 <a:latin typeface="Trebuchet MS" pitchFamily="34" charset="0"/>
                 <a:ea typeface="Trebuchet MS" pitchFamily="34" charset="-122"/>
                 <a:cs typeface="Trebuchet MS" pitchFamily="34" charset="-120"/>
               </a:rPr>
-              <a:t>·</a:t>
-            </a:r>
-            <a:endParaRPr lang="en-US" sz="1600" dirty="0"/>
-          </a:p>
-        </p:txBody>
-      </p:sp>
-      <p:sp>
-        <p:nvSpPr>
-          <p:cNvPr id="40" name="Shape 38"/>
-          <p:cNvSpPr/>
-          <p:nvPr/>
-        </p:nvSpPr>
-        <p:spPr>
-          <a:xfrm>
-            <a:off x="7184136" y="3364992"/>
-            <a:ext cx="1225296" cy="475488"/>
+              <a:t>Phonemes</a:t>
+            </a:r>
+            <a:endParaRPr lang="en-US" sz="1100" dirty="0"/>
+          </a:p>
+        </p:txBody>
+      </p:sp>
+      <p:sp>
+        <p:nvSpPr>
+          <p:cNvPr id="41" name="Shape 39"/>
+          <p:cNvSpPr/>
+          <p:nvPr/>
+        </p:nvSpPr>
+        <p:spPr>
+          <a:xfrm>
+            <a:off x="1874520" y="4096512"/>
+            <a:ext cx="6903720" cy="804672"/>
           </a:xfrm>
           <a:prstGeom prst="rect">
             <a:avLst>
-              <a:gd name="adj" fmla="val 9615"/>
+              <a:gd name="adj" fmla="val 6818"/>
             </a:avLst>
           </a:prstGeom>
           <a:solidFill>
+            <a:srgbClr val="FCE7F3"/>
+          </a:solidFill>
+          <a:ln w="12700">
+            <a:solidFill>
+              <a:srgbClr val="DB2777"/>
+            </a:solidFill>
+            <a:prstDash val="solid"/>
+          </a:ln>
+        </p:spPr>
+      </p:sp>
+      <p:sp>
+        <p:nvSpPr>
+          <p:cNvPr id="42" name="Shape 40"/>
+          <p:cNvSpPr/>
+          <p:nvPr/>
+        </p:nvSpPr>
+        <p:spPr>
+          <a:xfrm>
+            <a:off x="1952596" y="4169664"/>
+            <a:ext cx="493776" cy="384048"/>
+          </a:xfrm>
+          <a:prstGeom prst="rect">
+            <a:avLst>
+              <a:gd name="adj" fmla="val 9524"/>
+            </a:avLst>
+          </a:prstGeom>
+          <a:solidFill>
             <a:srgbClr val="FFFFFF"/>
           </a:solidFill>
           <a:ln w="12700">
             <a:solidFill>
-              <a:srgbClr val="0D9488"/>
-            </a:solidFill>
-            <a:prstDash val="solid"/>
-          </a:ln>
-        </p:spPr>
-      </p:sp>
-      <p:sp>
-        <p:nvSpPr>
-          <p:cNvPr id="41" name="Text 39"/>
-          <p:cNvSpPr/>
-          <p:nvPr/>
-        </p:nvSpPr>
-        <p:spPr>
-          <a:xfrm>
-            <a:off x="7184136" y="3364992"/>
-            <a:ext cx="1225296" cy="475488"/>
-          </a:xfrm>
-          <a:prstGeom prst="rect">
-            <a:avLst/>
-          </a:prstGeom>
-          <a:noFill/>
-          <a:ln/>
-        </p:spPr>
-        <p:txBody>
-          <a:bodyPr wrap="square" lIns="0" tIns="0" rIns="0" bIns="0" rtlCol="0" anchor="ctr"/>
-          <a:lstStyle/>
-          <a:p>
-            <a:pPr algn="ctr" indent="0" marL="0">
-              <a:buNone/>
-            </a:pPr>
-            <a:r>
-              <a:rPr lang="en-US" sz="1400" b="1" dirty="0">
-                <a:solidFill>
-                  <a:srgbClr val="0D9488"/>
+              <a:srgbClr val="DB2777"/>
+            </a:solidFill>
+            <a:prstDash val="solid"/>
+          </a:ln>
+        </p:spPr>
+      </p:sp>
+      <p:sp>
+        <p:nvSpPr>
+          <p:cNvPr id="43" name="Text 41"/>
+          <p:cNvSpPr/>
+          <p:nvPr/>
+        </p:nvSpPr>
+        <p:spPr>
+          <a:xfrm>
+            <a:off x="1952596" y="4169664"/>
+            <a:ext cx="493776" cy="384048"/>
+          </a:xfrm>
+          <a:prstGeom prst="rect">
+            <a:avLst/>
+          </a:prstGeom>
+          <a:noFill/>
+          <a:ln/>
+        </p:spPr>
+        <p:txBody>
+          <a:bodyPr wrap="square" lIns="0" tIns="0" rIns="0" bIns="0" rtlCol="0" anchor="ctr"/>
+          <a:lstStyle/>
+          <a:p>
+            <a:pPr algn="ctr" indent="0" marL="0">
+              <a:buNone/>
+            </a:pPr>
+            <a:r>
+              <a:rPr lang="en-US" sz="900" b="1" dirty="0">
+                <a:solidFill>
+                  <a:srgbClr val="9D174D"/>
                 </a:solidFill>
                 <a:latin typeface="Trebuchet MS" pitchFamily="34" charset="0"/>
                 <a:ea typeface="Trebuchet MS" pitchFamily="34" charset="-122"/>
                 <a:cs typeface="Trebuchet MS" pitchFamily="34" charset="-120"/>
               </a:rPr>
-              <a:t>ble</a:t>
-            </a:r>
-            <a:endParaRPr lang="en-US" sz="1400" dirty="0"/>
-          </a:p>
-        </p:txBody>
-      </p:sp>
-      <p:sp>
-        <p:nvSpPr>
-          <p:cNvPr id="42" name="Shape 40"/>
-          <p:cNvSpPr/>
-          <p:nvPr/>
-        </p:nvSpPr>
-        <p:spPr>
-          <a:xfrm>
-            <a:off x="365760" y="4096512"/>
-            <a:ext cx="1371600" cy="804672"/>
+              <a:t>e</a:t>
+            </a:r>
+            <a:endParaRPr lang="en-US" sz="900" dirty="0"/>
+          </a:p>
+        </p:txBody>
+      </p:sp>
+      <p:sp>
+        <p:nvSpPr>
+          <p:cNvPr id="44" name="Shape 42"/>
+          <p:cNvSpPr/>
+          <p:nvPr/>
+        </p:nvSpPr>
+        <p:spPr>
+          <a:xfrm>
+            <a:off x="2497015" y="4169664"/>
+            <a:ext cx="493776" cy="384048"/>
           </a:xfrm>
           <a:prstGeom prst="rect">
             <a:avLst>
-              <a:gd name="adj" fmla="val 6818"/>
+              <a:gd name="adj" fmla="val 9524"/>
             </a:avLst>
           </a:prstGeom>
           <a:solidFill>
-            <a:srgbClr val="E2E8F0"/>
-          </a:solidFill>
-          <a:ln w="12700">
-            <a:solidFill>
-              <a:srgbClr val="E2E8F0"/>
-            </a:solidFill>
-            <a:prstDash val="solid"/>
-          </a:ln>
-        </p:spPr>
-      </p:sp>
-      <p:sp>
-        <p:nvSpPr>
-          <p:cNvPr id="43" name="Text 41"/>
-          <p:cNvSpPr/>
-          <p:nvPr/>
-        </p:nvSpPr>
-        <p:spPr>
-          <a:xfrm>
-            <a:off x="365760" y="4096512"/>
-            <a:ext cx="1371600" cy="804672"/>
-          </a:xfrm>
-          <a:prstGeom prst="rect">
-            <a:avLst/>
-          </a:prstGeom>
-          <a:noFill/>
-          <a:ln/>
-        </p:spPr>
-        <p:txBody>
-          <a:bodyPr wrap="square" lIns="0" tIns="0" rIns="0" bIns="0" rtlCol="0" anchor="ctr"/>
-          <a:lstStyle/>
-          <a:p>
-            <a:pPr algn="ctr" indent="0" marL="0">
-              <a:buNone/>
-            </a:pPr>
-            <a:r>
-              <a:rPr lang="en-US" sz="1100" b="1" dirty="0">
-                <a:solidFill>
-                  <a:srgbClr val="475569"/>
+            <a:srgbClr val="FFFFFF"/>
+          </a:solidFill>
+          <a:ln w="12700">
+            <a:solidFill>
+              <a:srgbClr val="DB2777"/>
+            </a:solidFill>
+            <a:prstDash val="solid"/>
+          </a:ln>
+        </p:spPr>
+      </p:sp>
+      <p:sp>
+        <p:nvSpPr>
+          <p:cNvPr id="45" name="Text 43"/>
+          <p:cNvSpPr/>
+          <p:nvPr/>
+        </p:nvSpPr>
+        <p:spPr>
+          <a:xfrm>
+            <a:off x="2497015" y="4169664"/>
+            <a:ext cx="493776" cy="384048"/>
+          </a:xfrm>
+          <a:prstGeom prst="rect">
+            <a:avLst/>
+          </a:prstGeom>
+          <a:noFill/>
+          <a:ln/>
+        </p:spPr>
+        <p:txBody>
+          <a:bodyPr wrap="square" lIns="0" tIns="0" rIns="0" bIns="0" rtlCol="0" anchor="ctr"/>
+          <a:lstStyle/>
+          <a:p>
+            <a:pPr algn="ctr" indent="0" marL="0">
+              <a:buNone/>
+            </a:pPr>
+            <a:r>
+              <a:rPr lang="en-US" sz="900" b="1" dirty="0">
+                <a:solidFill>
+                  <a:srgbClr val="9D174D"/>
                 </a:solidFill>
                 <a:latin typeface="Trebuchet MS" pitchFamily="34" charset="0"/>
                 <a:ea typeface="Trebuchet MS" pitchFamily="34" charset="-122"/>
                 <a:cs typeface="Trebuchet MS" pitchFamily="34" charset="-120"/>
               </a:rPr>
-              <a:t>Phonemes</a:t>
-            </a:r>
-            <a:endParaRPr lang="en-US" sz="1100" dirty="0"/>
-          </a:p>
-        </p:txBody>
-      </p:sp>
-      <p:sp>
-        <p:nvSpPr>
-          <p:cNvPr id="44" name="Shape 42"/>
-          <p:cNvSpPr/>
-          <p:nvPr/>
-        </p:nvSpPr>
-        <p:spPr>
-          <a:xfrm>
-            <a:off x="1874520" y="4096512"/>
-            <a:ext cx="6903720" cy="804672"/>
-          </a:xfrm>
-          <a:prstGeom prst="rect">
-            <a:avLst>
-              <a:gd name="adj" fmla="val 6818"/>
-            </a:avLst>
-          </a:prstGeom>
-          <a:solidFill>
-            <a:srgbClr val="FCE7F3"/>
-          </a:solidFill>
-          <a:ln w="12700">
-            <a:solidFill>
-              <a:srgbClr val="DB2777"/>
-            </a:solidFill>
-            <a:prstDash val="solid"/>
-          </a:ln>
-        </p:spPr>
-      </p:sp>
-      <p:sp>
-        <p:nvSpPr>
-          <p:cNvPr id="45" name="Shape 43"/>
-          <p:cNvSpPr/>
-          <p:nvPr/>
-        </p:nvSpPr>
-        <p:spPr>
-          <a:xfrm>
-            <a:off x="1952244" y="4169664"/>
-            <a:ext cx="543652" cy="384048"/>
+              <a:t>x</a:t>
+            </a:r>
+            <a:endParaRPr lang="en-US" sz="900" dirty="0"/>
+          </a:p>
+        </p:txBody>
+      </p:sp>
+      <p:sp>
+        <p:nvSpPr>
+          <p:cNvPr id="46" name="Text 44"/>
+          <p:cNvSpPr/>
+          <p:nvPr/>
+        </p:nvSpPr>
+        <p:spPr>
+          <a:xfrm>
+            <a:off x="2497015" y="4572000"/>
+            <a:ext cx="493776" cy="219456"/>
+          </a:xfrm>
+          <a:prstGeom prst="rect">
+            <a:avLst/>
+          </a:prstGeom>
+          <a:noFill/>
+          <a:ln/>
+        </p:spPr>
+        <p:txBody>
+          <a:bodyPr wrap="square" lIns="0" tIns="0" rIns="0" bIns="0" rtlCol="0" anchor="t"/>
+          <a:lstStyle/>
+          <a:p>
+            <a:pPr algn="ctr" indent="0" marL="0">
+              <a:buNone/>
+            </a:pPr>
+            <a:r>
+              <a:rPr lang="en-US" sz="750" i="1" dirty="0">
+                <a:solidFill>
+                  <a:srgbClr val="94A3B8"/>
+                </a:solidFill>
+                <a:latin typeface="Calibri" pitchFamily="34" charset="0"/>
+                <a:ea typeface="Calibri" pitchFamily="34" charset="-122"/>
+                <a:cs typeface="Calibri" pitchFamily="34" charset="-120"/>
+              </a:rPr>
+              <a:t>/ks/</a:t>
+            </a:r>
+            <a:endParaRPr lang="en-US" sz="750" dirty="0"/>
+          </a:p>
+        </p:txBody>
+      </p:sp>
+      <p:sp>
+        <p:nvSpPr>
+          <p:cNvPr id="47" name="Shape 45"/>
+          <p:cNvSpPr/>
+          <p:nvPr/>
+        </p:nvSpPr>
+        <p:spPr>
+          <a:xfrm>
+            <a:off x="3041435" y="4169664"/>
+            <a:ext cx="493776" cy="384048"/>
           </a:xfrm>
           <a:prstGeom prst="rect">
             <a:avLst>
@@ -29669,14 +29618,14 @@
       </p:sp>
       <p:sp>
         <p:nvSpPr>
-          <p:cNvPr id="46" name="Text 44"/>
-          <p:cNvSpPr/>
-          <p:nvPr/>
-        </p:nvSpPr>
-        <p:spPr>
-          <a:xfrm>
-            <a:off x="1952244" y="4169664"/>
-            <a:ext cx="543652" cy="384048"/>
+          <p:cNvPr id="48" name="Text 46"/>
+          <p:cNvSpPr/>
+          <p:nvPr/>
+        </p:nvSpPr>
+        <p:spPr>
+          <a:xfrm>
+            <a:off x="3041435" y="4169664"/>
+            <a:ext cx="493776" cy="384048"/>
           </a:xfrm>
           <a:prstGeom prst="rect">
             <a:avLst/>
@@ -29700,7 +29649,7 @@
                 <a:ea typeface="Trebuchet MS" pitchFamily="34" charset="-122"/>
                 <a:cs typeface="Trebuchet MS" pitchFamily="34" charset="-120"/>
               </a:rPr>
-              <a:t>i</a:t>
+              <a:t>p</a:t>
             </a:r>
             <a:endParaRPr lang="en-US" sz="900" dirty="0"/>
           </a:p>
@@ -29708,14 +29657,14 @@
       </p:sp>
       <p:sp>
         <p:nvSpPr>
-          <p:cNvPr id="47" name="Shape 45"/>
-          <p:cNvSpPr/>
-          <p:nvPr/>
-        </p:nvSpPr>
-        <p:spPr>
-          <a:xfrm>
-            <a:off x="2546188" y="4169664"/>
-            <a:ext cx="543652" cy="384048"/>
+          <p:cNvPr id="49" name="Shape 47"/>
+          <p:cNvSpPr/>
+          <p:nvPr/>
+        </p:nvSpPr>
+        <p:spPr>
+          <a:xfrm>
+            <a:off x="3585855" y="4169664"/>
+            <a:ext cx="493776" cy="384048"/>
           </a:xfrm>
           <a:prstGeom prst="rect">
             <a:avLst>
@@ -29735,14 +29684,14 @@
       </p:sp>
       <p:sp>
         <p:nvSpPr>
-          <p:cNvPr id="48" name="Text 46"/>
-          <p:cNvSpPr/>
-          <p:nvPr/>
-        </p:nvSpPr>
-        <p:spPr>
-          <a:xfrm>
-            <a:off x="2546188" y="4169664"/>
-            <a:ext cx="543652" cy="384048"/>
+          <p:cNvPr id="50" name="Text 48"/>
+          <p:cNvSpPr/>
+          <p:nvPr/>
+        </p:nvSpPr>
+        <p:spPr>
+          <a:xfrm>
+            <a:off x="3585855" y="4169664"/>
+            <a:ext cx="493776" cy="384048"/>
           </a:xfrm>
           <a:prstGeom prst="rect">
             <a:avLst/>
@@ -29766,7 +29715,7 @@
                 <a:ea typeface="Trebuchet MS" pitchFamily="34" charset="-122"/>
                 <a:cs typeface="Trebuchet MS" pitchFamily="34" charset="-120"/>
               </a:rPr>
-              <a:t>n</a:t>
+              <a:t>r</a:t>
             </a:r>
             <a:endParaRPr lang="en-US" sz="900" dirty="0"/>
           </a:p>
@@ -29774,14 +29723,14 @@
       </p:sp>
       <p:sp>
         <p:nvSpPr>
-          <p:cNvPr id="49" name="Shape 47"/>
-          <p:cNvSpPr/>
-          <p:nvPr/>
-        </p:nvSpPr>
-        <p:spPr>
-          <a:xfrm>
-            <a:off x="3140133" y="4169664"/>
-            <a:ext cx="543652" cy="384048"/>
+          <p:cNvPr id="51" name="Shape 49"/>
+          <p:cNvSpPr/>
+          <p:nvPr/>
+        </p:nvSpPr>
+        <p:spPr>
+          <a:xfrm>
+            <a:off x="4130274" y="4169664"/>
+            <a:ext cx="493776" cy="384048"/>
           </a:xfrm>
           <a:prstGeom prst="rect">
             <a:avLst>
@@ -29801,14 +29750,14 @@
       </p:sp>
       <p:sp>
         <p:nvSpPr>
-          <p:cNvPr id="50" name="Text 48"/>
-          <p:cNvSpPr/>
-          <p:nvPr/>
-        </p:nvSpPr>
-        <p:spPr>
-          <a:xfrm>
-            <a:off x="3140133" y="4169664"/>
-            <a:ext cx="543652" cy="384048"/>
+          <p:cNvPr id="52" name="Text 50"/>
+          <p:cNvSpPr/>
+          <p:nvPr/>
+        </p:nvSpPr>
+        <p:spPr>
+          <a:xfrm>
+            <a:off x="4130274" y="4169664"/>
+            <a:ext cx="493776" cy="384048"/>
           </a:xfrm>
           <a:prstGeom prst="rect">
             <a:avLst/>
@@ -29840,14 +29789,14 @@
       </p:sp>
       <p:sp>
         <p:nvSpPr>
-          <p:cNvPr id="51" name="Shape 49"/>
-          <p:cNvSpPr/>
-          <p:nvPr/>
-        </p:nvSpPr>
-        <p:spPr>
-          <a:xfrm>
-            <a:off x="3734077" y="4169664"/>
-            <a:ext cx="543652" cy="384048"/>
+          <p:cNvPr id="53" name="Shape 51"/>
+          <p:cNvSpPr/>
+          <p:nvPr/>
+        </p:nvSpPr>
+        <p:spPr>
+          <a:xfrm>
+            <a:off x="4674694" y="4169664"/>
+            <a:ext cx="493776" cy="384048"/>
           </a:xfrm>
           <a:prstGeom prst="rect">
             <a:avLst>
@@ -29867,14 +29816,14 @@
       </p:sp>
       <p:sp>
         <p:nvSpPr>
-          <p:cNvPr id="52" name="Text 50"/>
-          <p:cNvSpPr/>
-          <p:nvPr/>
-        </p:nvSpPr>
-        <p:spPr>
-          <a:xfrm>
-            <a:off x="3734077" y="4169664"/>
-            <a:ext cx="543652" cy="384048"/>
+          <p:cNvPr id="54" name="Text 52"/>
+          <p:cNvSpPr/>
+          <p:nvPr/>
+        </p:nvSpPr>
+        <p:spPr>
+          <a:xfrm>
+            <a:off x="4674694" y="4169664"/>
+            <a:ext cx="493776" cy="384048"/>
           </a:xfrm>
           <a:prstGeom prst="rect">
             <a:avLst/>
@@ -29898,7 +29847,7 @@
                 <a:ea typeface="Trebuchet MS" pitchFamily="34" charset="-122"/>
                 <a:cs typeface="Trebuchet MS" pitchFamily="34" charset="-120"/>
               </a:rPr>
-              <a:t>x</a:t>
+              <a:t>ss</a:t>
             </a:r>
             <a:endParaRPr lang="en-US" sz="900" dirty="0"/>
           </a:p>
@@ -29906,53 +29855,14 @@
       </p:sp>
       <p:sp>
         <p:nvSpPr>
-          <p:cNvPr id="53" name="Text 51"/>
-          <p:cNvSpPr/>
-          <p:nvPr/>
-        </p:nvSpPr>
-        <p:spPr>
-          <a:xfrm>
-            <a:off x="3734077" y="4572000"/>
-            <a:ext cx="543652" cy="219456"/>
-          </a:xfrm>
-          <a:prstGeom prst="rect">
-            <a:avLst/>
-          </a:prstGeom>
-          <a:noFill/>
-          <a:ln/>
-        </p:spPr>
-        <p:txBody>
-          <a:bodyPr wrap="square" lIns="0" tIns="0" rIns="0" bIns="0" rtlCol="0" anchor="t"/>
-          <a:lstStyle/>
-          <a:p>
-            <a:pPr algn="ctr" indent="0" marL="0">
-              <a:buNone/>
-            </a:pPr>
-            <a:r>
-              <a:rPr lang="en-US" sz="750" i="1" dirty="0">
-                <a:solidFill>
-                  <a:srgbClr val="94A3B8"/>
-                </a:solidFill>
-                <a:latin typeface="Calibri" pitchFamily="34" charset="0"/>
-                <a:ea typeface="Calibri" pitchFamily="34" charset="-122"/>
-                <a:cs typeface="Calibri" pitchFamily="34" charset="-120"/>
-              </a:rPr>
-              <a:t>/ks/</a:t>
-            </a:r>
-            <a:endParaRPr lang="en-US" sz="750" dirty="0"/>
-          </a:p>
-        </p:txBody>
-      </p:sp>
-      <p:sp>
-        <p:nvSpPr>
-          <p:cNvPr id="54" name="Shape 52"/>
-          <p:cNvSpPr/>
-          <p:nvPr/>
-        </p:nvSpPr>
-        <p:spPr>
-          <a:xfrm>
-            <a:off x="4328021" y="4169664"/>
-            <a:ext cx="543652" cy="384048"/>
+          <p:cNvPr id="55" name="Shape 53"/>
+          <p:cNvSpPr/>
+          <p:nvPr/>
+        </p:nvSpPr>
+        <p:spPr>
+          <a:xfrm>
+            <a:off x="5219114" y="4169664"/>
+            <a:ext cx="493776" cy="384048"/>
           </a:xfrm>
           <a:prstGeom prst="rect">
             <a:avLst>
@@ -29972,14 +29882,14 @@
       </p:sp>
       <p:sp>
         <p:nvSpPr>
-          <p:cNvPr id="55" name="Text 53"/>
-          <p:cNvSpPr/>
-          <p:nvPr/>
-        </p:nvSpPr>
-        <p:spPr>
-          <a:xfrm>
-            <a:off x="4328021" y="4169664"/>
-            <a:ext cx="543652" cy="384048"/>
+          <p:cNvPr id="56" name="Text 54"/>
+          <p:cNvSpPr/>
+          <p:nvPr/>
+        </p:nvSpPr>
+        <p:spPr>
+          <a:xfrm>
+            <a:off x="5219114" y="4169664"/>
+            <a:ext cx="493776" cy="384048"/>
           </a:xfrm>
           <a:prstGeom prst="rect">
             <a:avLst/>
@@ -30003,7 +29913,7 @@
                 <a:ea typeface="Trebuchet MS" pitchFamily="34" charset="-122"/>
                 <a:cs typeface="Trebuchet MS" pitchFamily="34" charset="-120"/>
               </a:rPr>
-              <a:t>p</a:t>
+              <a:t>i</a:t>
             </a:r>
             <a:endParaRPr lang="en-US" sz="900" dirty="0"/>
           </a:p>
@@ -30011,14 +29921,14 @@
       </p:sp>
       <p:sp>
         <p:nvSpPr>
-          <p:cNvPr id="56" name="Shape 54"/>
-          <p:cNvSpPr/>
-          <p:nvPr/>
-        </p:nvSpPr>
-        <p:spPr>
-          <a:xfrm>
-            <a:off x="4921966" y="4169664"/>
-            <a:ext cx="543652" cy="384048"/>
+          <p:cNvPr id="57" name="Shape 55"/>
+          <p:cNvSpPr/>
+          <p:nvPr/>
+        </p:nvSpPr>
+        <p:spPr>
+          <a:xfrm>
+            <a:off x="5763534" y="4169664"/>
+            <a:ext cx="493776" cy="384048"/>
           </a:xfrm>
           <a:prstGeom prst="rect">
             <a:avLst>
@@ -30038,14 +29948,14 @@
       </p:sp>
       <p:sp>
         <p:nvSpPr>
-          <p:cNvPr id="57" name="Text 55"/>
-          <p:cNvSpPr/>
-          <p:nvPr/>
-        </p:nvSpPr>
-        <p:spPr>
-          <a:xfrm>
-            <a:off x="4921966" y="4169664"/>
-            <a:ext cx="543652" cy="384048"/>
+          <p:cNvPr id="58" name="Text 56"/>
+          <p:cNvSpPr/>
+          <p:nvPr/>
+        </p:nvSpPr>
+        <p:spPr>
+          <a:xfrm>
+            <a:off x="5763534" y="4169664"/>
+            <a:ext cx="493776" cy="384048"/>
           </a:xfrm>
           <a:prstGeom prst="rect">
             <a:avLst/>
@@ -30069,7 +29979,7 @@
                 <a:ea typeface="Trebuchet MS" pitchFamily="34" charset="-122"/>
                 <a:cs typeface="Trebuchet MS" pitchFamily="34" charset="-120"/>
               </a:rPr>
-              <a:t>r</a:t>
+              <a:t>v</a:t>
             </a:r>
             <a:endParaRPr lang="en-US" sz="900" dirty="0"/>
           </a:p>
@@ -30077,14 +29987,14 @@
       </p:sp>
       <p:sp>
         <p:nvSpPr>
-          <p:cNvPr id="58" name="Shape 56"/>
-          <p:cNvSpPr/>
-          <p:nvPr/>
-        </p:nvSpPr>
-        <p:spPr>
-          <a:xfrm>
-            <a:off x="5515910" y="4169664"/>
-            <a:ext cx="543652" cy="384048"/>
+          <p:cNvPr id="59" name="Shape 57"/>
+          <p:cNvSpPr/>
+          <p:nvPr/>
+        </p:nvSpPr>
+        <p:spPr>
+          <a:xfrm>
+            <a:off x="6307953" y="4169664"/>
+            <a:ext cx="493776" cy="384048"/>
           </a:xfrm>
           <a:prstGeom prst="rect">
             <a:avLst>
@@ -30104,14 +30014,14 @@
       </p:sp>
       <p:sp>
         <p:nvSpPr>
-          <p:cNvPr id="59" name="Text 57"/>
-          <p:cNvSpPr/>
-          <p:nvPr/>
-        </p:nvSpPr>
-        <p:spPr>
-          <a:xfrm>
-            <a:off x="5515910" y="4169664"/>
-            <a:ext cx="543652" cy="384048"/>
+          <p:cNvPr id="60" name="Text 58"/>
+          <p:cNvSpPr/>
+          <p:nvPr/>
+        </p:nvSpPr>
+        <p:spPr>
+          <a:xfrm>
+            <a:off x="6307953" y="4169664"/>
+            <a:ext cx="493776" cy="384048"/>
           </a:xfrm>
           <a:prstGeom prst="rect">
             <a:avLst/>
@@ -30143,14 +30053,14 @@
       </p:sp>
       <p:sp>
         <p:nvSpPr>
-          <p:cNvPr id="60" name="Shape 58"/>
-          <p:cNvSpPr/>
-          <p:nvPr/>
-        </p:nvSpPr>
-        <p:spPr>
-          <a:xfrm>
-            <a:off x="6109855" y="4169664"/>
-            <a:ext cx="543652" cy="384048"/>
+          <p:cNvPr id="61" name="Shape 59"/>
+          <p:cNvSpPr/>
+          <p:nvPr/>
+        </p:nvSpPr>
+        <p:spPr>
+          <a:xfrm>
+            <a:off x="6852373" y="4169664"/>
+            <a:ext cx="493776" cy="384048"/>
           </a:xfrm>
           <a:prstGeom prst="rect">
             <a:avLst>
@@ -30170,14 +30080,14 @@
       </p:sp>
       <p:sp>
         <p:nvSpPr>
-          <p:cNvPr id="61" name="Text 59"/>
-          <p:cNvSpPr/>
-          <p:nvPr/>
-        </p:nvSpPr>
-        <p:spPr>
-          <a:xfrm>
-            <a:off x="6109855" y="4169664"/>
-            <a:ext cx="543652" cy="384048"/>
+          <p:cNvPr id="62" name="Text 60"/>
+          <p:cNvSpPr/>
+          <p:nvPr/>
+        </p:nvSpPr>
+        <p:spPr>
+          <a:xfrm>
+            <a:off x="6852373" y="4169664"/>
+            <a:ext cx="493776" cy="384048"/>
           </a:xfrm>
           <a:prstGeom prst="rect">
             <a:avLst/>
@@ -30201,7 +30111,7 @@
                 <a:ea typeface="Trebuchet MS" pitchFamily="34" charset="-122"/>
                 <a:cs typeface="Trebuchet MS" pitchFamily="34" charset="-120"/>
               </a:rPr>
-              <a:t>ss</a:t>
+              <a:t>n</a:t>
             </a:r>
             <a:endParaRPr lang="en-US" sz="900" dirty="0"/>
           </a:p>
@@ -30209,14 +30119,14 @@
       </p:sp>
       <p:sp>
         <p:nvSpPr>
-          <p:cNvPr id="62" name="Shape 60"/>
-          <p:cNvSpPr/>
-          <p:nvPr/>
-        </p:nvSpPr>
-        <p:spPr>
-          <a:xfrm>
-            <a:off x="6703799" y="4169664"/>
-            <a:ext cx="543652" cy="384048"/>
+          <p:cNvPr id="63" name="Shape 61"/>
+          <p:cNvSpPr/>
+          <p:nvPr/>
+        </p:nvSpPr>
+        <p:spPr>
+          <a:xfrm>
+            <a:off x="7396793" y="4169664"/>
+            <a:ext cx="493776" cy="384048"/>
           </a:xfrm>
           <a:prstGeom prst="rect">
             <a:avLst>
@@ -30236,14 +30146,14 @@
       </p:sp>
       <p:sp>
         <p:nvSpPr>
-          <p:cNvPr id="63" name="Text 61"/>
-          <p:cNvSpPr/>
-          <p:nvPr/>
-        </p:nvSpPr>
-        <p:spPr>
-          <a:xfrm>
-            <a:off x="6703799" y="4169664"/>
-            <a:ext cx="543652" cy="384048"/>
+          <p:cNvPr id="64" name="Text 62"/>
+          <p:cNvSpPr/>
+          <p:nvPr/>
+        </p:nvSpPr>
+        <p:spPr>
+          <a:xfrm>
+            <a:off x="7396793" y="4169664"/>
+            <a:ext cx="493776" cy="384048"/>
           </a:xfrm>
           <a:prstGeom prst="rect">
             <a:avLst/>
@@ -30267,7 +30177,7 @@
                 <a:ea typeface="Trebuchet MS" pitchFamily="34" charset="-122"/>
                 <a:cs typeface="Trebuchet MS" pitchFamily="34" charset="-120"/>
               </a:rPr>
-              <a:t>i</a:t>
+              <a:t>e</a:t>
             </a:r>
             <a:endParaRPr lang="en-US" sz="900" dirty="0"/>
           </a:p>
@@ -30275,14 +30185,14 @@
       </p:sp>
       <p:sp>
         <p:nvSpPr>
-          <p:cNvPr id="64" name="Shape 62"/>
-          <p:cNvSpPr/>
-          <p:nvPr/>
-        </p:nvSpPr>
-        <p:spPr>
-          <a:xfrm>
-            <a:off x="7297743" y="4169664"/>
-            <a:ext cx="543652" cy="384048"/>
+          <p:cNvPr id="65" name="Shape 63"/>
+          <p:cNvSpPr/>
+          <p:nvPr/>
+        </p:nvSpPr>
+        <p:spPr>
+          <a:xfrm>
+            <a:off x="7941212" y="4169664"/>
+            <a:ext cx="493776" cy="384048"/>
           </a:xfrm>
           <a:prstGeom prst="rect">
             <a:avLst>
@@ -30302,14 +30212,14 @@
       </p:sp>
       <p:sp>
         <p:nvSpPr>
-          <p:cNvPr id="65" name="Text 63"/>
-          <p:cNvSpPr/>
-          <p:nvPr/>
-        </p:nvSpPr>
-        <p:spPr>
-          <a:xfrm>
-            <a:off x="7297743" y="4169664"/>
-            <a:ext cx="543652" cy="384048"/>
+          <p:cNvPr id="66" name="Text 64"/>
+          <p:cNvSpPr/>
+          <p:nvPr/>
+        </p:nvSpPr>
+        <p:spPr>
+          <a:xfrm>
+            <a:off x="7941212" y="4169664"/>
+            <a:ext cx="493776" cy="384048"/>
           </a:xfrm>
           <a:prstGeom prst="rect">
             <a:avLst/>
@@ -30333,73 +30243,7 @@
                 <a:ea typeface="Trebuchet MS" pitchFamily="34" charset="-122"/>
                 <a:cs typeface="Trebuchet MS" pitchFamily="34" charset="-120"/>
               </a:rPr>
-              <a:t>b</a:t>
-            </a:r>
-            <a:endParaRPr lang="en-US" sz="900" dirty="0"/>
-          </a:p>
-        </p:txBody>
-      </p:sp>
-      <p:sp>
-        <p:nvSpPr>
-          <p:cNvPr id="66" name="Shape 64"/>
-          <p:cNvSpPr/>
-          <p:nvPr/>
-        </p:nvSpPr>
-        <p:spPr>
-          <a:xfrm>
-            <a:off x="7891688" y="4169664"/>
-            <a:ext cx="543652" cy="384048"/>
-          </a:xfrm>
-          <a:prstGeom prst="rect">
-            <a:avLst>
-              <a:gd name="adj" fmla="val 9524"/>
-            </a:avLst>
-          </a:prstGeom>
-          <a:solidFill>
-            <a:srgbClr val="FFFFFF"/>
-          </a:solidFill>
-          <a:ln w="12700">
-            <a:solidFill>
-              <a:srgbClr val="DB2777"/>
-            </a:solidFill>
-            <a:prstDash val="solid"/>
-          </a:ln>
-        </p:spPr>
-      </p:sp>
-      <p:sp>
-        <p:nvSpPr>
-          <p:cNvPr id="67" name="Text 65"/>
-          <p:cNvSpPr/>
-          <p:nvPr/>
-        </p:nvSpPr>
-        <p:spPr>
-          <a:xfrm>
-            <a:off x="7891688" y="4169664"/>
-            <a:ext cx="543652" cy="384048"/>
-          </a:xfrm>
-          <a:prstGeom prst="rect">
-            <a:avLst/>
-          </a:prstGeom>
-          <a:noFill/>
-          <a:ln/>
-        </p:spPr>
-        <p:txBody>
-          <a:bodyPr wrap="square" lIns="0" tIns="0" rIns="0" bIns="0" rtlCol="0" anchor="ctr"/>
-          <a:lstStyle/>
-          <a:p>
-            <a:pPr algn="ctr" indent="0" marL="0">
-              <a:buNone/>
-            </a:pPr>
-            <a:r>
-              <a:rPr lang="en-US" sz="900" b="1" dirty="0">
-                <a:solidFill>
-                  <a:srgbClr val="9D174D"/>
-                </a:solidFill>
-                <a:latin typeface="Trebuchet MS" pitchFamily="34" charset="0"/>
-                <a:ea typeface="Trebuchet MS" pitchFamily="34" charset="-122"/>
-                <a:cs typeface="Trebuchet MS" pitchFamily="34" charset="-120"/>
-              </a:rPr>
-              <a:t>le</a:t>
+              <a:t>ss</a:t>
             </a:r>
             <a:endParaRPr lang="en-US" sz="900" dirty="0"/>
           </a:p>
@@ -30691,7 +30535,7 @@
                 <a:ea typeface="Calibri" pitchFamily="34" charset="-122"/>
                 <a:cs typeface="Calibri" pitchFamily="34" charset="-120"/>
               </a:rPr>
-              <a:t>Word Labs  •  wordlabs.app  •  Root: 'express' = to push or press out</a:t>
+              <a:t>Word Labs  •  wordlabs.app  •  Root: 'express' = to push or squeeze out</a:t>
             </a:r>
             <a:endParaRPr lang="en-US" sz="800" dirty="0"/>
           </a:p>
@@ -30830,7 +30674,7 @@
                 <a:ea typeface="Trebuchet MS" pitchFamily="34" charset="-122"/>
                 <a:cs typeface="Trebuchet MS" pitchFamily="34" charset="-120"/>
               </a:rPr>
-              <a:t>expression</a:t>
+              <a:t>expressly</a:t>
             </a:r>
             <a:endParaRPr lang="en-US" sz="2800" dirty="0"/>
           </a:p>
@@ -31518,7 +31362,7 @@
                 <a:ea typeface="Calibri" pitchFamily="34" charset="-122"/>
                 <a:cs typeface="Calibri" pitchFamily="34" charset="-120"/>
               </a:rPr>
-              <a:t>Word Labs  •  wordlabs.app  •  Root: 'express' = to push or press out</a:t>
+              <a:t>Word Labs  •  wordlabs.app  •  Root: 'express' = to push or squeeze out</a:t>
             </a:r>
             <a:endParaRPr lang="en-US" sz="800" dirty="0"/>
           </a:p>
@@ -31657,7 +31501,7 @@
                 <a:ea typeface="Trebuchet MS" pitchFamily="34" charset="-122"/>
                 <a:cs typeface="Trebuchet MS" pitchFamily="34" charset="-120"/>
               </a:rPr>
-              <a:t>expression</a:t>
+              <a:t>expressly</a:t>
             </a:r>
             <a:endParaRPr lang="en-US" sz="2800" dirty="0"/>
           </a:p>
@@ -31835,7 +31679,7 @@
                 <a:ea typeface="Calibri" pitchFamily="34" charset="-122"/>
                 <a:cs typeface="Calibri" pitchFamily="34" charset="-120"/>
               </a:rPr>
-              <a:t>to push or press out</a:t>
+              <a:t>to push or squeeze out</a:t>
             </a:r>
             <a:endParaRPr lang="en-US" sz="850" dirty="0"/>
           </a:p>
@@ -31908,7 +31752,7 @@
                 <a:ea typeface="Trebuchet MS" pitchFamily="34" charset="-122"/>
                 <a:cs typeface="Trebuchet MS" pitchFamily="34" charset="-120"/>
               </a:rPr>
-              <a:t>ion</a:t>
+              <a:t>ly</a:t>
             </a:r>
             <a:endParaRPr lang="en-US" sz="1300" dirty="0"/>
           </a:p>
@@ -31947,7 +31791,7 @@
                 <a:ea typeface="Calibri" pitchFamily="34" charset="-122"/>
                 <a:cs typeface="Calibri" pitchFamily="34" charset="-120"/>
               </a:rPr>
-              <a:t>act or result of</a:t>
+              <a:t>in a particular way</a:t>
             </a:r>
             <a:endParaRPr lang="en-US" sz="850" dirty="0"/>
           </a:p>
@@ -32503,7 +32347,7 @@
                 <a:ea typeface="Calibri" pitchFamily="34" charset="-122"/>
                 <a:cs typeface="Calibri" pitchFamily="34" charset="-120"/>
               </a:rPr>
-              <a:t>Word Labs  •  wordlabs.app  •  Root: 'express' = to push or press out</a:t>
+              <a:t>Word Labs  •  wordlabs.app  •  Root: 'express' = to push or squeeze out</a:t>
             </a:r>
             <a:endParaRPr lang="en-US" sz="800" dirty="0"/>
           </a:p>
@@ -32642,7 +32486,7 @@
                 <a:ea typeface="Trebuchet MS" pitchFamily="34" charset="-122"/>
                 <a:cs typeface="Trebuchet MS" pitchFamily="34" charset="-120"/>
               </a:rPr>
-              <a:t>expression</a:t>
+              <a:t>expressly</a:t>
             </a:r>
             <a:endParaRPr lang="en-US" sz="2800" dirty="0"/>
           </a:p>
@@ -32820,7 +32664,7 @@
                 <a:ea typeface="Calibri" pitchFamily="34" charset="-122"/>
                 <a:cs typeface="Calibri" pitchFamily="34" charset="-120"/>
               </a:rPr>
-              <a:t>to push or press out</a:t>
+              <a:t>to push or squeeze out</a:t>
             </a:r>
             <a:endParaRPr lang="en-US" sz="850" dirty="0"/>
           </a:p>
@@ -32893,7 +32737,7 @@
                 <a:ea typeface="Trebuchet MS" pitchFamily="34" charset="-122"/>
                 <a:cs typeface="Trebuchet MS" pitchFamily="34" charset="-120"/>
               </a:rPr>
-              <a:t>ion</a:t>
+              <a:t>ly</a:t>
             </a:r>
             <a:endParaRPr lang="en-US" sz="1300" dirty="0"/>
           </a:p>
@@ -32932,7 +32776,7 @@
                 <a:ea typeface="Calibri" pitchFamily="34" charset="-122"/>
                 <a:cs typeface="Calibri" pitchFamily="34" charset="-120"/>
               </a:rPr>
-              <a:t>act or result of</a:t>
+              <a:t>in a particular way</a:t>
             </a:r>
             <a:endParaRPr lang="en-US" sz="850" dirty="0"/>
           </a:p>
@@ -33301,7 +33145,7 @@
                 <a:ea typeface="Trebuchet MS" pitchFamily="34" charset="-122"/>
                 <a:cs typeface="Trebuchet MS" pitchFamily="34" charset="-120"/>
               </a:rPr>
-              <a:t>ion</a:t>
+              <a:t>ly</a:t>
             </a:r>
             <a:endParaRPr lang="en-US" sz="1400" dirty="0"/>
           </a:p>
@@ -33725,7 +33569,7 @@
                 <a:ea typeface="Calibri" pitchFamily="34" charset="-122"/>
                 <a:cs typeface="Calibri" pitchFamily="34" charset="-120"/>
               </a:rPr>
-              <a:t>Word Labs  •  wordlabs.app  •  Root: 'express' = to push or press out</a:t>
+              <a:t>Word Labs  •  wordlabs.app  •  Root: 'express' = to push or squeeze out</a:t>
             </a:r>
             <a:endParaRPr lang="en-US" sz="800" dirty="0"/>
           </a:p>
@@ -33864,7 +33708,7 @@
                 <a:ea typeface="Trebuchet MS" pitchFamily="34" charset="-122"/>
                 <a:cs typeface="Trebuchet MS" pitchFamily="34" charset="-120"/>
               </a:rPr>
-              <a:t>expression</a:t>
+              <a:t>expressly</a:t>
             </a:r>
             <a:endParaRPr lang="en-US" sz="2800" dirty="0"/>
           </a:p>
@@ -34042,7 +33886,7 @@
                 <a:ea typeface="Calibri" pitchFamily="34" charset="-122"/>
                 <a:cs typeface="Calibri" pitchFamily="34" charset="-120"/>
               </a:rPr>
-              <a:t>to push or press out</a:t>
+              <a:t>to push or squeeze out</a:t>
             </a:r>
             <a:endParaRPr lang="en-US" sz="850" dirty="0"/>
           </a:p>
@@ -34115,7 +33959,7 @@
                 <a:ea typeface="Trebuchet MS" pitchFamily="34" charset="-122"/>
                 <a:cs typeface="Trebuchet MS" pitchFamily="34" charset="-120"/>
               </a:rPr>
-              <a:t>ion</a:t>
+              <a:t>ly</a:t>
             </a:r>
             <a:endParaRPr lang="en-US" sz="1300" dirty="0"/>
           </a:p>
@@ -34154,7 +33998,7 @@
                 <a:ea typeface="Calibri" pitchFamily="34" charset="-122"/>
                 <a:cs typeface="Calibri" pitchFamily="34" charset="-120"/>
               </a:rPr>
-              <a:t>act or result of</a:t>
+              <a:t>in a particular way</a:t>
             </a:r>
             <a:endParaRPr lang="en-US" sz="850" dirty="0"/>
           </a:p>
@@ -34523,7 +34367,7 @@
                 <a:ea typeface="Trebuchet MS" pitchFamily="34" charset="-122"/>
                 <a:cs typeface="Trebuchet MS" pitchFamily="34" charset="-120"/>
               </a:rPr>
-              <a:t>ion</a:t>
+              <a:t>ly</a:t>
             </a:r>
             <a:endParaRPr lang="en-US" sz="1400" dirty="0"/>
           </a:p>
@@ -35059,46 +34903,7 @@
       </p:sp>
       <p:sp>
         <p:nvSpPr>
-          <p:cNvPr id="49" name="Text 47"/>
-          <p:cNvSpPr/>
-          <p:nvPr/>
-        </p:nvSpPr>
-        <p:spPr>
-          <a:xfrm>
-            <a:off x="6062472" y="4572000"/>
-            <a:ext cx="685800" cy="219456"/>
-          </a:xfrm>
-          <a:prstGeom prst="rect">
-            <a:avLst/>
-          </a:prstGeom>
-          <a:noFill/>
-          <a:ln/>
-        </p:spPr>
-        <p:txBody>
-          <a:bodyPr wrap="square" lIns="0" tIns="0" rIns="0" bIns="0" rtlCol="0" anchor="t"/>
-          <a:lstStyle/>
-          <a:p>
-            <a:pPr algn="ctr" indent="0" marL="0">
-              <a:buNone/>
-            </a:pPr>
-            <a:r>
-              <a:rPr lang="en-US" sz="750" i="1" dirty="0">
-                <a:solidFill>
-                  <a:srgbClr val="94A3B8"/>
-                </a:solidFill>
-                <a:latin typeface="Calibri" pitchFamily="34" charset="0"/>
-                <a:ea typeface="Calibri" pitchFamily="34" charset="-122"/>
-                <a:cs typeface="Calibri" pitchFamily="34" charset="-120"/>
-              </a:rPr>
-              <a:t>/sh/</a:t>
-            </a:r>
-            <a:endParaRPr lang="en-US" sz="750" dirty="0"/>
-          </a:p>
-        </p:txBody>
-      </p:sp>
-      <p:sp>
-        <p:nvSpPr>
-          <p:cNvPr id="50" name="Shape 48"/>
+          <p:cNvPr id="49" name="Shape 47"/>
           <p:cNvSpPr/>
           <p:nvPr/>
         </p:nvSpPr>
@@ -35125,7 +34930,7 @@
       </p:sp>
       <p:sp>
         <p:nvSpPr>
-          <p:cNvPr id="51" name="Text 49"/>
+          <p:cNvPr id="50" name="Text 48"/>
           <p:cNvSpPr/>
           <p:nvPr/>
         </p:nvSpPr>
@@ -35156,7 +34961,7 @@
                 <a:ea typeface="Trebuchet MS" pitchFamily="34" charset="-122"/>
                 <a:cs typeface="Trebuchet MS" pitchFamily="34" charset="-120"/>
               </a:rPr>
-              <a:t>io</a:t>
+              <a:t>l</a:t>
             </a:r>
             <a:endParaRPr lang="en-US" sz="900" dirty="0"/>
           </a:p>
@@ -35164,7 +34969,7 @@
       </p:sp>
       <p:sp>
         <p:nvSpPr>
-          <p:cNvPr id="52" name="Shape 50"/>
+          <p:cNvPr id="51" name="Shape 49"/>
           <p:cNvSpPr/>
           <p:nvPr/>
         </p:nvSpPr>
@@ -35191,7 +34996,7 @@
       </p:sp>
       <p:sp>
         <p:nvSpPr>
-          <p:cNvPr id="53" name="Text 51"/>
+          <p:cNvPr id="52" name="Text 50"/>
           <p:cNvSpPr/>
           <p:nvPr/>
         </p:nvSpPr>
@@ -35222,7 +35027,7 @@
                 <a:ea typeface="Trebuchet MS" pitchFamily="34" charset="-122"/>
                 <a:cs typeface="Trebuchet MS" pitchFamily="34" charset="-120"/>
               </a:rPr>
-              <a:t>n</a:t>
+              <a:t>y</a:t>
             </a:r>
             <a:endParaRPr lang="en-US" sz="900" dirty="0"/>
           </a:p>
@@ -35514,7 +35319,7 @@
                 <a:ea typeface="Calibri" pitchFamily="34" charset="-122"/>
                 <a:cs typeface="Calibri" pitchFamily="34" charset="-120"/>
               </a:rPr>
-              <a:t>Word Labs  •  wordlabs.app  •  Root: 'express' = to push or press out</a:t>
+              <a:t>Word Labs  •  wordlabs.app  •  Root: 'express' = to push or squeeze out</a:t>
             </a:r>
             <a:endParaRPr lang="en-US" sz="800" dirty="0"/>
           </a:p>
@@ -36683,7 +36488,7 @@
                 <a:ea typeface="Calibri" pitchFamily="34" charset="-122"/>
                 <a:cs typeface="Calibri" pitchFamily="34" charset="-120"/>
               </a:rPr>
-              <a:t>Word Labs  •  wordlabs.app  •  Root: 'express' = to push or press out</a:t>
+              <a:t>Word Labs  •  wordlabs.app  •  Root: 'express' = to push or squeeze out</a:t>
             </a:r>
             <a:endParaRPr lang="en-US" sz="800" dirty="0"/>
           </a:p>
@@ -37329,7 +37134,7 @@
                 <a:ea typeface="Trebuchet MS" pitchFamily="34" charset="-122"/>
                 <a:cs typeface="Trebuchet MS" pitchFamily="34" charset="-120"/>
               </a:rPr>
-              <a:t>over-</a:t>
+              <a:t>self-</a:t>
             </a:r>
             <a:endParaRPr lang="en-US" sz="1300" dirty="0"/>
           </a:p>
@@ -37482,7 +37287,7 @@
                 <a:ea typeface="Trebuchet MS" pitchFamily="34" charset="-122"/>
                 <a:cs typeface="Trebuchet MS" pitchFamily="34" charset="-120"/>
               </a:rPr>
-              <a:t>self-</a:t>
+              <a:t>over-</a:t>
             </a:r>
             <a:endParaRPr lang="en-US" sz="1300" dirty="0"/>
           </a:p>
@@ -37635,7 +37440,7 @@
                 <a:ea typeface="Trebuchet MS" pitchFamily="34" charset="-122"/>
                 <a:cs typeface="Trebuchet MS" pitchFamily="34" charset="-120"/>
               </a:rPr>
-              <a:t>un-</a:t>
+              <a:t>mis-</a:t>
             </a:r>
             <a:endParaRPr lang="en-US" sz="1300" dirty="0"/>
           </a:p>
@@ -38093,7 +37898,7 @@
                 <a:ea typeface="Trebuchet MS" pitchFamily="34" charset="-122"/>
                 <a:cs typeface="Trebuchet MS" pitchFamily="34" charset="-120"/>
               </a:rPr>
-              <a:t>inexpressible</a:t>
+              <a:t>inexpressive</a:t>
             </a:r>
             <a:endParaRPr lang="en-US" sz="1200" dirty="0"/>
           </a:p>
@@ -38159,7 +37964,7 @@
                 <a:ea typeface="Trebuchet MS" pitchFamily="34" charset="-122"/>
                 <a:cs typeface="Trebuchet MS" pitchFamily="34" charset="-120"/>
               </a:rPr>
-              <a:t>reexpression</a:t>
+              <a:t>reexpress</a:t>
             </a:r>
             <a:endParaRPr lang="en-US" sz="1200" dirty="0"/>
           </a:p>
@@ -38225,7 +38030,7 @@
                 <a:ea typeface="Trebuchet MS" pitchFamily="34" charset="-122"/>
                 <a:cs typeface="Trebuchet MS" pitchFamily="34" charset="-120"/>
               </a:rPr>
-              <a:t>overexpressive</a:t>
+              <a:t>expressiveness</a:t>
             </a:r>
             <a:endParaRPr lang="en-US" sz="1200" dirty="0"/>
           </a:p>
@@ -38291,7 +38096,7 @@
                 <a:ea typeface="Trebuchet MS" pitchFamily="34" charset="-122"/>
                 <a:cs typeface="Trebuchet MS" pitchFamily="34" charset="-120"/>
               </a:rPr>
-              <a:t>expressiveness</a:t>
+              <a:t>inexpressible</a:t>
             </a:r>
             <a:endParaRPr lang="en-US" sz="1200" dirty="0"/>
           </a:p>
@@ -38583,7 +38388,7 @@
                 <a:ea typeface="Calibri" pitchFamily="34" charset="-122"/>
                 <a:cs typeface="Calibri" pitchFamily="34" charset="-120"/>
               </a:rPr>
-              <a:t>Word Labs  •  wordlabs.app  •  Root: 'express' = to push or press out</a:t>
+              <a:t>Word Labs  •  wordlabs.app  •  Root: 'express' = to push or squeeze out</a:t>
             </a:r>
             <a:endParaRPr lang="en-US" sz="800" dirty="0"/>
           </a:p>
@@ -38747,7 +38552,7 @@
                 <a:ea typeface="Calibri" pitchFamily="34" charset="-122"/>
                 <a:cs typeface="Calibri" pitchFamily="34" charset="-120"/>
               </a:rPr>
-              <a:t>The core part of a word carrying its basic meaning. For example, 'express' means 'to push or press out'.</a:t>
+              <a:t>The core part of a word carrying its basic meaning. For example, 'express' means 'to push or squeeze out'.</a:t>
             </a:r>
             <a:endParaRPr lang="en-US" sz="1350" dirty="0"/>
           </a:p>
@@ -39367,7 +39172,7 @@
                 <a:ea typeface="Calibri" pitchFamily="34" charset="-122"/>
                 <a:cs typeface="Calibri" pitchFamily="34" charset="-120"/>
               </a:rPr>
-              <a:t>Word Labs  •  wordlabs.app  •  Root: 'express' = to push or press out</a:t>
+              <a:t>Word Labs  •  wordlabs.app  •  Root: 'express' = to push or squeeze out</a:t>
             </a:r>
             <a:endParaRPr lang="en-US" sz="800" dirty="0"/>
           </a:p>
@@ -39479,7 +39284,7 @@
                 <a:ea typeface="Calibri" pitchFamily="34" charset="-122"/>
                 <a:cs typeface="Calibri" pitchFamily="34" charset="-120"/>
               </a:rPr>
-              <a:t>1.  The root 'express' comes from Latin and means to push or press out.</a:t>
+              <a:t>1.  Adding the prefix 'in-' to 'expressive' creates a word meaning not expressive.</a:t>
             </a:r>
             <a:endParaRPr lang="en-US" sz="1300" dirty="0"/>
           </a:p>
@@ -39618,7 +39423,7 @@
                 <a:ea typeface="Calibri" pitchFamily="34" charset="-122"/>
                 <a:cs typeface="Calibri" pitchFamily="34" charset="-120"/>
               </a:rPr>
-              <a:t>2.  The word 'expressive' means to hide your feelings completely.</a:t>
+              <a:t>2.  The root 'express' originally came from a Greek word.</a:t>
             </a:r>
             <a:endParaRPr lang="en-US" sz="1300" dirty="0"/>
           </a:p>
@@ -39757,7 +39562,7 @@
                 <a:ea typeface="Calibri" pitchFamily="34" charset="-122"/>
                 <a:cs typeface="Calibri" pitchFamily="34" charset="-120"/>
               </a:rPr>
-              <a:t>3.  Adding the suffix '-ion' to 'express' makes the noun 'expression'.</a:t>
+              <a:t>3.  The suffix '-ion' turns the verb 'express' into a noun.</a:t>
             </a:r>
             <a:endParaRPr lang="en-US" sz="1300" dirty="0"/>
           </a:p>
@@ -39896,7 +39701,7 @@
                 <a:ea typeface="Calibri" pitchFamily="34" charset="-122"/>
                 <a:cs typeface="Calibri" pitchFamily="34" charset="-120"/>
               </a:rPr>
-              <a:t>4.  The prefix 'in-' can be added to make 'inexpressible', meaning something too big to put into words.</a:t>
+              <a:t>4.  The word 'expressive' means the same as the word 'expression'.</a:t>
             </a:r>
             <a:endParaRPr lang="en-US" sz="1300" dirty="0"/>
           </a:p>
@@ -39919,11 +39724,11 @@
             </a:avLst>
           </a:prstGeom>
           <a:solidFill>
-            <a:srgbClr val="DCFCE7"/>
-          </a:solidFill>
-          <a:ln w="12700">
-            <a:solidFill>
-              <a:srgbClr val="16A34A"/>
+            <a:srgbClr val="FEE2E2"/>
+          </a:solidFill>
+          <a:ln w="12700">
+            <a:solidFill>
+              <a:srgbClr val="DC2626"/>
             </a:solidFill>
             <a:prstDash val="solid"/>
           </a:ln>
@@ -39956,13 +39761,13 @@
             <a:r>
               <a:rPr lang="en-US" sz="1100" b="1" dirty="0">
                 <a:solidFill>
-                  <a:srgbClr val="16A34A"/>
+                  <a:srgbClr val="DC2626"/>
                 </a:solidFill>
                 <a:latin typeface="Trebuchet MS" pitchFamily="34" charset="0"/>
                 <a:ea typeface="Trebuchet MS" pitchFamily="34" charset="-122"/>
                 <a:cs typeface="Trebuchet MS" pitchFamily="34" charset="-120"/>
               </a:rPr>
-              <a:t>TRUE</a:t>
+              <a:t>FALSE</a:t>
             </a:r>
             <a:endParaRPr lang="en-US" sz="1100" dirty="0"/>
           </a:p>
@@ -40035,7 +39840,7 @@
                 <a:ea typeface="Calibri" pitchFamily="34" charset="-122"/>
                 <a:cs typeface="Calibri" pitchFamily="34" charset="-120"/>
               </a:rPr>
-              <a:t>5.  The root 'express' originally came from the Greek language.</a:t>
+              <a:t>5.  The root 'express' comes from a Latin word meaning to push or squeeze out.</a:t>
             </a:r>
             <a:endParaRPr lang="en-US" sz="1300" dirty="0"/>
           </a:p>
@@ -40058,11 +39863,11 @@
             </a:avLst>
           </a:prstGeom>
           <a:solidFill>
-            <a:srgbClr val="FEE2E2"/>
-          </a:solidFill>
-          <a:ln w="12700">
-            <a:solidFill>
-              <a:srgbClr val="DC2626"/>
+            <a:srgbClr val="DCFCE7"/>
+          </a:solidFill>
+          <a:ln w="12700">
+            <a:solidFill>
+              <a:srgbClr val="16A34A"/>
             </a:solidFill>
             <a:prstDash val="solid"/>
           </a:ln>
@@ -40095,13 +39900,13 @@
             <a:r>
               <a:rPr lang="en-US" sz="1100" b="1" dirty="0">
                 <a:solidFill>
-                  <a:srgbClr val="DC2626"/>
+                  <a:srgbClr val="16A34A"/>
                 </a:solidFill>
                 <a:latin typeface="Trebuchet MS" pitchFamily="34" charset="0"/>
                 <a:ea typeface="Trebuchet MS" pitchFamily="34" charset="-122"/>
                 <a:cs typeface="Trebuchet MS" pitchFamily="34" charset="-120"/>
               </a:rPr>
-              <a:t>FALSE</a:t>
+              <a:t>TRUE</a:t>
             </a:r>
             <a:endParaRPr lang="en-US" sz="1100" dirty="0"/>
           </a:p>
@@ -40393,7 +40198,7 @@
                 <a:ea typeface="Calibri" pitchFamily="34" charset="-122"/>
                 <a:cs typeface="Calibri" pitchFamily="34" charset="-120"/>
               </a:rPr>
-              <a:t>Word Labs  •  wordlabs.app  •  Root: 'express' = to push or press out</a:t>
+              <a:t>Word Labs  •  wordlabs.app  •  Root: 'express' = to push or squeeze out</a:t>
             </a:r>
             <a:endParaRPr lang="en-US" sz="800" dirty="0"/>
           </a:p>
@@ -40530,7 +40335,7 @@
                 <a:ea typeface="Trebuchet MS" pitchFamily="34" charset="-122"/>
                 <a:cs typeface="Trebuchet MS" pitchFamily="34" charset="-120"/>
               </a:rPr>
-              <a:t>to push or press out</a:t>
+              <a:t>to push or squeeze out</a:t>
             </a:r>
             <a:endParaRPr lang="en-US" sz="2000" dirty="0"/>
           </a:p>
@@ -40938,7 +40743,7 @@
                 <a:ea typeface="Trebuchet MS" pitchFamily="34" charset="-122"/>
                 <a:cs typeface="Trebuchet MS" pitchFamily="34" charset="-120"/>
               </a:rPr>
-              <a:t>inexpressible</a:t>
+              <a:t>inexpressive</a:t>
             </a:r>
             <a:endParaRPr lang="en-US" sz="1300" dirty="0"/>
           </a:p>
@@ -41004,7 +40809,7 @@
                 <a:ea typeface="Trebuchet MS" pitchFamily="34" charset="-122"/>
                 <a:cs typeface="Trebuchet MS" pitchFamily="34" charset="-120"/>
               </a:rPr>
-              <a:t>reexpression</a:t>
+              <a:t>reexpress</a:t>
             </a:r>
             <a:endParaRPr lang="en-US" sz="1300" dirty="0"/>
           </a:p>
@@ -41070,7 +40875,7 @@
                 <a:ea typeface="Trebuchet MS" pitchFamily="34" charset="-122"/>
                 <a:cs typeface="Trebuchet MS" pitchFamily="34" charset="-120"/>
               </a:rPr>
-              <a:t>overexpressive</a:t>
+              <a:t>expressiveness</a:t>
             </a:r>
             <a:endParaRPr lang="en-US" sz="1300" dirty="0"/>
           </a:p>
@@ -41362,7 +41167,7 @@
                 <a:ea typeface="Calibri" pitchFamily="34" charset="-122"/>
                 <a:cs typeface="Calibri" pitchFamily="34" charset="-120"/>
               </a:rPr>
-              <a:t>Word Labs  •  wordlabs.app  •  Root: 'express' = to push or press out</a:t>
+              <a:t>Word Labs  •  wordlabs.app  •  Root: 'express' = to push or squeeze out</a:t>
             </a:r>
             <a:endParaRPr lang="en-US" sz="800" dirty="0"/>
           </a:p>
@@ -42008,7 +41813,7 @@
                 <a:ea typeface="Trebuchet MS" pitchFamily="34" charset="-122"/>
                 <a:cs typeface="Trebuchet MS" pitchFamily="34" charset="-120"/>
               </a:rPr>
-              <a:t>over-</a:t>
+              <a:t>self-</a:t>
             </a:r>
             <a:endParaRPr lang="en-US" sz="1300" dirty="0"/>
           </a:p>
@@ -42161,7 +41966,7 @@
                 <a:ea typeface="Trebuchet MS" pitchFamily="34" charset="-122"/>
                 <a:cs typeface="Trebuchet MS" pitchFamily="34" charset="-120"/>
               </a:rPr>
-              <a:t>self-</a:t>
+              <a:t>over-</a:t>
             </a:r>
             <a:endParaRPr lang="en-US" sz="1300" dirty="0"/>
           </a:p>
@@ -42314,7 +42119,7 @@
                 <a:ea typeface="Trebuchet MS" pitchFamily="34" charset="-122"/>
                 <a:cs typeface="Trebuchet MS" pitchFamily="34" charset="-120"/>
               </a:rPr>
-              <a:t>un-</a:t>
+              <a:t>mis-</a:t>
             </a:r>
             <a:endParaRPr lang="en-US" sz="1300" dirty="0"/>
           </a:p>
@@ -43136,7 +42941,7 @@
                 <a:ea typeface="Calibri" pitchFamily="34" charset="-122"/>
                 <a:cs typeface="Calibri" pitchFamily="34" charset="-120"/>
               </a:rPr>
-              <a:t>Word Labs  •  wordlabs.app  •  Root: 'express' = to push or press out</a:t>
+              <a:t>Word Labs  •  wordlabs.app  •  Root: 'express' = to push or squeeze out</a:t>
             </a:r>
             <a:endParaRPr lang="en-US" sz="800" dirty="0"/>
           </a:p>
@@ -43314,7 +43119,7 @@
                 <a:ea typeface="Calibri" pitchFamily="34" charset="-122"/>
                 <a:cs typeface="Calibri" pitchFamily="34" charset="-120"/>
               </a:rPr>
-              <a:t>Done in a very clear and direct way, leaving no doubt.</a:t>
+              <a:t>Done clearly and on purpose, with a specific meaning intended.</a:t>
             </a:r>
             <a:endParaRPr lang="en-US" sz="1200" dirty="0"/>
           </a:p>
@@ -43453,7 +43258,7 @@
                 <a:ea typeface="Calibri" pitchFamily="34" charset="-122"/>
                 <a:cs typeface="Calibri" pitchFamily="34" charset="-120"/>
               </a:rPr>
-              <a:t>To show or communicate your thoughts and feelings clearly.</a:t>
+              <a:t>To show or share your thoughts and feelings through words, art, or actions.</a:t>
             </a:r>
             <a:endParaRPr lang="en-US" sz="1200" dirty="0"/>
           </a:p>
@@ -43592,7 +43397,7 @@
                 <a:ea typeface="Calibri" pitchFamily="34" charset="-122"/>
                 <a:cs typeface="Calibri" pitchFamily="34" charset="-120"/>
               </a:rPr>
-              <a:t>Showing feelings too much or in an exaggerated way.</a:t>
+              <a:t>The quality of being able to show feelings and ideas very well.</a:t>
             </a:r>
             <a:endParaRPr lang="en-US" sz="1200" dirty="0"/>
           </a:p>
@@ -43731,7 +43536,7 @@
                 <a:ea typeface="Calibri" pitchFamily="34" charset="-122"/>
                 <a:cs typeface="Calibri" pitchFamily="34" charset="-120"/>
               </a:rPr>
-              <a:t>Showing feelings or ideas in a clear and strong way.</a:t>
+              <a:t>Showing feelings and emotions clearly and strongly.</a:t>
             </a:r>
             <a:endParaRPr lang="en-US" sz="1200" dirty="0"/>
           </a:p>
@@ -43804,7 +43609,7 @@
                 <a:ea typeface="Trebuchet MS" pitchFamily="34" charset="-122"/>
                 <a:cs typeface="Trebuchet MS" pitchFamily="34" charset="-120"/>
               </a:rPr>
-              <a:t>inexpressible</a:t>
+              <a:t>inexpressive</a:t>
             </a:r>
             <a:endParaRPr lang="en-US" sz="1200" dirty="0"/>
           </a:p>
@@ -43870,7 +43675,7 @@
                 <a:ea typeface="Calibri" pitchFamily="34" charset="-122"/>
                 <a:cs typeface="Calibri" pitchFamily="34" charset="-120"/>
               </a:rPr>
-              <a:t>Showing or saying something again in a new way.</a:t>
+              <a:t>To say or show the same idea again in a different way.</a:t>
             </a:r>
             <a:endParaRPr lang="en-US" sz="1200" dirty="0"/>
           </a:p>
@@ -43943,7 +43748,7 @@
                 <a:ea typeface="Trebuchet MS" pitchFamily="34" charset="-122"/>
                 <a:cs typeface="Trebuchet MS" pitchFamily="34" charset="-120"/>
               </a:rPr>
-              <a:t>reexpression</a:t>
+              <a:t>reexpress</a:t>
             </a:r>
             <a:endParaRPr lang="en-US" sz="1200" dirty="0"/>
           </a:p>
@@ -44009,7 +43814,7 @@
                 <a:ea typeface="Calibri" pitchFamily="34" charset="-122"/>
                 <a:cs typeface="Calibri" pitchFamily="34" charset="-120"/>
               </a:rPr>
-              <a:t>A feeling so strong it cannot be put into words.</a:t>
+              <a:t>Not showing feelings or emotions very clearly.</a:t>
             </a:r>
             <a:endParaRPr lang="en-US" sz="1200" dirty="0"/>
           </a:p>
@@ -44082,7 +43887,7 @@
                 <a:ea typeface="Trebuchet MS" pitchFamily="34" charset="-122"/>
                 <a:cs typeface="Trebuchet MS" pitchFamily="34" charset="-120"/>
               </a:rPr>
-              <a:t>overexpressive</a:t>
+              <a:t>expressiveness</a:t>
             </a:r>
             <a:endParaRPr lang="en-US" sz="1200" dirty="0"/>
           </a:p>
@@ -44148,7 +43953,7 @@
                 <a:ea typeface="Calibri" pitchFamily="34" charset="-122"/>
                 <a:cs typeface="Calibri" pitchFamily="34" charset="-120"/>
               </a:rPr>
-              <a:t>The way you show a feeling or idea through words, face, or art.</a:t>
+              <a:t>A feeling or idea that is shown or communicated to others.</a:t>
             </a:r>
             <a:endParaRPr lang="en-US" sz="1200" dirty="0"/>
           </a:p>
@@ -44440,7 +44245,7 @@
                 <a:ea typeface="Calibri" pitchFamily="34" charset="-122"/>
                 <a:cs typeface="Calibri" pitchFamily="34" charset="-120"/>
               </a:rPr>
-              <a:t>Word Labs  •  wordlabs.app  •  Root: 'express' = to push or press out</a:t>
+              <a:t>Word Labs  •  wordlabs.app  •  Root: 'express' = to push or squeeze out</a:t>
             </a:r>
             <a:endParaRPr lang="en-US" sz="800" dirty="0"/>
           </a:p>
@@ -44643,7 +44448,7 @@
                 <a:ea typeface="Calibri" pitchFamily="34" charset="-122"/>
                 <a:cs typeface="Calibri" pitchFamily="34" charset="-120"/>
               </a:rPr>
-              <a:t>The artist used bright colours to express her feelings of joy in the painting.</a:t>
+              <a:t>The artist used bright colours to express her feelings about the ocean.</a:t>
             </a:r>
             <a:endParaRPr lang="en-US" sz="1500" dirty="0"/>
           </a:p>
@@ -44807,7 +44612,7 @@
                 <a:ea typeface="Calibri" pitchFamily="34" charset="-122"/>
                 <a:cs typeface="Calibri" pitchFamily="34" charset="-120"/>
               </a:rPr>
-              <a:t>His facial expression told us he was surprised by the birthday party.</a:t>
+              <a:t>His facial expression showed just how surprised he was by the birthday party.</a:t>
             </a:r>
             <a:endParaRPr lang="en-US" sz="1500" dirty="0"/>
           </a:p>
@@ -44971,7 +44776,7 @@
                 <a:ea typeface="Calibri" pitchFamily="34" charset="-122"/>
                 <a:cs typeface="Calibri" pitchFamily="34" charset="-120"/>
               </a:rPr>
-              <a:t>The drama teacher encouraged the students to be expressive when performing on stage.</a:t>
+              <a:t>The expressive dancer moved her arms and body to tell the whole story without any words.</a:t>
             </a:r>
             <a:endParaRPr lang="en-US" sz="1500" dirty="0"/>
           </a:p>
